--- a/files/臻畅-2026Q3-项目汇报-浅色版-20261018.pptx
+++ b/files/臻畅-2026Q3-项目汇报-浅色版-20261018.pptx
@@ -5071,7 +5071,7 @@
                 <a:latin typeface="Arial"/>
                 <a:ea typeface="微软雅黑"/>
               </a:rPr>
-              <a:t>37.85</a:t>
+              <a:t>40.18</a:t>
             </a:r>
             <a:r>
               <a:rPr sz="1050" b="1">
@@ -5170,7 +5170,7 @@
                 <a:latin typeface="微软雅黑"/>
                 <a:ea typeface="微软雅黑"/>
               </a:rPr>
-              <a:t>未定价 7 行（S56 首单）</a:t>
+              <a:t>含 S56 首单 2.32 万（10/18 定价）</a:t>
             </a:r>
           </a:p>
         </p:txBody>
@@ -5528,7 +5528,7 @@
                 <a:latin typeface="微软雅黑"/>
                 <a:ea typeface="微软雅黑"/>
               </a:rPr>
-              <a:t>LEV1 17.97 万（47.5%）+ VFe32 9.88 万（26.1%）= 73.6%；EHEA 7.77 万（20.5%）已开始批量。三者合计 95.5%，新定点尚未形成收入。</a:t>
+              <a:t>LEV1 17.97 万（44.7%）+ VFe32 9.88 万（24.6%）= 69.3%；EHEA 7.77 万（19.3%）已开始批量，S56 定价后进账 2.32 万（5.8%）。三者合计 93.6%。</a:t>
             </a:r>
           </a:p>
         </p:txBody>
@@ -5661,7 +5661,7 @@
                 <a:latin typeface="微软雅黑"/>
                 <a:ea typeface="微软雅黑"/>
               </a:rPr>
-              <a:t>最大隐患：EHEA 质量 + 定价未闭环</a:t>
+              <a:t>最大隐患：EHEA 质量 + ROX01 定价</a:t>
             </a:r>
           </a:p>
         </p:txBody>
@@ -5707,7 +5707,7 @@
                 <a:latin typeface="微软雅黑"/>
                 <a:ea typeface="微软雅黑"/>
               </a:rPr>
-              <a:t>EHEA 9/23 出货排定备注「目前有大质量问题」，涉 562,077 件；ROX01 已切换交付 6,500 件但售价未定；S56 首单 12,040 件单价仍为 0。</a:t>
+              <a:t>EHEA 9/23 出货排定备注「目前有大质量问题」，涉 562,077 件；ROX01 已切换交付 6,500 件但售价仍未定。S56 已于 10/18 定价、待客户签认。</a:t>
             </a:r>
           </a:p>
         </p:txBody>
@@ -9530,12 +9530,12 @@
             <a:r>
               <a:rPr sz="1000" b="1">
                 <a:solidFill>
-                  <a:srgbClr val="6B7280"/>
+                  <a:srgbClr val="171A20"/>
                 </a:solidFill>
                 <a:latin typeface="Arial"/>
                 <a:ea typeface="微软雅黑"/>
               </a:rPr>
-              <a:t>0.00</a:t>
+              <a:t>23,239.66</a:t>
             </a:r>
           </a:p>
         </p:txBody>
@@ -9581,7 +9581,7 @@
                 <a:latin typeface="微软雅黑"/>
                 <a:ea typeface="微软雅黑"/>
               </a:rPr>
-              <a:t>—</a:t>
+              <a:t>5.8%</a:t>
             </a:r>
           </a:p>
         </p:txBody>
@@ -9627,7 +9627,7 @@
                 <a:latin typeface="微软雅黑"/>
                 <a:ea typeface="微软雅黑"/>
               </a:rPr>
-              <a:t>9/16 定点；首单 PO 单价未定；报价核价中</a:t>
+              <a:t>9/16 定点；10/18 价格已出（毛利率18.9%）；首单已定价</a:t>
             </a:r>
           </a:p>
         </p:txBody>
@@ -10501,7 +10501,7 @@
                 <a:latin typeface="微软雅黑"/>
                 <a:ea typeface="微软雅黑"/>
               </a:rPr>
-              <a:t>注：订单金额取看板 PO 台账按 PO 日期 7/1–9/30 汇总（98 行 / 916,915 件 / 含税 ¥378,522.97）。S56 首单 PO4500127228 共 7 行、12,040 件单价全部为 0，未计入金额。</a:t>
+              <a:t>注：订单金额取看板 PO 台账按 PO 日期 7/1–9/30 汇总（98 行 / 916,915 件 / 含税 ¥378,522.97）。S56 首单 PO4500127228 共 7 行、12,040 件已按 10/18 价格表回填含税 ¥23,239.66。</a:t>
             </a:r>
           </a:p>
         </p:txBody>
@@ -14792,7 +14792,7 @@
                 <a:latin typeface="微软雅黑"/>
                 <a:ea typeface="微软雅黑"/>
               </a:rPr>
-              <a:t>98 行 PO / 916,915 件 / 含税 ¥378,522.97（按 PO 日期 7/1–9/30）</a:t>
+              <a:t>98 行 PO / 916,915 件 / 含税 ¥401,762.63（按 PO 日期 7/1–9/30）</a:t>
             </a:r>
           </a:p>
         </p:txBody>
@@ -14935,7 +14935,7 @@
         </p:nvSpPr>
         <p:spPr>
           <a:xfrm>
-            <a:off x="566928" y="1591056"/>
+            <a:off x="566928" y="1618488"/>
             <a:ext cx="868680" cy="274320"/>
           </a:xfrm>
           <a:prstGeom prst="rect">
@@ -14978,8 +14978,8 @@
         </p:nvSpPr>
         <p:spPr>
           <a:xfrm>
-            <a:off x="1527048" y="1600200"/>
-            <a:ext cx="5486400" cy="237744"/>
+            <a:off x="1527048" y="1572768"/>
+            <a:ext cx="5486400" cy="219456"/>
           </a:xfrm>
           <a:prstGeom prst="rect">
             <a:avLst/>
@@ -15022,7 +15022,7 @@
         </p:nvSpPr>
         <p:spPr>
           <a:xfrm>
-            <a:off x="7123176" y="1563624"/>
+            <a:off x="7123176" y="1527048"/>
             <a:ext cx="1417320" cy="274320"/>
           </a:xfrm>
           <a:prstGeom prst="rect">
@@ -15065,8 +15065,8 @@
         </p:nvSpPr>
         <p:spPr>
           <a:xfrm>
-            <a:off x="1527048" y="1810512"/>
-            <a:ext cx="2743200" cy="219456"/>
+            <a:off x="1527048" y="1783080"/>
+            <a:ext cx="2743200" cy="182880"/>
           </a:xfrm>
           <a:prstGeom prst="rect">
             <a:avLst/>
@@ -15088,7 +15088,7 @@
               </a:spcAft>
             </a:pPr>
             <a:r>
-              <a:rPr sz="860" b="0">
+              <a:rPr sz="819" b="0">
                 <a:solidFill>
                   <a:srgbClr val="6B7280"/>
                 </a:solidFill>
@@ -15108,7 +15108,7 @@
         </p:nvSpPr>
         <p:spPr>
           <a:xfrm>
-            <a:off x="566928" y="2103120"/>
+            <a:off x="566928" y="2130552"/>
             <a:ext cx="868680" cy="274320"/>
           </a:xfrm>
           <a:prstGeom prst="rect">
@@ -15151,8 +15151,8 @@
         </p:nvSpPr>
         <p:spPr>
           <a:xfrm>
-            <a:off x="1527048" y="2112264"/>
-            <a:ext cx="3017953" cy="237744"/>
+            <a:off x="1527048" y="2084832"/>
+            <a:ext cx="3017953" cy="219456"/>
           </a:xfrm>
           <a:prstGeom prst="rect">
             <a:avLst/>
@@ -15195,7 +15195,7 @@
         </p:nvSpPr>
         <p:spPr>
           <a:xfrm>
-            <a:off x="4654729" y="2075688"/>
+            <a:off x="4654729" y="2039112"/>
             <a:ext cx="1417320" cy="274320"/>
           </a:xfrm>
           <a:prstGeom prst="rect">
@@ -15238,8 +15238,8 @@
         </p:nvSpPr>
         <p:spPr>
           <a:xfrm>
-            <a:off x="1527048" y="2322576"/>
-            <a:ext cx="2743200" cy="219456"/>
+            <a:off x="1527048" y="2295144"/>
+            <a:ext cx="2743200" cy="182880"/>
           </a:xfrm>
           <a:prstGeom prst="rect">
             <a:avLst/>
@@ -15261,7 +15261,7 @@
               </a:spcAft>
             </a:pPr>
             <a:r>
-              <a:rPr sz="860" b="0">
+              <a:rPr sz="819" b="0">
                 <a:solidFill>
                   <a:srgbClr val="6B7280"/>
                 </a:solidFill>
@@ -15281,7 +15281,7 @@
         </p:nvSpPr>
         <p:spPr>
           <a:xfrm>
-            <a:off x="566928" y="2615184"/>
+            <a:off x="566928" y="2642616"/>
             <a:ext cx="868680" cy="274320"/>
           </a:xfrm>
           <a:prstGeom prst="rect">
@@ -15324,8 +15324,8 @@
         </p:nvSpPr>
         <p:spPr>
           <a:xfrm>
-            <a:off x="1527048" y="2624328"/>
-            <a:ext cx="2372707" cy="237744"/>
+            <a:off x="1527048" y="2596896"/>
+            <a:ext cx="2372707" cy="219456"/>
           </a:xfrm>
           <a:prstGeom prst="rect">
             <a:avLst/>
@@ -15368,7 +15368,7 @@
         </p:nvSpPr>
         <p:spPr>
           <a:xfrm>
-            <a:off x="4009483" y="2587752"/>
+            <a:off x="4009483" y="2551176"/>
             <a:ext cx="1417320" cy="274320"/>
           </a:xfrm>
           <a:prstGeom prst="rect">
@@ -15411,8 +15411,8 @@
         </p:nvSpPr>
         <p:spPr>
           <a:xfrm>
-            <a:off x="1527048" y="2834640"/>
-            <a:ext cx="2743200" cy="219456"/>
+            <a:off x="1527048" y="2807208"/>
+            <a:ext cx="2743200" cy="182880"/>
           </a:xfrm>
           <a:prstGeom prst="rect">
             <a:avLst/>
@@ -15434,7 +15434,7 @@
               </a:spcAft>
             </a:pPr>
             <a:r>
-              <a:rPr sz="860" b="0">
+              <a:rPr sz="819" b="0">
                 <a:solidFill>
                   <a:srgbClr val="6B7280"/>
                 </a:solidFill>
@@ -15454,7 +15454,7 @@
         </p:nvSpPr>
         <p:spPr>
           <a:xfrm>
-            <a:off x="566928" y="3127248"/>
+            <a:off x="566928" y="3154680"/>
             <a:ext cx="868680" cy="274320"/>
           </a:xfrm>
           <a:prstGeom prst="rect">
@@ -15497,8 +15497,8 @@
         </p:nvSpPr>
         <p:spPr>
           <a:xfrm>
-            <a:off x="1527048" y="3136392"/>
-            <a:ext cx="432562" cy="237744"/>
+            <a:off x="1527048" y="3108960"/>
+            <a:ext cx="432562" cy="219456"/>
           </a:xfrm>
           <a:prstGeom prst="rect">
             <a:avLst/>
@@ -15541,7 +15541,7 @@
         </p:nvSpPr>
         <p:spPr>
           <a:xfrm>
-            <a:off x="2069338" y="3099816"/>
+            <a:off x="2069338" y="3063240"/>
             <a:ext cx="1417320" cy="274320"/>
           </a:xfrm>
           <a:prstGeom prst="rect">
@@ -15584,8 +15584,8 @@
         </p:nvSpPr>
         <p:spPr>
           <a:xfrm>
-            <a:off x="1527048" y="3346704"/>
-            <a:ext cx="2743200" cy="219456"/>
+            <a:off x="1527048" y="3319272"/>
+            <a:ext cx="2743200" cy="182880"/>
           </a:xfrm>
           <a:prstGeom prst="rect">
             <a:avLst/>
@@ -15607,7 +15607,7 @@
               </a:spcAft>
             </a:pPr>
             <a:r>
-              <a:rPr sz="860" b="0">
+              <a:rPr sz="819" b="0">
                 <a:solidFill>
                   <a:srgbClr val="6B7280"/>
                 </a:solidFill>
@@ -15627,7 +15627,7 @@
         </p:nvSpPr>
         <p:spPr>
           <a:xfrm>
-            <a:off x="566928" y="3639312"/>
+            <a:off x="566928" y="3666744"/>
             <a:ext cx="868680" cy="274320"/>
           </a:xfrm>
           <a:prstGeom prst="rect">
@@ -15657,7 +15657,7 @@
                 <a:latin typeface="微软雅黑"/>
                 <a:ea typeface="微软雅黑"/>
               </a:rPr>
-              <a:t>ROX01</a:t>
+              <a:t>S56</a:t>
             </a:r>
           </a:p>
         </p:txBody>
@@ -15670,8 +15670,8 @@
         </p:nvSpPr>
         <p:spPr>
           <a:xfrm>
-            <a:off x="1527048" y="3648456"/>
-            <a:ext cx="239111" cy="237744"/>
+            <a:off x="1527048" y="3621024"/>
+            <a:ext cx="709688" cy="219456"/>
           </a:xfrm>
           <a:prstGeom prst="rect">
             <a:avLst/>
@@ -15714,7 +15714,7 @@
         </p:nvSpPr>
         <p:spPr>
           <a:xfrm>
-            <a:off x="1875887" y="3611880"/>
+            <a:off x="2346464" y="3575304"/>
             <a:ext cx="1417320" cy="274320"/>
           </a:xfrm>
           <a:prstGeom prst="rect">
@@ -15744,7 +15744,7 @@
                 <a:latin typeface="Arial"/>
                 <a:ea typeface="微软雅黑"/>
               </a:rPr>
-              <a:t>7,830 元</a:t>
+              <a:t>23,240 元</a:t>
             </a:r>
           </a:p>
         </p:txBody>
@@ -15757,8 +15757,8 @@
         </p:nvSpPr>
         <p:spPr>
           <a:xfrm>
-            <a:off x="1527048" y="3858768"/>
-            <a:ext cx="2743200" cy="219456"/>
+            <a:off x="1527048" y="3831336"/>
+            <a:ext cx="2743200" cy="182880"/>
           </a:xfrm>
           <a:prstGeom prst="rect">
             <a:avLst/>
@@ -15780,14 +15780,14 @@
               </a:spcAft>
             </a:pPr>
             <a:r>
-              <a:rPr sz="860" b="0">
+              <a:rPr sz="819" b="0">
                 <a:solidFill>
                   <a:srgbClr val="6B7280"/>
                 </a:solidFill>
                 <a:latin typeface="微软雅黑"/>
                 <a:ea typeface="微软雅黑"/>
               </a:rPr>
-              <a:t>29,500 件</a:t>
+              <a:t>12,040 件</a:t>
             </a:r>
           </a:p>
         </p:txBody>
@@ -15800,7 +15800,7 @@
         </p:nvSpPr>
         <p:spPr>
           <a:xfrm>
-            <a:off x="566928" y="4151376"/>
+            <a:off x="566928" y="4178808"/>
             <a:ext cx="868680" cy="274320"/>
           </a:xfrm>
           <a:prstGeom prst="rect">
@@ -15830,7 +15830,7 @@
                 <a:latin typeface="微软雅黑"/>
                 <a:ea typeface="微软雅黑"/>
               </a:rPr>
-              <a:t>ROX MY26</a:t>
+              <a:t>ROX01</a:t>
             </a:r>
           </a:p>
         </p:txBody>
@@ -15843,8 +15843,8 @@
         </p:nvSpPr>
         <p:spPr>
           <a:xfrm>
-            <a:off x="1527048" y="4160520"/>
-            <a:ext cx="27432" cy="237744"/>
+            <a:off x="1527048" y="4133087"/>
+            <a:ext cx="239111" cy="219456"/>
           </a:xfrm>
           <a:prstGeom prst="rect">
             <a:avLst/>
@@ -15887,7 +15887,7 @@
         </p:nvSpPr>
         <p:spPr>
           <a:xfrm>
-            <a:off x="1664207" y="4123944"/>
+            <a:off x="1875887" y="4087368"/>
             <a:ext cx="1417320" cy="274320"/>
           </a:xfrm>
           <a:prstGeom prst="rect">
@@ -15917,7 +15917,7 @@
                 <a:latin typeface="Arial"/>
                 <a:ea typeface="微软雅黑"/>
               </a:rPr>
-              <a:t>345 元</a:t>
+              <a:t>7,830 元</a:t>
             </a:r>
           </a:p>
         </p:txBody>
@@ -15930,8 +15930,8 @@
         </p:nvSpPr>
         <p:spPr>
           <a:xfrm>
-            <a:off x="1527048" y="4370832"/>
-            <a:ext cx="2743200" cy="219456"/>
+            <a:off x="1527048" y="4343400"/>
+            <a:ext cx="2743200" cy="182880"/>
           </a:xfrm>
           <a:prstGeom prst="rect">
             <a:avLst/>
@@ -15953,14 +15953,14 @@
               </a:spcAft>
             </a:pPr>
             <a:r>
-              <a:rPr sz="860" b="0">
+              <a:rPr sz="819" b="0">
                 <a:solidFill>
                   <a:srgbClr val="6B7280"/>
                 </a:solidFill>
                 <a:latin typeface="微软雅黑"/>
                 <a:ea typeface="微软雅黑"/>
               </a:rPr>
-              <a:t>1,000 件</a:t>
+              <a:t>29,500 件</a:t>
             </a:r>
           </a:p>
         </p:txBody>
@@ -15973,7 +15973,7 @@
         </p:nvSpPr>
         <p:spPr>
           <a:xfrm>
-            <a:off x="566928" y="4663440"/>
+            <a:off x="566928" y="4690872"/>
             <a:ext cx="868680" cy="274320"/>
           </a:xfrm>
           <a:prstGeom prst="rect">
@@ -16003,7 +16003,7 @@
                 <a:latin typeface="微软雅黑"/>
                 <a:ea typeface="微软雅黑"/>
               </a:rPr>
-              <a:t>S56</a:t>
+              <a:t>ROX MY26</a:t>
             </a:r>
           </a:p>
         </p:txBody>
@@ -16016,8 +16016,8 @@
         </p:nvSpPr>
         <p:spPr>
           <a:xfrm>
-            <a:off x="1527048" y="4672584"/>
-            <a:ext cx="27432" cy="237744"/>
+            <a:off x="1527048" y="4645152"/>
+            <a:ext cx="27432" cy="219456"/>
           </a:xfrm>
           <a:prstGeom prst="rect">
             <a:avLst/>
@@ -16060,7 +16060,7 @@
         </p:nvSpPr>
         <p:spPr>
           <a:xfrm>
-            <a:off x="1664207" y="4636008"/>
+            <a:off x="1664207" y="4599432"/>
             <a:ext cx="1417320" cy="274320"/>
           </a:xfrm>
           <a:prstGeom prst="rect">
@@ -16090,7 +16090,7 @@
                 <a:latin typeface="Arial"/>
                 <a:ea typeface="微软雅黑"/>
               </a:rPr>
-              <a:t>0 元（未定价）</a:t>
+              <a:t>345 元</a:t>
             </a:r>
           </a:p>
         </p:txBody>
@@ -16103,8 +16103,8 @@
         </p:nvSpPr>
         <p:spPr>
           <a:xfrm>
-            <a:off x="1527048" y="4882896"/>
-            <a:ext cx="2743200" cy="219456"/>
+            <a:off x="1527048" y="4855464"/>
+            <a:ext cx="2743200" cy="182880"/>
           </a:xfrm>
           <a:prstGeom prst="rect">
             <a:avLst/>
@@ -16126,14 +16126,14 @@
               </a:spcAft>
             </a:pPr>
             <a:r>
-              <a:rPr sz="860" b="0">
+              <a:rPr sz="819" b="0">
                 <a:solidFill>
                   <a:srgbClr val="6B7280"/>
                 </a:solidFill>
                 <a:latin typeface="微软雅黑"/>
                 <a:ea typeface="微软雅黑"/>
               </a:rPr>
-              <a:t>12,040 件 · 未定价</a:t>
+              <a:t>1,000 件</a:t>
             </a:r>
           </a:p>
         </p:txBody>
@@ -16265,7 +16265,7 @@
                 <a:latin typeface="微软雅黑"/>
                 <a:ea typeface="微软雅黑"/>
               </a:rPr>
-              <a:t>LEV1 + VFe32 = 27.85 万，占 73.6%。任一项目掉量，季度收入立刻失血。</a:t>
+              <a:t>LEV1 + VFe32 = 27.85 万，占 69.3%。任一项目掉量，季度收入立刻失血。</a:t>
             </a:r>
           </a:p>
           <a:p>
@@ -16328,7 +16328,7 @@
                 <a:latin typeface="微软雅黑"/>
                 <a:ea typeface="微软雅黑"/>
               </a:rPr>
-              <a:t>③ S56 未进金额</a:t>
+              <a:t>③ S56 已定价进账</a:t>
             </a:r>
           </a:p>
           <a:p>
@@ -16351,7 +16351,7 @@
                 <a:latin typeface="微软雅黑"/>
                 <a:ea typeface="微软雅黑"/>
               </a:rPr>
-              <a:t>12,040 件单价为 0，定价后才会体现；这也是 Q4 第一笔可见增量。</a:t>
+              <a:t>10/18 价格表落地，首单 12,040 件计入 2.32 万；Q4 起按年均 5 万套放大。</a:t>
             </a:r>
           </a:p>
         </p:txBody>
@@ -17150,7 +17150,7 @@
             <a:avLst/>
           </a:prstGeom>
           <a:solidFill>
-            <a:srgbClr val="E82127"/>
+            <a:srgbClr val="B46A00"/>
           </a:solidFill>
           <a:ln>
             <a:noFill/>
@@ -17194,7 +17194,7 @@
             <a:avLst/>
           </a:prstGeom>
           <a:solidFill>
-            <a:srgbClr val="E82127"/>
+            <a:srgbClr val="B46A00"/>
           </a:solidFill>
           <a:ln>
             <a:noFill/>
@@ -17261,7 +17261,7 @@
                 <a:latin typeface="Arial"/>
                 <a:ea typeface="微软雅黑"/>
               </a:rPr>
-              <a:t>P0</a:t>
+              <a:t>P1</a:t>
             </a:r>
           </a:p>
         </p:txBody>
@@ -17304,7 +17304,7 @@
                 <a:latin typeface="微软雅黑"/>
                 <a:ea typeface="微软雅黑"/>
               </a:rPr>
-              <a:t>S56 首单 12,040 件单价全为 0</a:t>
+              <a:t>S56 价格已出、待客户签认</a:t>
             </a:r>
           </a:p>
         </p:txBody>
@@ -17350,7 +17350,7 @@
                 <a:latin typeface="微软雅黑"/>
                 <a:ea typeface="微软雅黑"/>
               </a:rPr>
-              <a:t>PO4500127228 共 7 行，含税单价与金额均为 0（未定价）</a:t>
+              <a:t>13 件定点单价合计 15.9771 未税 / 18.0542 含税（毛利率约 18.9%），首单 7 行已回填 ¥23,239.66</a:t>
             </a:r>
           </a:p>
         </p:txBody>
@@ -17396,7 +17396,7 @@
                 <a:latin typeface="微软雅黑"/>
                 <a:ea typeface="微软雅黑"/>
               </a:rPr>
-              <a:t>收入无法确认、排产无依据；报价口径为毛利率 22.31%（年净利约 20 万），尚未与凯华签认</a:t>
+              <a:t>价格未经客户签认即无订单约束力；18.9% 低于原测算 22.31%，且 3 件为负毛利/微利（C上吸音棉3 −22.1%、C下吸音棉1 −1.6%、C上吸音棉2 +1.8%）</a:t>
             </a:r>
           </a:p>
         </p:txBody>
@@ -17447,12 +17447,12 @@
             <a:r>
               <a:rPr sz="919" b="1">
                 <a:solidFill>
-                  <a:srgbClr val="E82127"/>
-                </a:solidFill>
-                <a:latin typeface="微软雅黑"/>
-                <a:ea typeface="微软雅黑"/>
-              </a:rPr>
-              <a:t>本周内完成定价与单价回填</a:t>
+                  <a:srgbClr val="B46A00"/>
+                </a:solidFill>
+                <a:latin typeface="微软雅黑"/>
+                <a:ea typeface="微软雅黑"/>
+              </a:rPr>
+              <a:t>本周内取得签认，同时提报 3 件低毛利件的工艺降本</a:t>
             </a:r>
           </a:p>
         </p:txBody>
@@ -19276,7 +19276,7 @@
                 <a:latin typeface="微软雅黑"/>
                 <a:ea typeface="微软雅黑"/>
               </a:rPr>
-              <a:t>S56 定价与排产准备</a:t>
+              <a:t>S56 价格签认与排产</a:t>
             </a:r>
           </a:p>
         </p:txBody>
@@ -19322,7 +19322,7 @@
                 <a:latin typeface="微软雅黑"/>
                 <a:ea typeface="微软雅黑"/>
               </a:rPr>
-              <a:t>按毛利率 22.31% 与凯华确认单价 → 回填首单 PO → 刀模排版/打样确认 → 备料排产</a:t>
+              <a:t>取得客户对 13 件单价的签认 → 首单 PO 生效 → 刀模排版/打样确认 → 备料排产；同步启动 3 件低毛利件降本</a:t>
             </a:r>
           </a:p>
         </p:txBody>

--- a/files/臻畅-2026Q3-项目汇报-浅色版-20261018.pptx
+++ b/files/臻畅-2026Q3-项目汇报-浅色版-20261018.pptx
@@ -9627,7 +9627,7 @@
                 <a:latin typeface="微软雅黑"/>
                 <a:ea typeface="微软雅黑"/>
               </a:rPr>
-              <a:t>9/16 定点；10/18 价格已出（毛利率18.9%）；首单已定价</a:t>
+              <a:t>9/16 定点；10/18 出价（套含税19.29/毛利18.4%）；首单已定价</a:t>
             </a:r>
           </a:p>
         </p:txBody>
@@ -17350,7 +17350,7 @@
                 <a:latin typeface="微软雅黑"/>
                 <a:ea typeface="微软雅黑"/>
               </a:rPr>
-              <a:t>13 件定点单价合计 15.9771 未税 / 18.0542 含税（毛利率约 18.9%），首单 7 行已回填 ¥23,239.66</a:t>
+              <a:t>13 件、单车 16 件：套成本 13.9319 / 套含税 19.2886（毛利率 18.4%）；首单 7 行已回填 ¥23,239.66。⚠️ 表单合计行 15.9771/18.0542 未乘单车用量</a:t>
             </a:r>
           </a:p>
         </p:txBody>
@@ -17396,7 +17396,7 @@
                 <a:latin typeface="微软雅黑"/>
                 <a:ea typeface="微软雅黑"/>
               </a:rPr>
-              <a:t>价格未经客户签认即无订单约束力；18.9% 低于原测算 22.31%，且 3 件为负毛利/微利（C上吸音棉3 −22.1%、C下吸音棉1 −1.6%、C上吸音棉2 +1.8%）</a:t>
+              <a:t>未经客户签认即无订单约束力；18.4% 低于此前 22.31% 报价口径，且 3 件负毛利/微利（C上吸音棉3 −22.1%、C下吸音棉1 −1.6%、C上吸音棉2 +1.8%）</a:t>
             </a:r>
           </a:p>
         </p:txBody>

--- a/files/臻畅-2026Q3-项目汇报-浅色版-20261018.pptx
+++ b/files/臻畅-2026Q3-项目汇报-浅色版-20261018.pptx
@@ -5661,7 +5661,7 @@
                 <a:latin typeface="微软雅黑"/>
                 <a:ea typeface="微软雅黑"/>
               </a:rPr>
-              <a:t>最大隐患：EHEA 质量 + ROX01 定价</a:t>
+              <a:t>最大隐患：EHEA 质量 + 供应商未定</a:t>
             </a:r>
           </a:p>
         </p:txBody>
@@ -5707,7 +5707,7 @@
                 <a:latin typeface="微软雅黑"/>
                 <a:ea typeface="微软雅黑"/>
               </a:rPr>
-              <a:t>EHEA 9/23 出货排定备注「目前有大质量问题」，涉 562,077 件；ROX01 已切换交付 6,500 件但售价仍未定。S56 已于 10/18 定价、待客户签认。</a:t>
+              <a:t>EHEA 9/23 出货排定备注「目前有大质量问题」，涉 562,077 件；ZH5EM 10 件供应商待采购确认。ROX01 与 S56 价格均已落地（10/18）。</a:t>
             </a:r>
           </a:p>
         </p:txBody>
@@ -10455,7 +10455,7 @@
                 <a:latin typeface="微软雅黑"/>
                 <a:ea typeface="微软雅黑"/>
               </a:rPr>
-              <a:t>已切换交付 6,500 件；⚠️ 售价未确定</a:t>
+              <a:t>已定点定价；批量交付中；套含税 4.10、毛利 11.0%</a:t>
             </a:r>
           </a:p>
         </p:txBody>
@@ -17518,7 +17518,7 @@
             <a:avLst/>
           </a:prstGeom>
           <a:solidFill>
-            <a:srgbClr val="B46A00"/>
+            <a:srgbClr val="6B7280"/>
           </a:solidFill>
           <a:ln>
             <a:noFill/>
@@ -17562,7 +17562,7 @@
             <a:avLst/>
           </a:prstGeom>
           <a:solidFill>
-            <a:srgbClr val="B46A00"/>
+            <a:srgbClr val="6B7280"/>
           </a:solidFill>
           <a:ln>
             <a:noFill/>
@@ -17629,7 +17629,7 @@
                 <a:latin typeface="Arial"/>
                 <a:ea typeface="微软雅黑"/>
               </a:rPr>
-              <a:t>P1</a:t>
+              <a:t>P2</a:t>
             </a:r>
           </a:p>
         </p:txBody>
@@ -17672,7 +17672,7 @@
                 <a:latin typeface="微软雅黑"/>
                 <a:ea typeface="微软雅黑"/>
               </a:rPr>
-              <a:t>ROX01 已交付但售价未定</a:t>
+              <a:t>ROX01 定点价已下、合同与账期未落</a:t>
             </a:r>
           </a:p>
         </p:txBody>
@@ -17718,7 +17718,7 @@
                 <a:latin typeface="微软雅黑"/>
                 <a:ea typeface="微软雅黑"/>
               </a:rPr>
-              <a:t>已切换交付 6,500 件（4,000/1,000/1,500），9/9 起批量交付</a:t>
+              <a:t>4 件含税 0.70/1.30/0.30/0.08，套含税 4.10、毛利率 11.0%；年量 12,000 套、年产值 4.35 万</a:t>
             </a:r>
           </a:p>
         </p:txBody>
@@ -17764,7 +17764,7 @@
                 <a:latin typeface="微软雅黑"/>
                 <a:ea typeface="微软雅黑"/>
               </a:rPr>
-              <a:t>交付在前、定价在后，越拖越难谈；季度收入按 0.78 万暂计，存在调整风险</a:t>
+              <a:t>毛利率仅 11%，且无合同与账期（90 天承兑）文本；Q3 已交 29,500 件、0.78 万</a:t>
             </a:r>
           </a:p>
         </p:txBody>
@@ -17815,12 +17815,12 @@
             <a:r>
               <a:rPr sz="919" b="1">
                 <a:solidFill>
-                  <a:srgbClr val="B46A00"/>
-                </a:solidFill>
-                <a:latin typeface="微软雅黑"/>
-                <a:ea typeface="微软雅黑"/>
-              </a:rPr>
-              <a:t>商务口径定档，与交付量对齐</a:t>
+                  <a:srgbClr val="6B7280"/>
+                </a:solidFill>
+                <a:latin typeface="微软雅黑"/>
+                <a:ea typeface="微软雅黑"/>
+              </a:rPr>
+              <a:t>补合同与账期确认，按定点价对账</a:t>
             </a:r>
           </a:p>
         </p:txBody>
@@ -19067,8 +19067,8 @@
         </p:nvSpPr>
         <p:spPr>
           <a:xfrm>
-            <a:off x="5596128" y="1517904"/>
-            <a:ext cx="6400800" cy="548640"/>
+            <a:off x="5458968" y="1508760"/>
+            <a:ext cx="5943600" cy="566928"/>
           </a:xfrm>
           <a:prstGeom prst="rect">
             <a:avLst/>
@@ -19289,8 +19289,8 @@
         </p:nvSpPr>
         <p:spPr>
           <a:xfrm>
-            <a:off x="5596128" y="2194560"/>
-            <a:ext cx="6400800" cy="548640"/>
+            <a:off x="5458968" y="2185416"/>
+            <a:ext cx="5943600" cy="566928"/>
           </a:xfrm>
           <a:prstGeom prst="rect">
             <a:avLst/>
@@ -19511,8 +19511,8 @@
         </p:nvSpPr>
         <p:spPr>
           <a:xfrm>
-            <a:off x="5596128" y="2871216"/>
-            <a:ext cx="6400800" cy="548640"/>
+            <a:off x="5458968" y="2862072"/>
+            <a:ext cx="5943600" cy="566928"/>
           </a:xfrm>
           <a:prstGeom prst="rect">
             <a:avLst/>
@@ -19720,7 +19720,7 @@
                 <a:latin typeface="微软雅黑"/>
                 <a:ea typeface="微软雅黑"/>
               </a:rPr>
-              <a:t>ROX01 定价与量产交付</a:t>
+              <a:t>ROX01 合同与稳定交付</a:t>
             </a:r>
           </a:p>
         </p:txBody>
@@ -19733,8 +19733,8 @@
         </p:nvSpPr>
         <p:spPr>
           <a:xfrm>
-            <a:off x="5596128" y="3547872"/>
-            <a:ext cx="6400800" cy="548640"/>
+            <a:off x="5458968" y="3538728"/>
+            <a:ext cx="5943600" cy="566928"/>
           </a:xfrm>
           <a:prstGeom prst="rect">
             <a:avLst/>
@@ -19766,7 +19766,7 @@
                 <a:latin typeface="微软雅黑"/>
                 <a:ea typeface="微软雅黑"/>
               </a:rPr>
-              <a:t>商务定档 → 与已交付 6,500 件对齐 → 稳定拉动与对账</a:t>
+              <a:t>落合同与 90 天承兑账期 → 与已交付 29,500 件按定点价对账 → 稳定拉动（年 12,000 套）</a:t>
             </a:r>
           </a:p>
         </p:txBody>
@@ -19955,8 +19955,8 @@
         </p:nvSpPr>
         <p:spPr>
           <a:xfrm>
-            <a:off x="5596128" y="4224528"/>
-            <a:ext cx="6400800" cy="548640"/>
+            <a:off x="5458968" y="4215384"/>
+            <a:ext cx="5943600" cy="566928"/>
           </a:xfrm>
           <a:prstGeom prst="rect">
             <a:avLst/>
@@ -20177,8 +20177,8 @@
         </p:nvSpPr>
         <p:spPr>
           <a:xfrm>
-            <a:off x="5596128" y="4901184"/>
-            <a:ext cx="6400800" cy="548640"/>
+            <a:off x="5458968" y="4892040"/>
+            <a:ext cx="5943600" cy="566928"/>
           </a:xfrm>
           <a:prstGeom prst="rect">
             <a:avLst/>

--- a/files/臻畅-2026Q3-项目汇报-浅色版-20261018.pptx
+++ b/files/臻畅-2026Q3-项目汇报-浅色版-20261018.pptx
@@ -14,6 +14,7 @@
     <p:sldId id="262" r:id="rId13"/>
     <p:sldId id="263" r:id="rId14"/>
     <p:sldId id="264" r:id="rId15"/>
+    <p:sldId id="265" r:id="rId16"/>
   </p:sldIdLst>
   <p:sldSz cx="12191695" cy="6858000" type="screen4x3"/>
   <p:notesSz cx="6858000" cy="9144000"/>
@@ -3469,6 +3470,1762 @@
 </p:sld>
 </file>
 
+<file path=ppt/slides/slide10.xml><?xml version="1.0" encoding="utf-8"?>
+<p:sld xmlns:a="http://schemas.openxmlformats.org/drawingml/2006/main" xmlns:p="http://schemas.openxmlformats.org/presentationml/2006/main" xmlns:r="http://schemas.openxmlformats.org/officeDocument/2006/relationships">
+  <p:cSld>
+    <p:spTree>
+      <p:nvGrpSpPr>
+        <p:cNvPr id="1" name=""/>
+        <p:cNvGrpSpPr/>
+        <p:nvPr/>
+      </p:nvGrpSpPr>
+      <p:grpSpPr/>
+      <p:sp>
+        <p:nvSpPr>
+          <p:cNvPr id="2" name="Rectangle 1"/>
+          <p:cNvSpPr/>
+          <p:nvPr/>
+        </p:nvSpPr>
+        <p:spPr>
+          <a:xfrm>
+            <a:off x="0" y="0"/>
+            <a:ext cx="12191695" cy="6858000"/>
+          </a:xfrm>
+          <a:prstGeom prst="rect">
+            <a:avLst/>
+          </a:prstGeom>
+          <a:solidFill>
+            <a:srgbClr val="FFFFFF"/>
+          </a:solidFill>
+          <a:ln>
+            <a:noFill/>
+          </a:ln>
+          <a:effectLst/>
+        </p:spPr>
+        <p:style>
+          <a:lnRef idx="1">
+            <a:schemeClr val="accent1"/>
+          </a:lnRef>
+          <a:fillRef idx="3">
+            <a:schemeClr val="accent1"/>
+          </a:fillRef>
+          <a:effectRef idx="2">
+            <a:schemeClr val="accent1"/>
+          </a:effectRef>
+          <a:fontRef idx="minor">
+            <a:schemeClr val="lt1"/>
+          </a:fontRef>
+        </p:style>
+        <p:txBody>
+          <a:bodyPr rtlCol="0" anchor="ctr"/>
+          <a:lstStyle/>
+          <a:p>
+            <a:pPr algn="ctr"/>
+          </a:p>
+        </p:txBody>
+      </p:sp>
+      <p:sp>
+        <p:nvSpPr>
+          <p:cNvPr id="3" name="Rectangle 2"/>
+          <p:cNvSpPr/>
+          <p:nvPr/>
+        </p:nvSpPr>
+        <p:spPr>
+          <a:xfrm>
+            <a:off x="566928" y="420624"/>
+            <a:ext cx="86868" cy="402336"/>
+          </a:xfrm>
+          <a:prstGeom prst="rect">
+            <a:avLst/>
+          </a:prstGeom>
+          <a:solidFill>
+            <a:srgbClr val="E82127"/>
+          </a:solidFill>
+          <a:ln>
+            <a:noFill/>
+          </a:ln>
+          <a:effectLst/>
+        </p:spPr>
+        <p:style>
+          <a:lnRef idx="1">
+            <a:schemeClr val="accent1"/>
+          </a:lnRef>
+          <a:fillRef idx="3">
+            <a:schemeClr val="accent1"/>
+          </a:fillRef>
+          <a:effectRef idx="2">
+            <a:schemeClr val="accent1"/>
+          </a:effectRef>
+          <a:fontRef idx="minor">
+            <a:schemeClr val="lt1"/>
+          </a:fontRef>
+        </p:style>
+        <p:txBody>
+          <a:bodyPr rtlCol="0" anchor="ctr"/>
+          <a:lstStyle/>
+          <a:p>
+            <a:pPr algn="ctr"/>
+          </a:p>
+        </p:txBody>
+      </p:sp>
+      <p:sp>
+        <p:nvSpPr>
+          <p:cNvPr id="4" name="TextBox 3"/>
+          <p:cNvSpPr txBox="1"/>
+          <p:nvPr/>
+        </p:nvSpPr>
+        <p:spPr>
+          <a:xfrm>
+            <a:off x="786384" y="365760"/>
+            <a:ext cx="10780776" cy="457200"/>
+          </a:xfrm>
+          <a:prstGeom prst="rect">
+            <a:avLst/>
+          </a:prstGeom>
+          <a:noFill/>
+        </p:spPr>
+        <p:txBody>
+          <a:bodyPr wrap="square" anchor="t" lIns="0" rIns="0" tIns="0" bIns="0">
+            <a:noAutofit/>
+          </a:bodyPr>
+          <a:lstStyle/>
+          <a:p>
+            <a:pPr algn="l">
+              <a:spcBef>
+                <a:spcPts val="0"/>
+              </a:spcBef>
+              <a:spcAft>
+                <a:spcPts val="0"/>
+              </a:spcAft>
+            </a:pPr>
+            <a:r>
+              <a:rPr sz="2500" b="1">
+                <a:solidFill>
+                  <a:srgbClr val="171A20"/>
+                </a:solidFill>
+                <a:latin typeface="微软雅黑"/>
+                <a:ea typeface="微软雅黑"/>
+              </a:rPr>
+              <a:t>四季度计划</a:t>
+            </a:r>
+          </a:p>
+        </p:txBody>
+      </p:sp>
+      <p:sp>
+        <p:nvSpPr>
+          <p:cNvPr id="5" name="TextBox 4"/>
+          <p:cNvSpPr txBox="1"/>
+          <p:nvPr/>
+        </p:nvSpPr>
+        <p:spPr>
+          <a:xfrm>
+            <a:off x="795528" y="822960"/>
+            <a:ext cx="10780776" cy="292608"/>
+          </a:xfrm>
+          <a:prstGeom prst="rect">
+            <a:avLst/>
+          </a:prstGeom>
+          <a:noFill/>
+        </p:spPr>
+        <p:txBody>
+          <a:bodyPr wrap="square" anchor="t" lIns="0" rIns="0" tIns="0" bIns="0">
+            <a:noAutofit/>
+          </a:bodyPr>
+          <a:lstStyle/>
+          <a:p>
+            <a:pPr algn="l">
+              <a:spcBef>
+                <a:spcPts val="0"/>
+              </a:spcBef>
+              <a:spcAft>
+                <a:spcPts val="0"/>
+              </a:spcAft>
+            </a:pPr>
+            <a:r>
+              <a:rPr sz="1050" b="0">
+                <a:solidFill>
+                  <a:srgbClr val="6B7280"/>
+                </a:solidFill>
+                <a:latin typeface="微软雅黑"/>
+                <a:ea typeface="微软雅黑"/>
+              </a:rPr>
+              <a:t>按优先级：P0 = 不解决就影响收入或交付</a:t>
+            </a:r>
+          </a:p>
+        </p:txBody>
+      </p:sp>
+      <p:sp>
+        <p:nvSpPr>
+          <p:cNvPr id="6" name="Rectangle 5"/>
+          <p:cNvSpPr/>
+          <p:nvPr/>
+        </p:nvSpPr>
+        <p:spPr>
+          <a:xfrm>
+            <a:off x="566928" y="1170432"/>
+            <a:ext cx="11055096" cy="10972"/>
+          </a:xfrm>
+          <a:prstGeom prst="rect">
+            <a:avLst/>
+          </a:prstGeom>
+          <a:solidFill>
+            <a:srgbClr val="E3E6EB"/>
+          </a:solidFill>
+          <a:ln>
+            <a:noFill/>
+          </a:ln>
+          <a:effectLst/>
+        </p:spPr>
+        <p:style>
+          <a:lnRef idx="1">
+            <a:schemeClr val="accent1"/>
+          </a:lnRef>
+          <a:fillRef idx="3">
+            <a:schemeClr val="accent1"/>
+          </a:fillRef>
+          <a:effectRef idx="2">
+            <a:schemeClr val="accent1"/>
+          </a:effectRef>
+          <a:fontRef idx="minor">
+            <a:schemeClr val="lt1"/>
+          </a:fontRef>
+        </p:style>
+        <p:txBody>
+          <a:bodyPr rtlCol="0" anchor="ctr"/>
+          <a:lstStyle/>
+          <a:p>
+            <a:pPr algn="ctr"/>
+          </a:p>
+        </p:txBody>
+      </p:sp>
+      <p:sp>
+        <p:nvSpPr>
+          <p:cNvPr id="7" name="TextBox 6"/>
+          <p:cNvSpPr txBox="1"/>
+          <p:nvPr/>
+        </p:nvSpPr>
+        <p:spPr>
+          <a:xfrm>
+            <a:off x="11048695" y="6382512"/>
+            <a:ext cx="914400" cy="274320"/>
+          </a:xfrm>
+          <a:prstGeom prst="rect">
+            <a:avLst/>
+          </a:prstGeom>
+          <a:noFill/>
+        </p:spPr>
+        <p:txBody>
+          <a:bodyPr wrap="square" anchor="t" lIns="0" rIns="0" tIns="0" bIns="0">
+            <a:noAutofit/>
+          </a:bodyPr>
+          <a:lstStyle/>
+          <a:p>
+            <a:pPr algn="r">
+              <a:spcBef>
+                <a:spcPts val="0"/>
+              </a:spcBef>
+              <a:spcAft>
+                <a:spcPts val="200"/>
+              </a:spcAft>
+            </a:pPr>
+            <a:r>
+              <a:rPr sz="900" b="0">
+                <a:solidFill>
+                  <a:srgbClr val="6B7280"/>
+                </a:solidFill>
+                <a:latin typeface="Arial"/>
+                <a:ea typeface="微软雅黑"/>
+              </a:rPr>
+              <a:t>10 / 10</a:t>
+            </a:r>
+          </a:p>
+        </p:txBody>
+      </p:sp>
+      <p:sp>
+        <p:nvSpPr>
+          <p:cNvPr id="8" name="TextBox 7"/>
+          <p:cNvSpPr txBox="1"/>
+          <p:nvPr/>
+        </p:nvSpPr>
+        <p:spPr>
+          <a:xfrm>
+            <a:off x="566928" y="6382512"/>
+            <a:ext cx="6949440" cy="274320"/>
+          </a:xfrm>
+          <a:prstGeom prst="rect">
+            <a:avLst/>
+          </a:prstGeom>
+          <a:noFill/>
+        </p:spPr>
+        <p:txBody>
+          <a:bodyPr wrap="square" anchor="t" lIns="0" rIns="0" tIns="0" bIns="0">
+            <a:noAutofit/>
+          </a:bodyPr>
+          <a:lstStyle/>
+          <a:p>
+            <a:pPr algn="l">
+              <a:spcBef>
+                <a:spcPts val="0"/>
+              </a:spcBef>
+              <a:spcAft>
+                <a:spcPts val="200"/>
+              </a:spcAft>
+            </a:pPr>
+            <a:r>
+              <a:rPr sz="850" b="0">
+                <a:solidFill>
+                  <a:srgbClr val="6B7280"/>
+                </a:solidFill>
+                <a:latin typeface="微软雅黑"/>
+                <a:ea typeface="微软雅黑"/>
+              </a:rPr>
+              <a:t>常州臻畅汽车配件有限公司 · 上海泰瑞电子科技有限公司</a:t>
+            </a:r>
+          </a:p>
+        </p:txBody>
+      </p:sp>
+      <p:sp>
+        <p:nvSpPr>
+          <p:cNvPr id="9" name="Rectangle 8"/>
+          <p:cNvSpPr/>
+          <p:nvPr/>
+        </p:nvSpPr>
+        <p:spPr>
+          <a:xfrm>
+            <a:off x="566928" y="1417320"/>
+            <a:ext cx="11055096" cy="603504"/>
+          </a:xfrm>
+          <a:prstGeom prst="rect">
+            <a:avLst/>
+          </a:prstGeom>
+          <a:solidFill>
+            <a:srgbClr val="FBFCFD"/>
+          </a:solidFill>
+          <a:ln w="11430">
+            <a:solidFill>
+              <a:srgbClr val="E3E6EB"/>
+            </a:solidFill>
+          </a:ln>
+          <a:effectLst/>
+        </p:spPr>
+        <p:style>
+          <a:lnRef idx="1">
+            <a:schemeClr val="accent1"/>
+          </a:lnRef>
+          <a:fillRef idx="3">
+            <a:schemeClr val="accent1"/>
+          </a:fillRef>
+          <a:effectRef idx="2">
+            <a:schemeClr val="accent1"/>
+          </a:effectRef>
+          <a:fontRef idx="minor">
+            <a:schemeClr val="lt1"/>
+          </a:fontRef>
+        </p:style>
+        <p:txBody>
+          <a:bodyPr rtlCol="0" anchor="ctr"/>
+          <a:lstStyle/>
+          <a:p>
+            <a:pPr algn="ctr"/>
+          </a:p>
+        </p:txBody>
+      </p:sp>
+      <p:sp>
+        <p:nvSpPr>
+          <p:cNvPr id="10" name="Rectangle 9"/>
+          <p:cNvSpPr/>
+          <p:nvPr/>
+        </p:nvSpPr>
+        <p:spPr>
+          <a:xfrm>
+            <a:off x="566928" y="1417320"/>
+            <a:ext cx="914400" cy="603504"/>
+          </a:xfrm>
+          <a:prstGeom prst="rect">
+            <a:avLst/>
+          </a:prstGeom>
+          <a:solidFill>
+            <a:srgbClr val="E82127"/>
+          </a:solidFill>
+          <a:ln>
+            <a:noFill/>
+          </a:ln>
+          <a:effectLst/>
+        </p:spPr>
+        <p:style>
+          <a:lnRef idx="1">
+            <a:schemeClr val="accent1"/>
+          </a:lnRef>
+          <a:fillRef idx="3">
+            <a:schemeClr val="accent1"/>
+          </a:fillRef>
+          <a:effectRef idx="2">
+            <a:schemeClr val="accent1"/>
+          </a:effectRef>
+          <a:fontRef idx="minor">
+            <a:schemeClr val="lt1"/>
+          </a:fontRef>
+        </p:style>
+        <p:txBody>
+          <a:bodyPr rtlCol="0" anchor="ctr"/>
+          <a:lstStyle/>
+          <a:p>
+            <a:pPr algn="ctr"/>
+          </a:p>
+        </p:txBody>
+      </p:sp>
+      <p:sp>
+        <p:nvSpPr>
+          <p:cNvPr id="11" name="TextBox 10"/>
+          <p:cNvSpPr txBox="1"/>
+          <p:nvPr/>
+        </p:nvSpPr>
+        <p:spPr>
+          <a:xfrm>
+            <a:off x="566928" y="1600200"/>
+            <a:ext cx="914400" cy="274320"/>
+          </a:xfrm>
+          <a:prstGeom prst="rect">
+            <a:avLst/>
+          </a:prstGeom>
+          <a:noFill/>
+        </p:spPr>
+        <p:txBody>
+          <a:bodyPr wrap="square" anchor="t" lIns="0" rIns="0" tIns="0" bIns="0">
+            <a:noAutofit/>
+          </a:bodyPr>
+          <a:lstStyle/>
+          <a:p>
+            <a:pPr algn="ctr">
+              <a:spcBef>
+                <a:spcPts val="0"/>
+              </a:spcBef>
+              <a:spcAft>
+                <a:spcPts val="200"/>
+              </a:spcAft>
+            </a:pPr>
+            <a:r>
+              <a:rPr sz="1500" b="1">
+                <a:solidFill>
+                  <a:srgbClr val="FFFFFF"/>
+                </a:solidFill>
+                <a:latin typeface="Arial"/>
+                <a:ea typeface="微软雅黑"/>
+              </a:rPr>
+              <a:t>P0</a:t>
+            </a:r>
+          </a:p>
+        </p:txBody>
+      </p:sp>
+      <p:sp>
+        <p:nvSpPr>
+          <p:cNvPr id="12" name="TextBox 11"/>
+          <p:cNvSpPr txBox="1"/>
+          <p:nvPr/>
+        </p:nvSpPr>
+        <p:spPr>
+          <a:xfrm>
+            <a:off x="1709928" y="1499616"/>
+            <a:ext cx="3931920" cy="274320"/>
+          </a:xfrm>
+          <a:prstGeom prst="rect">
+            <a:avLst/>
+          </a:prstGeom>
+          <a:noFill/>
+        </p:spPr>
+        <p:txBody>
+          <a:bodyPr wrap="square" anchor="t" lIns="0" rIns="0" tIns="0" bIns="0">
+            <a:noAutofit/>
+          </a:bodyPr>
+          <a:lstStyle/>
+          <a:p>
+            <a:pPr algn="l">
+              <a:spcBef>
+                <a:spcPts val="0"/>
+              </a:spcBef>
+              <a:spcAft>
+                <a:spcPts val="200"/>
+              </a:spcAft>
+            </a:pPr>
+            <a:r>
+              <a:rPr sz="1150" b="1">
+                <a:solidFill>
+                  <a:srgbClr val="171A20"/>
+                </a:solidFill>
+                <a:latin typeface="微软雅黑"/>
+                <a:ea typeface="微软雅黑"/>
+              </a:rPr>
+              <a:t>EHEA 质量闭环与交付</a:t>
+            </a:r>
+          </a:p>
+        </p:txBody>
+      </p:sp>
+      <p:sp>
+        <p:nvSpPr>
+          <p:cNvPr id="13" name="TextBox 12"/>
+          <p:cNvSpPr txBox="1"/>
+          <p:nvPr/>
+        </p:nvSpPr>
+        <p:spPr>
+          <a:xfrm>
+            <a:off x="5458968" y="1508760"/>
+            <a:ext cx="5943600" cy="566928"/>
+          </a:xfrm>
+          <a:prstGeom prst="rect">
+            <a:avLst/>
+          </a:prstGeom>
+          <a:noFill/>
+        </p:spPr>
+        <p:txBody>
+          <a:bodyPr wrap="square" anchor="t" lIns="0" rIns="0" tIns="0" bIns="0">
+            <a:noAutofit/>
+          </a:bodyPr>
+          <a:lstStyle/>
+          <a:p>
+            <a:pPr algn="l">
+              <a:lnSpc>
+                <a:spcPct val="125000"/>
+              </a:lnSpc>
+              <a:spcBef>
+                <a:spcPts val="0"/>
+              </a:spcBef>
+              <a:spcAft>
+                <a:spcPts val="200"/>
+              </a:spcAft>
+            </a:pPr>
+            <a:r>
+              <a:rPr sz="960" b="0">
+                <a:solidFill>
+                  <a:srgbClr val="6B7280"/>
+                </a:solidFill>
+                <a:latin typeface="微软雅黑"/>
+                <a:ea typeface="微软雅黑"/>
+              </a:rPr>
+              <a:t>查清问题件号与批次 → 出整改/复检方案 → 保 10/5 前 281,039 件交付；对客户书面反馈</a:t>
+            </a:r>
+          </a:p>
+        </p:txBody>
+      </p:sp>
+      <p:sp>
+        <p:nvSpPr>
+          <p:cNvPr id="14" name="Rectangle 13"/>
+          <p:cNvSpPr/>
+          <p:nvPr/>
+        </p:nvSpPr>
+        <p:spPr>
+          <a:xfrm>
+            <a:off x="566928" y="2093976"/>
+            <a:ext cx="11055096" cy="603504"/>
+          </a:xfrm>
+          <a:prstGeom prst="rect">
+            <a:avLst/>
+          </a:prstGeom>
+          <a:solidFill>
+            <a:srgbClr val="FFFFFF"/>
+          </a:solidFill>
+          <a:ln w="11430">
+            <a:solidFill>
+              <a:srgbClr val="E3E6EB"/>
+            </a:solidFill>
+          </a:ln>
+          <a:effectLst/>
+        </p:spPr>
+        <p:style>
+          <a:lnRef idx="1">
+            <a:schemeClr val="accent1"/>
+          </a:lnRef>
+          <a:fillRef idx="3">
+            <a:schemeClr val="accent1"/>
+          </a:fillRef>
+          <a:effectRef idx="2">
+            <a:schemeClr val="accent1"/>
+          </a:effectRef>
+          <a:fontRef idx="minor">
+            <a:schemeClr val="lt1"/>
+          </a:fontRef>
+        </p:style>
+        <p:txBody>
+          <a:bodyPr rtlCol="0" anchor="ctr"/>
+          <a:lstStyle/>
+          <a:p>
+            <a:pPr algn="ctr"/>
+          </a:p>
+        </p:txBody>
+      </p:sp>
+      <p:sp>
+        <p:nvSpPr>
+          <p:cNvPr id="15" name="Rectangle 14"/>
+          <p:cNvSpPr/>
+          <p:nvPr/>
+        </p:nvSpPr>
+        <p:spPr>
+          <a:xfrm>
+            <a:off x="566928" y="2093976"/>
+            <a:ext cx="914400" cy="603504"/>
+          </a:xfrm>
+          <a:prstGeom prst="rect">
+            <a:avLst/>
+          </a:prstGeom>
+          <a:solidFill>
+            <a:srgbClr val="E82127"/>
+          </a:solidFill>
+          <a:ln>
+            <a:noFill/>
+          </a:ln>
+          <a:effectLst/>
+        </p:spPr>
+        <p:style>
+          <a:lnRef idx="1">
+            <a:schemeClr val="accent1"/>
+          </a:lnRef>
+          <a:fillRef idx="3">
+            <a:schemeClr val="accent1"/>
+          </a:fillRef>
+          <a:effectRef idx="2">
+            <a:schemeClr val="accent1"/>
+          </a:effectRef>
+          <a:fontRef idx="minor">
+            <a:schemeClr val="lt1"/>
+          </a:fontRef>
+        </p:style>
+        <p:txBody>
+          <a:bodyPr rtlCol="0" anchor="ctr"/>
+          <a:lstStyle/>
+          <a:p>
+            <a:pPr algn="ctr"/>
+          </a:p>
+        </p:txBody>
+      </p:sp>
+      <p:sp>
+        <p:nvSpPr>
+          <p:cNvPr id="16" name="TextBox 15"/>
+          <p:cNvSpPr txBox="1"/>
+          <p:nvPr/>
+        </p:nvSpPr>
+        <p:spPr>
+          <a:xfrm>
+            <a:off x="566928" y="2276856"/>
+            <a:ext cx="914400" cy="274320"/>
+          </a:xfrm>
+          <a:prstGeom prst="rect">
+            <a:avLst/>
+          </a:prstGeom>
+          <a:noFill/>
+        </p:spPr>
+        <p:txBody>
+          <a:bodyPr wrap="square" anchor="t" lIns="0" rIns="0" tIns="0" bIns="0">
+            <a:noAutofit/>
+          </a:bodyPr>
+          <a:lstStyle/>
+          <a:p>
+            <a:pPr algn="ctr">
+              <a:spcBef>
+                <a:spcPts val="0"/>
+              </a:spcBef>
+              <a:spcAft>
+                <a:spcPts val="200"/>
+              </a:spcAft>
+            </a:pPr>
+            <a:r>
+              <a:rPr sz="1500" b="1">
+                <a:solidFill>
+                  <a:srgbClr val="FFFFFF"/>
+                </a:solidFill>
+                <a:latin typeface="Arial"/>
+                <a:ea typeface="微软雅黑"/>
+              </a:rPr>
+              <a:t>P0</a:t>
+            </a:r>
+          </a:p>
+        </p:txBody>
+      </p:sp>
+      <p:sp>
+        <p:nvSpPr>
+          <p:cNvPr id="17" name="TextBox 16"/>
+          <p:cNvSpPr txBox="1"/>
+          <p:nvPr/>
+        </p:nvSpPr>
+        <p:spPr>
+          <a:xfrm>
+            <a:off x="1709928" y="2176272"/>
+            <a:ext cx="3931920" cy="274320"/>
+          </a:xfrm>
+          <a:prstGeom prst="rect">
+            <a:avLst/>
+          </a:prstGeom>
+          <a:noFill/>
+        </p:spPr>
+        <p:txBody>
+          <a:bodyPr wrap="square" anchor="t" lIns="0" rIns="0" tIns="0" bIns="0">
+            <a:noAutofit/>
+          </a:bodyPr>
+          <a:lstStyle/>
+          <a:p>
+            <a:pPr algn="l">
+              <a:spcBef>
+                <a:spcPts val="0"/>
+              </a:spcBef>
+              <a:spcAft>
+                <a:spcPts val="200"/>
+              </a:spcAft>
+            </a:pPr>
+            <a:r>
+              <a:rPr sz="1150" b="1">
+                <a:solidFill>
+                  <a:srgbClr val="171A20"/>
+                </a:solidFill>
+                <a:latin typeface="微软雅黑"/>
+                <a:ea typeface="微软雅黑"/>
+              </a:rPr>
+              <a:t>S56 价格签认与排产</a:t>
+            </a:r>
+          </a:p>
+        </p:txBody>
+      </p:sp>
+      <p:sp>
+        <p:nvSpPr>
+          <p:cNvPr id="18" name="TextBox 17"/>
+          <p:cNvSpPr txBox="1"/>
+          <p:nvPr/>
+        </p:nvSpPr>
+        <p:spPr>
+          <a:xfrm>
+            <a:off x="5458968" y="2185416"/>
+            <a:ext cx="5943600" cy="566928"/>
+          </a:xfrm>
+          <a:prstGeom prst="rect">
+            <a:avLst/>
+          </a:prstGeom>
+          <a:noFill/>
+        </p:spPr>
+        <p:txBody>
+          <a:bodyPr wrap="square" anchor="t" lIns="0" rIns="0" tIns="0" bIns="0">
+            <a:noAutofit/>
+          </a:bodyPr>
+          <a:lstStyle/>
+          <a:p>
+            <a:pPr algn="l">
+              <a:lnSpc>
+                <a:spcPct val="125000"/>
+              </a:lnSpc>
+              <a:spcBef>
+                <a:spcPts val="0"/>
+              </a:spcBef>
+              <a:spcAft>
+                <a:spcPts val="200"/>
+              </a:spcAft>
+            </a:pPr>
+            <a:r>
+              <a:rPr sz="960" b="0">
+                <a:solidFill>
+                  <a:srgbClr val="6B7280"/>
+                </a:solidFill>
+                <a:latin typeface="微软雅黑"/>
+                <a:ea typeface="微软雅黑"/>
+              </a:rPr>
+              <a:t>取得客户对 13 件单价的签认 → 首单 PO 生效 → 刀模排版/打样确认 → 备料排产；同步启动 3 件低毛利件降本</a:t>
+            </a:r>
+          </a:p>
+        </p:txBody>
+      </p:sp>
+      <p:sp>
+        <p:nvSpPr>
+          <p:cNvPr id="19" name="Rectangle 18"/>
+          <p:cNvSpPr/>
+          <p:nvPr/>
+        </p:nvSpPr>
+        <p:spPr>
+          <a:xfrm>
+            <a:off x="566928" y="2770632"/>
+            <a:ext cx="11055096" cy="603504"/>
+          </a:xfrm>
+          <a:prstGeom prst="rect">
+            <a:avLst/>
+          </a:prstGeom>
+          <a:solidFill>
+            <a:srgbClr val="FBFCFD"/>
+          </a:solidFill>
+          <a:ln w="11430">
+            <a:solidFill>
+              <a:srgbClr val="E3E6EB"/>
+            </a:solidFill>
+          </a:ln>
+          <a:effectLst/>
+        </p:spPr>
+        <p:style>
+          <a:lnRef idx="1">
+            <a:schemeClr val="accent1"/>
+          </a:lnRef>
+          <a:fillRef idx="3">
+            <a:schemeClr val="accent1"/>
+          </a:fillRef>
+          <a:effectRef idx="2">
+            <a:schemeClr val="accent1"/>
+          </a:effectRef>
+          <a:fontRef idx="minor">
+            <a:schemeClr val="lt1"/>
+          </a:fontRef>
+        </p:style>
+        <p:txBody>
+          <a:bodyPr rtlCol="0" anchor="ctr"/>
+          <a:lstStyle/>
+          <a:p>
+            <a:pPr algn="ctr"/>
+          </a:p>
+        </p:txBody>
+      </p:sp>
+      <p:sp>
+        <p:nvSpPr>
+          <p:cNvPr id="20" name="Rectangle 19"/>
+          <p:cNvSpPr/>
+          <p:nvPr/>
+        </p:nvSpPr>
+        <p:spPr>
+          <a:xfrm>
+            <a:off x="566928" y="2770632"/>
+            <a:ext cx="914400" cy="603504"/>
+          </a:xfrm>
+          <a:prstGeom prst="rect">
+            <a:avLst/>
+          </a:prstGeom>
+          <a:solidFill>
+            <a:srgbClr val="B46A00"/>
+          </a:solidFill>
+          <a:ln>
+            <a:noFill/>
+          </a:ln>
+          <a:effectLst/>
+        </p:spPr>
+        <p:style>
+          <a:lnRef idx="1">
+            <a:schemeClr val="accent1"/>
+          </a:lnRef>
+          <a:fillRef idx="3">
+            <a:schemeClr val="accent1"/>
+          </a:fillRef>
+          <a:effectRef idx="2">
+            <a:schemeClr val="accent1"/>
+          </a:effectRef>
+          <a:fontRef idx="minor">
+            <a:schemeClr val="lt1"/>
+          </a:fontRef>
+        </p:style>
+        <p:txBody>
+          <a:bodyPr rtlCol="0" anchor="ctr"/>
+          <a:lstStyle/>
+          <a:p>
+            <a:pPr algn="ctr"/>
+          </a:p>
+        </p:txBody>
+      </p:sp>
+      <p:sp>
+        <p:nvSpPr>
+          <p:cNvPr id="21" name="TextBox 20"/>
+          <p:cNvSpPr txBox="1"/>
+          <p:nvPr/>
+        </p:nvSpPr>
+        <p:spPr>
+          <a:xfrm>
+            <a:off x="566928" y="2953512"/>
+            <a:ext cx="914400" cy="274320"/>
+          </a:xfrm>
+          <a:prstGeom prst="rect">
+            <a:avLst/>
+          </a:prstGeom>
+          <a:noFill/>
+        </p:spPr>
+        <p:txBody>
+          <a:bodyPr wrap="square" anchor="t" lIns="0" rIns="0" tIns="0" bIns="0">
+            <a:noAutofit/>
+          </a:bodyPr>
+          <a:lstStyle/>
+          <a:p>
+            <a:pPr algn="ctr">
+              <a:spcBef>
+                <a:spcPts val="0"/>
+              </a:spcBef>
+              <a:spcAft>
+                <a:spcPts val="200"/>
+              </a:spcAft>
+            </a:pPr>
+            <a:r>
+              <a:rPr sz="1500" b="1">
+                <a:solidFill>
+                  <a:srgbClr val="FFFFFF"/>
+                </a:solidFill>
+                <a:latin typeface="Arial"/>
+                <a:ea typeface="微软雅黑"/>
+              </a:rPr>
+              <a:t>P1</a:t>
+            </a:r>
+          </a:p>
+        </p:txBody>
+      </p:sp>
+      <p:sp>
+        <p:nvSpPr>
+          <p:cNvPr id="22" name="TextBox 21"/>
+          <p:cNvSpPr txBox="1"/>
+          <p:nvPr/>
+        </p:nvSpPr>
+        <p:spPr>
+          <a:xfrm>
+            <a:off x="1709928" y="2852928"/>
+            <a:ext cx="3931920" cy="274320"/>
+          </a:xfrm>
+          <a:prstGeom prst="rect">
+            <a:avLst/>
+          </a:prstGeom>
+          <a:noFill/>
+        </p:spPr>
+        <p:txBody>
+          <a:bodyPr wrap="square" anchor="t" lIns="0" rIns="0" tIns="0" bIns="0">
+            <a:noAutofit/>
+          </a:bodyPr>
+          <a:lstStyle/>
+          <a:p>
+            <a:pPr algn="l">
+              <a:spcBef>
+                <a:spcPts val="0"/>
+              </a:spcBef>
+              <a:spcAft>
+                <a:spcPts val="200"/>
+              </a:spcAft>
+            </a:pPr>
+            <a:r>
+              <a:rPr sz="1150" b="1">
+                <a:solidFill>
+                  <a:srgbClr val="171A20"/>
+                </a:solidFill>
+                <a:latin typeface="微软雅黑"/>
+                <a:ea typeface="微软雅黑"/>
+              </a:rPr>
+              <a:t>ZH5EM、SHD 供应商与 OTS</a:t>
+            </a:r>
+          </a:p>
+        </p:txBody>
+      </p:sp>
+      <p:sp>
+        <p:nvSpPr>
+          <p:cNvPr id="23" name="TextBox 22"/>
+          <p:cNvSpPr txBox="1"/>
+          <p:nvPr/>
+        </p:nvSpPr>
+        <p:spPr>
+          <a:xfrm>
+            <a:off x="5458968" y="2862072"/>
+            <a:ext cx="5943600" cy="566928"/>
+          </a:xfrm>
+          <a:prstGeom prst="rect">
+            <a:avLst/>
+          </a:prstGeom>
+          <a:noFill/>
+        </p:spPr>
+        <p:txBody>
+          <a:bodyPr wrap="square" anchor="t" lIns="0" rIns="0" tIns="0" bIns="0">
+            <a:noAutofit/>
+          </a:bodyPr>
+          <a:lstStyle/>
+          <a:p>
+            <a:pPr algn="l">
+              <a:lnSpc>
+                <a:spcPct val="125000"/>
+              </a:lnSpc>
+              <a:spcBef>
+                <a:spcPts val="0"/>
+              </a:spcBef>
+              <a:spcAft>
+                <a:spcPts val="200"/>
+              </a:spcAft>
+            </a:pPr>
+            <a:r>
+              <a:rPr sz="960" b="0">
+                <a:solidFill>
+                  <a:srgbClr val="6B7280"/>
+                </a:solidFill>
+                <a:latin typeface="微软雅黑"/>
+                <a:ea typeface="微软雅黑"/>
+              </a:rPr>
+              <a:t>锁定泡棉/塔扣供应商 → 完成 OTS 测试 → 建立 CAMDS 与量产文件</a:t>
+            </a:r>
+          </a:p>
+        </p:txBody>
+      </p:sp>
+      <p:sp>
+        <p:nvSpPr>
+          <p:cNvPr id="24" name="Rectangle 23"/>
+          <p:cNvSpPr/>
+          <p:nvPr/>
+        </p:nvSpPr>
+        <p:spPr>
+          <a:xfrm>
+            <a:off x="566928" y="3447288"/>
+            <a:ext cx="11055096" cy="603504"/>
+          </a:xfrm>
+          <a:prstGeom prst="rect">
+            <a:avLst/>
+          </a:prstGeom>
+          <a:solidFill>
+            <a:srgbClr val="FFFFFF"/>
+          </a:solidFill>
+          <a:ln w="11430">
+            <a:solidFill>
+              <a:srgbClr val="E3E6EB"/>
+            </a:solidFill>
+          </a:ln>
+          <a:effectLst/>
+        </p:spPr>
+        <p:style>
+          <a:lnRef idx="1">
+            <a:schemeClr val="accent1"/>
+          </a:lnRef>
+          <a:fillRef idx="3">
+            <a:schemeClr val="accent1"/>
+          </a:fillRef>
+          <a:effectRef idx="2">
+            <a:schemeClr val="accent1"/>
+          </a:effectRef>
+          <a:fontRef idx="minor">
+            <a:schemeClr val="lt1"/>
+          </a:fontRef>
+        </p:style>
+        <p:txBody>
+          <a:bodyPr rtlCol="0" anchor="ctr"/>
+          <a:lstStyle/>
+          <a:p>
+            <a:pPr algn="ctr"/>
+          </a:p>
+        </p:txBody>
+      </p:sp>
+      <p:sp>
+        <p:nvSpPr>
+          <p:cNvPr id="25" name="Rectangle 24"/>
+          <p:cNvSpPr/>
+          <p:nvPr/>
+        </p:nvSpPr>
+        <p:spPr>
+          <a:xfrm>
+            <a:off x="566928" y="3447288"/>
+            <a:ext cx="914400" cy="603504"/>
+          </a:xfrm>
+          <a:prstGeom prst="rect">
+            <a:avLst/>
+          </a:prstGeom>
+          <a:solidFill>
+            <a:srgbClr val="B46A00"/>
+          </a:solidFill>
+          <a:ln>
+            <a:noFill/>
+          </a:ln>
+          <a:effectLst/>
+        </p:spPr>
+        <p:style>
+          <a:lnRef idx="1">
+            <a:schemeClr val="accent1"/>
+          </a:lnRef>
+          <a:fillRef idx="3">
+            <a:schemeClr val="accent1"/>
+          </a:fillRef>
+          <a:effectRef idx="2">
+            <a:schemeClr val="accent1"/>
+          </a:effectRef>
+          <a:fontRef idx="minor">
+            <a:schemeClr val="lt1"/>
+          </a:fontRef>
+        </p:style>
+        <p:txBody>
+          <a:bodyPr rtlCol="0" anchor="ctr"/>
+          <a:lstStyle/>
+          <a:p>
+            <a:pPr algn="ctr"/>
+          </a:p>
+        </p:txBody>
+      </p:sp>
+      <p:sp>
+        <p:nvSpPr>
+          <p:cNvPr id="26" name="TextBox 25"/>
+          <p:cNvSpPr txBox="1"/>
+          <p:nvPr/>
+        </p:nvSpPr>
+        <p:spPr>
+          <a:xfrm>
+            <a:off x="566928" y="3630168"/>
+            <a:ext cx="914400" cy="274320"/>
+          </a:xfrm>
+          <a:prstGeom prst="rect">
+            <a:avLst/>
+          </a:prstGeom>
+          <a:noFill/>
+        </p:spPr>
+        <p:txBody>
+          <a:bodyPr wrap="square" anchor="t" lIns="0" rIns="0" tIns="0" bIns="0">
+            <a:noAutofit/>
+          </a:bodyPr>
+          <a:lstStyle/>
+          <a:p>
+            <a:pPr algn="ctr">
+              <a:spcBef>
+                <a:spcPts val="0"/>
+              </a:spcBef>
+              <a:spcAft>
+                <a:spcPts val="200"/>
+              </a:spcAft>
+            </a:pPr>
+            <a:r>
+              <a:rPr sz="1500" b="1">
+                <a:solidFill>
+                  <a:srgbClr val="FFFFFF"/>
+                </a:solidFill>
+                <a:latin typeface="Arial"/>
+                <a:ea typeface="微软雅黑"/>
+              </a:rPr>
+              <a:t>P1</a:t>
+            </a:r>
+          </a:p>
+        </p:txBody>
+      </p:sp>
+      <p:sp>
+        <p:nvSpPr>
+          <p:cNvPr id="27" name="TextBox 26"/>
+          <p:cNvSpPr txBox="1"/>
+          <p:nvPr/>
+        </p:nvSpPr>
+        <p:spPr>
+          <a:xfrm>
+            <a:off x="1709928" y="3529584"/>
+            <a:ext cx="3931920" cy="274320"/>
+          </a:xfrm>
+          <a:prstGeom prst="rect">
+            <a:avLst/>
+          </a:prstGeom>
+          <a:noFill/>
+        </p:spPr>
+        <p:txBody>
+          <a:bodyPr wrap="square" anchor="t" lIns="0" rIns="0" tIns="0" bIns="0">
+            <a:noAutofit/>
+          </a:bodyPr>
+          <a:lstStyle/>
+          <a:p>
+            <a:pPr algn="l">
+              <a:spcBef>
+                <a:spcPts val="0"/>
+              </a:spcBef>
+              <a:spcAft>
+                <a:spcPts val="200"/>
+              </a:spcAft>
+            </a:pPr>
+            <a:r>
+              <a:rPr sz="1150" b="1">
+                <a:solidFill>
+                  <a:srgbClr val="171A20"/>
+                </a:solidFill>
+                <a:latin typeface="微软雅黑"/>
+                <a:ea typeface="微软雅黑"/>
+              </a:rPr>
+              <a:t>ROX01 合同与稳定交付</a:t>
+            </a:r>
+          </a:p>
+        </p:txBody>
+      </p:sp>
+      <p:sp>
+        <p:nvSpPr>
+          <p:cNvPr id="28" name="TextBox 27"/>
+          <p:cNvSpPr txBox="1"/>
+          <p:nvPr/>
+        </p:nvSpPr>
+        <p:spPr>
+          <a:xfrm>
+            <a:off x="5458968" y="3538728"/>
+            <a:ext cx="5943600" cy="566928"/>
+          </a:xfrm>
+          <a:prstGeom prst="rect">
+            <a:avLst/>
+          </a:prstGeom>
+          <a:noFill/>
+        </p:spPr>
+        <p:txBody>
+          <a:bodyPr wrap="square" anchor="t" lIns="0" rIns="0" tIns="0" bIns="0">
+            <a:noAutofit/>
+          </a:bodyPr>
+          <a:lstStyle/>
+          <a:p>
+            <a:pPr algn="l">
+              <a:lnSpc>
+                <a:spcPct val="125000"/>
+              </a:lnSpc>
+              <a:spcBef>
+                <a:spcPts val="0"/>
+              </a:spcBef>
+              <a:spcAft>
+                <a:spcPts val="200"/>
+              </a:spcAft>
+            </a:pPr>
+            <a:r>
+              <a:rPr sz="960" b="0">
+                <a:solidFill>
+                  <a:srgbClr val="6B7280"/>
+                </a:solidFill>
+                <a:latin typeface="微软雅黑"/>
+                <a:ea typeface="微软雅黑"/>
+              </a:rPr>
+              <a:t>落合同与 90 天承兑账期 → 与已交付 29,500 件按定点价对账 → 稳定拉动（年 12,000 套）</a:t>
+            </a:r>
+          </a:p>
+        </p:txBody>
+      </p:sp>
+      <p:sp>
+        <p:nvSpPr>
+          <p:cNvPr id="29" name="Rectangle 28"/>
+          <p:cNvSpPr/>
+          <p:nvPr/>
+        </p:nvSpPr>
+        <p:spPr>
+          <a:xfrm>
+            <a:off x="566928" y="4123944"/>
+            <a:ext cx="11055096" cy="603504"/>
+          </a:xfrm>
+          <a:prstGeom prst="rect">
+            <a:avLst/>
+          </a:prstGeom>
+          <a:solidFill>
+            <a:srgbClr val="FBFCFD"/>
+          </a:solidFill>
+          <a:ln w="11430">
+            <a:solidFill>
+              <a:srgbClr val="E3E6EB"/>
+            </a:solidFill>
+          </a:ln>
+          <a:effectLst/>
+        </p:spPr>
+        <p:style>
+          <a:lnRef idx="1">
+            <a:schemeClr val="accent1"/>
+          </a:lnRef>
+          <a:fillRef idx="3">
+            <a:schemeClr val="accent1"/>
+          </a:fillRef>
+          <a:effectRef idx="2">
+            <a:schemeClr val="accent1"/>
+          </a:effectRef>
+          <a:fontRef idx="minor">
+            <a:schemeClr val="lt1"/>
+          </a:fontRef>
+        </p:style>
+        <p:txBody>
+          <a:bodyPr rtlCol="0" anchor="ctr"/>
+          <a:lstStyle/>
+          <a:p>
+            <a:pPr algn="ctr"/>
+          </a:p>
+        </p:txBody>
+      </p:sp>
+      <p:sp>
+        <p:nvSpPr>
+          <p:cNvPr id="30" name="Rectangle 29"/>
+          <p:cNvSpPr/>
+          <p:nvPr/>
+        </p:nvSpPr>
+        <p:spPr>
+          <a:xfrm>
+            <a:off x="566928" y="4123944"/>
+            <a:ext cx="914400" cy="603504"/>
+          </a:xfrm>
+          <a:prstGeom prst="rect">
+            <a:avLst/>
+          </a:prstGeom>
+          <a:solidFill>
+            <a:srgbClr val="1D4ED8"/>
+          </a:solidFill>
+          <a:ln>
+            <a:noFill/>
+          </a:ln>
+          <a:effectLst/>
+        </p:spPr>
+        <p:style>
+          <a:lnRef idx="1">
+            <a:schemeClr val="accent1"/>
+          </a:lnRef>
+          <a:fillRef idx="3">
+            <a:schemeClr val="accent1"/>
+          </a:fillRef>
+          <a:effectRef idx="2">
+            <a:schemeClr val="accent1"/>
+          </a:effectRef>
+          <a:fontRef idx="minor">
+            <a:schemeClr val="lt1"/>
+          </a:fontRef>
+        </p:style>
+        <p:txBody>
+          <a:bodyPr rtlCol="0" anchor="ctr"/>
+          <a:lstStyle/>
+          <a:p>
+            <a:pPr algn="ctr"/>
+          </a:p>
+        </p:txBody>
+      </p:sp>
+      <p:sp>
+        <p:nvSpPr>
+          <p:cNvPr id="31" name="TextBox 30"/>
+          <p:cNvSpPr txBox="1"/>
+          <p:nvPr/>
+        </p:nvSpPr>
+        <p:spPr>
+          <a:xfrm>
+            <a:off x="566928" y="4306824"/>
+            <a:ext cx="914400" cy="274320"/>
+          </a:xfrm>
+          <a:prstGeom prst="rect">
+            <a:avLst/>
+          </a:prstGeom>
+          <a:noFill/>
+        </p:spPr>
+        <p:txBody>
+          <a:bodyPr wrap="square" anchor="t" lIns="0" rIns="0" tIns="0" bIns="0">
+            <a:noAutofit/>
+          </a:bodyPr>
+          <a:lstStyle/>
+          <a:p>
+            <a:pPr algn="ctr">
+              <a:spcBef>
+                <a:spcPts val="0"/>
+              </a:spcBef>
+              <a:spcAft>
+                <a:spcPts val="200"/>
+              </a:spcAft>
+            </a:pPr>
+            <a:r>
+              <a:rPr sz="1500" b="1">
+                <a:solidFill>
+                  <a:srgbClr val="FFFFFF"/>
+                </a:solidFill>
+                <a:latin typeface="Arial"/>
+                <a:ea typeface="微软雅黑"/>
+              </a:rPr>
+              <a:t>P2</a:t>
+            </a:r>
+          </a:p>
+        </p:txBody>
+      </p:sp>
+      <p:sp>
+        <p:nvSpPr>
+          <p:cNvPr id="32" name="TextBox 31"/>
+          <p:cNvSpPr txBox="1"/>
+          <p:nvPr/>
+        </p:nvSpPr>
+        <p:spPr>
+          <a:xfrm>
+            <a:off x="1709928" y="4206240"/>
+            <a:ext cx="3931920" cy="274320"/>
+          </a:xfrm>
+          <a:prstGeom prst="rect">
+            <a:avLst/>
+          </a:prstGeom>
+          <a:noFill/>
+        </p:spPr>
+        <p:txBody>
+          <a:bodyPr wrap="square" anchor="t" lIns="0" rIns="0" tIns="0" bIns="0">
+            <a:noAutofit/>
+          </a:bodyPr>
+          <a:lstStyle/>
+          <a:p>
+            <a:pPr algn="l">
+              <a:spcBef>
+                <a:spcPts val="0"/>
+              </a:spcBef>
+              <a:spcAft>
+                <a:spcPts val="200"/>
+              </a:spcAft>
+            </a:pPr>
+            <a:r>
+              <a:rPr sz="1150" b="1">
+                <a:solidFill>
+                  <a:srgbClr val="171A20"/>
+                </a:solidFill>
+                <a:latin typeface="微软雅黑"/>
+                <a:ea typeface="微软雅黑"/>
+              </a:rPr>
+              <a:t>T12T 核价、BS5PR 报价</a:t>
+            </a:r>
+          </a:p>
+        </p:txBody>
+      </p:sp>
+      <p:sp>
+        <p:nvSpPr>
+          <p:cNvPr id="33" name="TextBox 32"/>
+          <p:cNvSpPr txBox="1"/>
+          <p:nvPr/>
+        </p:nvSpPr>
+        <p:spPr>
+          <a:xfrm>
+            <a:off x="5458968" y="4215384"/>
+            <a:ext cx="5943600" cy="566928"/>
+          </a:xfrm>
+          <a:prstGeom prst="rect">
+            <a:avLst/>
+          </a:prstGeom>
+          <a:noFill/>
+        </p:spPr>
+        <p:txBody>
+          <a:bodyPr wrap="square" anchor="t" lIns="0" rIns="0" tIns="0" bIns="0">
+            <a:noAutofit/>
+          </a:bodyPr>
+          <a:lstStyle/>
+          <a:p>
+            <a:pPr algn="l">
+              <a:lnSpc>
+                <a:spcPct val="125000"/>
+              </a:lnSpc>
+              <a:spcBef>
+                <a:spcPts val="0"/>
+              </a:spcBef>
+              <a:spcAft>
+                <a:spcPts val="200"/>
+              </a:spcAft>
+            </a:pPr>
+            <a:r>
+              <a:rPr sz="960" b="0">
+                <a:solidFill>
+                  <a:srgbClr val="6B7280"/>
+                </a:solidFill>
+                <a:latin typeface="微软雅黑"/>
+                <a:ea typeface="微软雅黑"/>
+              </a:rPr>
+              <a:t>T12T 最后一轮核价（SOP 2027.3）；BS5PR 取对方目标价后出报价</a:t>
+            </a:r>
+          </a:p>
+        </p:txBody>
+      </p:sp>
+      <p:sp>
+        <p:nvSpPr>
+          <p:cNvPr id="34" name="Rectangle 33"/>
+          <p:cNvSpPr/>
+          <p:nvPr/>
+        </p:nvSpPr>
+        <p:spPr>
+          <a:xfrm>
+            <a:off x="566928" y="4800600"/>
+            <a:ext cx="11055096" cy="603504"/>
+          </a:xfrm>
+          <a:prstGeom prst="rect">
+            <a:avLst/>
+          </a:prstGeom>
+          <a:solidFill>
+            <a:srgbClr val="FFFFFF"/>
+          </a:solidFill>
+          <a:ln w="11430">
+            <a:solidFill>
+              <a:srgbClr val="E3E6EB"/>
+            </a:solidFill>
+          </a:ln>
+          <a:effectLst/>
+        </p:spPr>
+        <p:style>
+          <a:lnRef idx="1">
+            <a:schemeClr val="accent1"/>
+          </a:lnRef>
+          <a:fillRef idx="3">
+            <a:schemeClr val="accent1"/>
+          </a:fillRef>
+          <a:effectRef idx="2">
+            <a:schemeClr val="accent1"/>
+          </a:effectRef>
+          <a:fontRef idx="minor">
+            <a:schemeClr val="lt1"/>
+          </a:fontRef>
+        </p:style>
+        <p:txBody>
+          <a:bodyPr rtlCol="0" anchor="ctr"/>
+          <a:lstStyle/>
+          <a:p>
+            <a:pPr algn="ctr"/>
+          </a:p>
+        </p:txBody>
+      </p:sp>
+      <p:sp>
+        <p:nvSpPr>
+          <p:cNvPr id="35" name="Rectangle 34"/>
+          <p:cNvSpPr/>
+          <p:nvPr/>
+        </p:nvSpPr>
+        <p:spPr>
+          <a:xfrm>
+            <a:off x="566928" y="4800600"/>
+            <a:ext cx="914400" cy="603504"/>
+          </a:xfrm>
+          <a:prstGeom prst="rect">
+            <a:avLst/>
+          </a:prstGeom>
+          <a:solidFill>
+            <a:srgbClr val="6B7280"/>
+          </a:solidFill>
+          <a:ln>
+            <a:noFill/>
+          </a:ln>
+          <a:effectLst/>
+        </p:spPr>
+        <p:style>
+          <a:lnRef idx="1">
+            <a:schemeClr val="accent1"/>
+          </a:lnRef>
+          <a:fillRef idx="3">
+            <a:schemeClr val="accent1"/>
+          </a:fillRef>
+          <a:effectRef idx="2">
+            <a:schemeClr val="accent1"/>
+          </a:effectRef>
+          <a:fontRef idx="minor">
+            <a:schemeClr val="lt1"/>
+          </a:fontRef>
+        </p:style>
+        <p:txBody>
+          <a:bodyPr rtlCol="0" anchor="ctr"/>
+          <a:lstStyle/>
+          <a:p>
+            <a:pPr algn="ctr"/>
+          </a:p>
+        </p:txBody>
+      </p:sp>
+      <p:sp>
+        <p:nvSpPr>
+          <p:cNvPr id="36" name="TextBox 35"/>
+          <p:cNvSpPr txBox="1"/>
+          <p:nvPr/>
+        </p:nvSpPr>
+        <p:spPr>
+          <a:xfrm>
+            <a:off x="566928" y="4983480"/>
+            <a:ext cx="914400" cy="274320"/>
+          </a:xfrm>
+          <a:prstGeom prst="rect">
+            <a:avLst/>
+          </a:prstGeom>
+          <a:noFill/>
+        </p:spPr>
+        <p:txBody>
+          <a:bodyPr wrap="square" anchor="t" lIns="0" rIns="0" tIns="0" bIns="0">
+            <a:noAutofit/>
+          </a:bodyPr>
+          <a:lstStyle/>
+          <a:p>
+            <a:pPr algn="ctr">
+              <a:spcBef>
+                <a:spcPts val="0"/>
+              </a:spcBef>
+              <a:spcAft>
+                <a:spcPts val="200"/>
+              </a:spcAft>
+            </a:pPr>
+            <a:r>
+              <a:rPr sz="1500" b="1">
+                <a:solidFill>
+                  <a:srgbClr val="FFFFFF"/>
+                </a:solidFill>
+                <a:latin typeface="Arial"/>
+                <a:ea typeface="微软雅黑"/>
+              </a:rPr>
+              <a:t>P3</a:t>
+            </a:r>
+          </a:p>
+        </p:txBody>
+      </p:sp>
+      <p:sp>
+        <p:nvSpPr>
+          <p:cNvPr id="37" name="TextBox 36"/>
+          <p:cNvSpPr txBox="1"/>
+          <p:nvPr/>
+        </p:nvSpPr>
+        <p:spPr>
+          <a:xfrm>
+            <a:off x="1709928" y="4882896"/>
+            <a:ext cx="3931920" cy="274320"/>
+          </a:xfrm>
+          <a:prstGeom prst="rect">
+            <a:avLst/>
+          </a:prstGeom>
+          <a:noFill/>
+        </p:spPr>
+        <p:txBody>
+          <a:bodyPr wrap="square" anchor="t" lIns="0" rIns="0" tIns="0" bIns="0">
+            <a:noAutofit/>
+          </a:bodyPr>
+          <a:lstStyle/>
+          <a:p>
+            <a:pPr algn="l">
+              <a:spcBef>
+                <a:spcPts val="0"/>
+              </a:spcBef>
+              <a:spcAft>
+                <a:spcPts val="200"/>
+              </a:spcAft>
+            </a:pPr>
+            <a:r>
+              <a:rPr sz="1150" b="1">
+                <a:solidFill>
+                  <a:srgbClr val="171A20"/>
+                </a:solidFill>
+                <a:latin typeface="微软雅黑"/>
+                <a:ea typeface="微软雅黑"/>
+              </a:rPr>
+              <a:t>新机会与海外</a:t>
+            </a:r>
+          </a:p>
+        </p:txBody>
+      </p:sp>
+      <p:sp>
+        <p:nvSpPr>
+          <p:cNvPr id="38" name="TextBox 37"/>
+          <p:cNvSpPr txBox="1"/>
+          <p:nvPr/>
+        </p:nvSpPr>
+        <p:spPr>
+          <a:xfrm>
+            <a:off x="5458968" y="4892040"/>
+            <a:ext cx="5943600" cy="566928"/>
+          </a:xfrm>
+          <a:prstGeom prst="rect">
+            <a:avLst/>
+          </a:prstGeom>
+          <a:noFill/>
+        </p:spPr>
+        <p:txBody>
+          <a:bodyPr wrap="square" anchor="t" lIns="0" rIns="0" tIns="0" bIns="0">
+            <a:noAutofit/>
+          </a:bodyPr>
+          <a:lstStyle/>
+          <a:p>
+            <a:pPr algn="l">
+              <a:lnSpc>
+                <a:spcPct val="125000"/>
+              </a:lnSpc>
+              <a:spcBef>
+                <a:spcPts val="0"/>
+              </a:spcBef>
+              <a:spcAft>
+                <a:spcPts val="200"/>
+              </a:spcAft>
+            </a:pPr>
+            <a:r>
+              <a:rPr sz="960" b="0">
+                <a:solidFill>
+                  <a:srgbClr val="6B7280"/>
+                </a:solidFill>
+                <a:latin typeface="微软雅黑"/>
+                <a:ea typeface="微软雅黑"/>
+              </a:rPr>
+              <a:t>VFe32-3M 小样 20 片；CX835 等车型量；上汽越南 AS5PM-X1（10/18–19 会议，四季度出顶棚工艺与投资方案）</a:t>
+            </a:r>
+          </a:p>
+        </p:txBody>
+      </p:sp>
+      <p:sp>
+        <p:nvSpPr>
+          <p:cNvPr id="39" name="Rectangle 38"/>
+          <p:cNvSpPr/>
+          <p:nvPr/>
+        </p:nvSpPr>
+        <p:spPr>
+          <a:xfrm>
+            <a:off x="566928" y="5550408"/>
+            <a:ext cx="11055096" cy="713232"/>
+          </a:xfrm>
+          <a:prstGeom prst="rect">
+            <a:avLst/>
+          </a:prstGeom>
+          <a:solidFill>
+            <a:srgbClr val="FDE9EA"/>
+          </a:solidFill>
+          <a:ln w="11430">
+            <a:solidFill>
+              <a:srgbClr val="E3E6EB"/>
+            </a:solidFill>
+          </a:ln>
+          <a:effectLst/>
+        </p:spPr>
+        <p:style>
+          <a:lnRef idx="1">
+            <a:schemeClr val="accent1"/>
+          </a:lnRef>
+          <a:fillRef idx="3">
+            <a:schemeClr val="accent1"/>
+          </a:fillRef>
+          <a:effectRef idx="2">
+            <a:schemeClr val="accent1"/>
+          </a:effectRef>
+          <a:fontRef idx="minor">
+            <a:schemeClr val="lt1"/>
+          </a:fontRef>
+        </p:style>
+        <p:txBody>
+          <a:bodyPr rtlCol="0" anchor="ctr"/>
+          <a:lstStyle/>
+          <a:p>
+            <a:pPr algn="ctr"/>
+          </a:p>
+        </p:txBody>
+      </p:sp>
+      <p:sp>
+        <p:nvSpPr>
+          <p:cNvPr id="40" name="TextBox 39"/>
+          <p:cNvSpPr txBox="1"/>
+          <p:nvPr/>
+        </p:nvSpPr>
+        <p:spPr>
+          <a:xfrm>
+            <a:off x="841247" y="5641848"/>
+            <a:ext cx="10506456" cy="548640"/>
+          </a:xfrm>
+          <a:prstGeom prst="rect">
+            <a:avLst/>
+          </a:prstGeom>
+          <a:noFill/>
+        </p:spPr>
+        <p:txBody>
+          <a:bodyPr wrap="square" anchor="t" lIns="0" rIns="0" tIns="0" bIns="0">
+            <a:noAutofit/>
+          </a:bodyPr>
+          <a:lstStyle/>
+          <a:p>
+            <a:pPr algn="l">
+              <a:lnSpc>
+                <a:spcPct val="130000"/>
+              </a:lnSpc>
+              <a:spcBef>
+                <a:spcPts val="0"/>
+              </a:spcBef>
+              <a:spcAft>
+                <a:spcPts val="200"/>
+              </a:spcAft>
+            </a:pPr>
+            <a:r>
+              <a:rPr sz="1050" b="1">
+                <a:solidFill>
+                  <a:srgbClr val="E82127"/>
+                </a:solidFill>
+                <a:latin typeface="微软雅黑"/>
+                <a:ea typeface="微软雅黑"/>
+              </a:rPr>
+              <a:t>一句话总结：</a:t>
+            </a:r>
+            <a:r>
+              <a:rPr sz="1050" b="0">
+                <a:solidFill>
+                  <a:srgbClr val="171A20"/>
+                </a:solidFill>
+                <a:latin typeface="微软雅黑"/>
+                <a:ea typeface="微软雅黑"/>
+              </a:rPr>
+              <a:t>三季度把「定点」做出来了（4 个），四季度要把「钱」做出来 —— 先解决 EHEA 质量与 S56 定价两个 P0，其余按节奏推进。</a:t>
+            </a:r>
+          </a:p>
+        </p:txBody>
+      </p:sp>
+    </p:spTree>
+  </p:cSld>
+  <p:clrMapOvr>
+    <a:masterClrMapping/>
+  </p:clrMapOvr>
+</p:sld>
+</file>
+
 <file path=ppt/slides/slide2.xml><?xml version="1.0" encoding="utf-8"?>
 <p:sld xmlns:a="http://schemas.openxmlformats.org/drawingml/2006/main" xmlns:p="http://schemas.openxmlformats.org/presentationml/2006/main" xmlns:r="http://schemas.openxmlformats.org/officeDocument/2006/relationships">
   <p:cSld>
@@ -3735,7 +5492,7 @@
                 <a:latin typeface="Arial"/>
                 <a:ea typeface="微软雅黑"/>
               </a:rPr>
-              <a:t>2 / 9</a:t>
+              <a:t>2 / 10</a:t>
             </a:r>
           </a:p>
         </p:txBody>
@@ -5986,7 +7743,7 @@
                 <a:latin typeface="Arial"/>
                 <a:ea typeface="微软雅黑"/>
               </a:rPr>
-              <a:t>3 / 9</a:t>
+              <a:t>3 / 10</a:t>
             </a:r>
           </a:p>
         </p:txBody>
@@ -7540,7 +9297,7 @@
                 <a:latin typeface="Arial"/>
                 <a:ea typeface="微软雅黑"/>
               </a:rPr>
-              <a:t>4 / 9</a:t>
+              <a:t>4 / 10</a:t>
             </a:r>
           </a:p>
         </p:txBody>
@@ -10780,7 +12537,7 @@
                 <a:latin typeface="Arial"/>
                 <a:ea typeface="微软雅黑"/>
               </a:rPr>
-              <a:t>5 / 9</a:t>
+              <a:t>5 / 10</a:t>
             </a:r>
           </a:p>
         </p:txBody>
@@ -12974,7 +14731,7 @@
                 <a:latin typeface="Arial"/>
                 <a:ea typeface="微软雅黑"/>
               </a:rPr>
-              <a:t>6 / 9</a:t>
+              <a:t>6 / 10</a:t>
             </a:r>
           </a:p>
         </p:txBody>
@@ -14879,7 +16636,7 @@
                 <a:latin typeface="Arial"/>
                 <a:ea typeface="微软雅黑"/>
               </a:rPr>
-              <a:t>7 / 9</a:t>
+              <a:t>7 / 10</a:t>
             </a:r>
           </a:p>
         </p:txBody>
@@ -16673,7 +18430,7 @@
                 <a:latin typeface="Arial"/>
                 <a:ea typeface="微软雅黑"/>
               </a:rPr>
-              <a:t>8 / 9</a:t>
+              <a:t>8 / 10</a:t>
             </a:r>
           </a:p>
         </p:txBody>
@@ -18705,7 +20462,7 @@
                 <a:latin typeface="微软雅黑"/>
                 <a:ea typeface="微软雅黑"/>
               </a:rPr>
-              <a:t>四季度计划</a:t>
+              <a:t>三季度推进中的难点与我的处理</a:t>
             </a:r>
           </a:p>
         </p:txBody>
@@ -18748,7 +20505,7 @@
                 <a:latin typeface="微软雅黑"/>
                 <a:ea typeface="微软雅黑"/>
               </a:rPr>
-              <a:t>按优先级：P0 = 不解决就影响收入或交付</a:t>
+              <a:t>4 个卡点：3 个已解决，1 个仍待拍板</a:t>
             </a:r>
           </a:p>
         </p:txBody>
@@ -18835,7 +20592,7 @@
                 <a:latin typeface="Arial"/>
                 <a:ea typeface="微软雅黑"/>
               </a:rPr>
-              <a:t>9 / 9</a:t>
+              <a:t>9 / 10</a:t>
             </a:r>
           </a:p>
         </p:txBody>
@@ -18891,19 +20648,17 @@
         </p:nvSpPr>
         <p:spPr>
           <a:xfrm>
-            <a:off x="566928" y="1417320"/>
-            <a:ext cx="11055096" cy="603504"/>
+            <a:off x="566928" y="1371600"/>
+            <a:ext cx="11055096" cy="365760"/>
           </a:xfrm>
           <a:prstGeom prst="rect">
             <a:avLst/>
           </a:prstGeom>
           <a:solidFill>
-            <a:srgbClr val="FBFCFD"/>
+            <a:srgbClr val="171A20"/>
           </a:solidFill>
-          <a:ln w="11430">
-            <a:solidFill>
-              <a:srgbClr val="E3E6EB"/>
-            </a:solidFill>
+          <a:ln>
+            <a:noFill/>
           </a:ln>
           <a:effectLst/>
         </p:spPr>
@@ -18931,190 +20686,229 @@
       </p:sp>
       <p:sp>
         <p:nvSpPr>
-          <p:cNvPr id="10" name="Rectangle 9"/>
+          <p:cNvPr id="10" name="TextBox 9"/>
+          <p:cNvSpPr txBox="1"/>
+          <p:nvPr/>
+        </p:nvSpPr>
+        <p:spPr>
+          <a:xfrm>
+            <a:off x="658368" y="1453896"/>
+            <a:ext cx="923543" cy="237744"/>
+          </a:xfrm>
+          <a:prstGeom prst="rect">
+            <a:avLst/>
+          </a:prstGeom>
+          <a:noFill/>
+        </p:spPr>
+        <p:txBody>
+          <a:bodyPr wrap="square" anchor="t" lIns="0" rIns="0" tIns="0" bIns="0">
+            <a:noAutofit/>
+          </a:bodyPr>
+          <a:lstStyle/>
+          <a:p>
+            <a:pPr algn="l">
+              <a:spcBef>
+                <a:spcPts val="0"/>
+              </a:spcBef>
+              <a:spcAft>
+                <a:spcPts val="200"/>
+              </a:spcAft>
+            </a:pPr>
+            <a:r>
+              <a:rPr sz="900" b="1">
+                <a:solidFill>
+                  <a:srgbClr val="FFFFFF"/>
+                </a:solidFill>
+                <a:latin typeface="微软雅黑"/>
+                <a:ea typeface="微软雅黑"/>
+              </a:rPr>
+              <a:t>卡点</a:t>
+            </a:r>
+          </a:p>
+        </p:txBody>
+      </p:sp>
+      <p:sp>
+        <p:nvSpPr>
+          <p:cNvPr id="11" name="TextBox 10"/>
+          <p:cNvSpPr txBox="1"/>
+          <p:nvPr/>
+        </p:nvSpPr>
+        <p:spPr>
+          <a:xfrm>
+            <a:off x="1709928" y="1453896"/>
+            <a:ext cx="3026664" cy="237744"/>
+          </a:xfrm>
+          <a:prstGeom prst="rect">
+            <a:avLst/>
+          </a:prstGeom>
+          <a:noFill/>
+        </p:spPr>
+        <p:txBody>
+          <a:bodyPr wrap="square" anchor="t" lIns="0" rIns="0" tIns="0" bIns="0">
+            <a:noAutofit/>
+          </a:bodyPr>
+          <a:lstStyle/>
+          <a:p>
+            <a:pPr algn="l">
+              <a:spcBef>
+                <a:spcPts val="0"/>
+              </a:spcBef>
+              <a:spcAft>
+                <a:spcPts val="200"/>
+              </a:spcAft>
+            </a:pPr>
+            <a:r>
+              <a:rPr sz="900" b="1">
+                <a:solidFill>
+                  <a:srgbClr val="FFFFFF"/>
+                </a:solidFill>
+                <a:latin typeface="微软雅黑"/>
+                <a:ea typeface="微软雅黑"/>
+              </a:rPr>
+              <a:t>现象（事实）</a:t>
+            </a:r>
+          </a:p>
+        </p:txBody>
+      </p:sp>
+      <p:sp>
+        <p:nvSpPr>
+          <p:cNvPr id="12" name="TextBox 11"/>
+          <p:cNvSpPr txBox="1"/>
+          <p:nvPr/>
+        </p:nvSpPr>
+        <p:spPr>
+          <a:xfrm>
+            <a:off x="4864608" y="1453896"/>
+            <a:ext cx="2478024" cy="237744"/>
+          </a:xfrm>
+          <a:prstGeom prst="rect">
+            <a:avLst/>
+          </a:prstGeom>
+          <a:noFill/>
+        </p:spPr>
+        <p:txBody>
+          <a:bodyPr wrap="square" anchor="t" lIns="0" rIns="0" tIns="0" bIns="0">
+            <a:noAutofit/>
+          </a:bodyPr>
+          <a:lstStyle/>
+          <a:p>
+            <a:pPr algn="l">
+              <a:spcBef>
+                <a:spcPts val="0"/>
+              </a:spcBef>
+              <a:spcAft>
+                <a:spcPts val="200"/>
+              </a:spcAft>
+            </a:pPr>
+            <a:r>
+              <a:rPr sz="900" b="1">
+                <a:solidFill>
+                  <a:srgbClr val="FFFFFF"/>
+                </a:solidFill>
+                <a:latin typeface="微软雅黑"/>
+                <a:ea typeface="微软雅黑"/>
+              </a:rPr>
+              <a:t>影响</a:t>
+            </a:r>
+          </a:p>
+        </p:txBody>
+      </p:sp>
+      <p:sp>
+        <p:nvSpPr>
+          <p:cNvPr id="13" name="TextBox 12"/>
+          <p:cNvSpPr txBox="1"/>
+          <p:nvPr/>
+        </p:nvSpPr>
+        <p:spPr>
+          <a:xfrm>
+            <a:off x="7470648" y="1453896"/>
+            <a:ext cx="2478024" cy="237744"/>
+          </a:xfrm>
+          <a:prstGeom prst="rect">
+            <a:avLst/>
+          </a:prstGeom>
+          <a:noFill/>
+        </p:spPr>
+        <p:txBody>
+          <a:bodyPr wrap="square" anchor="t" lIns="0" rIns="0" tIns="0" bIns="0">
+            <a:noAutofit/>
+          </a:bodyPr>
+          <a:lstStyle/>
+          <a:p>
+            <a:pPr algn="l">
+              <a:spcBef>
+                <a:spcPts val="0"/>
+              </a:spcBef>
+              <a:spcAft>
+                <a:spcPts val="200"/>
+              </a:spcAft>
+            </a:pPr>
+            <a:r>
+              <a:rPr sz="900" b="1">
+                <a:solidFill>
+                  <a:srgbClr val="FFFFFF"/>
+                </a:solidFill>
+                <a:latin typeface="微软雅黑"/>
+                <a:ea typeface="微软雅黑"/>
+              </a:rPr>
+              <a:t>我的处理</a:t>
+            </a:r>
+          </a:p>
+        </p:txBody>
+      </p:sp>
+      <p:sp>
+        <p:nvSpPr>
+          <p:cNvPr id="14" name="TextBox 13"/>
+          <p:cNvSpPr txBox="1"/>
+          <p:nvPr/>
+        </p:nvSpPr>
+        <p:spPr>
+          <a:xfrm>
+            <a:off x="10076688" y="1453896"/>
+            <a:ext cx="1508760" cy="237744"/>
+          </a:xfrm>
+          <a:prstGeom prst="rect">
+            <a:avLst/>
+          </a:prstGeom>
+          <a:noFill/>
+        </p:spPr>
+        <p:txBody>
+          <a:bodyPr wrap="square" anchor="t" lIns="0" rIns="0" tIns="0" bIns="0">
+            <a:noAutofit/>
+          </a:bodyPr>
+          <a:lstStyle/>
+          <a:p>
+            <a:pPr algn="l">
+              <a:spcBef>
+                <a:spcPts val="0"/>
+              </a:spcBef>
+              <a:spcAft>
+                <a:spcPts val="200"/>
+              </a:spcAft>
+            </a:pPr>
+            <a:r>
+              <a:rPr sz="900" b="1">
+                <a:solidFill>
+                  <a:srgbClr val="FFFFFF"/>
+                </a:solidFill>
+                <a:latin typeface="微软雅黑"/>
+                <a:ea typeface="微软雅黑"/>
+              </a:rPr>
+              <a:t>结果</a:t>
+            </a:r>
+          </a:p>
+        </p:txBody>
+      </p:sp>
+      <p:sp>
+        <p:nvSpPr>
+          <p:cNvPr id="15" name="Rectangle 14"/>
           <p:cNvSpPr/>
           <p:nvPr/>
         </p:nvSpPr>
         <p:spPr>
           <a:xfrm>
-            <a:off x="566928" y="1417320"/>
-            <a:ext cx="914400" cy="603504"/>
-          </a:xfrm>
-          <a:prstGeom prst="rect">
-            <a:avLst/>
-          </a:prstGeom>
-          <a:solidFill>
-            <a:srgbClr val="E82127"/>
-          </a:solidFill>
-          <a:ln>
-            <a:noFill/>
-          </a:ln>
-          <a:effectLst/>
-        </p:spPr>
-        <p:style>
-          <a:lnRef idx="1">
-            <a:schemeClr val="accent1"/>
-          </a:lnRef>
-          <a:fillRef idx="3">
-            <a:schemeClr val="accent1"/>
-          </a:fillRef>
-          <a:effectRef idx="2">
-            <a:schemeClr val="accent1"/>
-          </a:effectRef>
-          <a:fontRef idx="minor">
-            <a:schemeClr val="lt1"/>
-          </a:fontRef>
-        </p:style>
-        <p:txBody>
-          <a:bodyPr rtlCol="0" anchor="ctr"/>
-          <a:lstStyle/>
-          <a:p>
-            <a:pPr algn="ctr"/>
-          </a:p>
-        </p:txBody>
-      </p:sp>
-      <p:sp>
-        <p:nvSpPr>
-          <p:cNvPr id="11" name="TextBox 10"/>
-          <p:cNvSpPr txBox="1"/>
-          <p:nvPr/>
-        </p:nvSpPr>
-        <p:spPr>
-          <a:xfrm>
-            <a:off x="566928" y="1600200"/>
-            <a:ext cx="914400" cy="274320"/>
-          </a:xfrm>
-          <a:prstGeom prst="rect">
-            <a:avLst/>
-          </a:prstGeom>
-          <a:noFill/>
-        </p:spPr>
-        <p:txBody>
-          <a:bodyPr wrap="square" anchor="t" lIns="0" rIns="0" tIns="0" bIns="0">
-            <a:noAutofit/>
-          </a:bodyPr>
-          <a:lstStyle/>
-          <a:p>
-            <a:pPr algn="ctr">
-              <a:spcBef>
-                <a:spcPts val="0"/>
-              </a:spcBef>
-              <a:spcAft>
-                <a:spcPts val="200"/>
-              </a:spcAft>
-            </a:pPr>
-            <a:r>
-              <a:rPr sz="1500" b="1">
-                <a:solidFill>
-                  <a:srgbClr val="FFFFFF"/>
-                </a:solidFill>
-                <a:latin typeface="Arial"/>
-                <a:ea typeface="微软雅黑"/>
-              </a:rPr>
-              <a:t>P0</a:t>
-            </a:r>
-          </a:p>
-        </p:txBody>
-      </p:sp>
-      <p:sp>
-        <p:nvSpPr>
-          <p:cNvPr id="12" name="TextBox 11"/>
-          <p:cNvSpPr txBox="1"/>
-          <p:nvPr/>
-        </p:nvSpPr>
-        <p:spPr>
-          <a:xfrm>
-            <a:off x="1709928" y="1499616"/>
-            <a:ext cx="3931920" cy="274320"/>
-          </a:xfrm>
-          <a:prstGeom prst="rect">
-            <a:avLst/>
-          </a:prstGeom>
-          <a:noFill/>
-        </p:spPr>
-        <p:txBody>
-          <a:bodyPr wrap="square" anchor="t" lIns="0" rIns="0" tIns="0" bIns="0">
-            <a:noAutofit/>
-          </a:bodyPr>
-          <a:lstStyle/>
-          <a:p>
-            <a:pPr algn="l">
-              <a:spcBef>
-                <a:spcPts val="0"/>
-              </a:spcBef>
-              <a:spcAft>
-                <a:spcPts val="200"/>
-              </a:spcAft>
-            </a:pPr>
-            <a:r>
-              <a:rPr sz="1150" b="1">
-                <a:solidFill>
-                  <a:srgbClr val="171A20"/>
-                </a:solidFill>
-                <a:latin typeface="微软雅黑"/>
-                <a:ea typeface="微软雅黑"/>
-              </a:rPr>
-              <a:t>EHEA 质量闭环与交付</a:t>
-            </a:r>
-          </a:p>
-        </p:txBody>
-      </p:sp>
-      <p:sp>
-        <p:nvSpPr>
-          <p:cNvPr id="13" name="TextBox 12"/>
-          <p:cNvSpPr txBox="1"/>
-          <p:nvPr/>
-        </p:nvSpPr>
-        <p:spPr>
-          <a:xfrm>
-            <a:off x="5458968" y="1508760"/>
-            <a:ext cx="5943600" cy="566928"/>
-          </a:xfrm>
-          <a:prstGeom prst="rect">
-            <a:avLst/>
-          </a:prstGeom>
-          <a:noFill/>
-        </p:spPr>
-        <p:txBody>
-          <a:bodyPr wrap="square" anchor="t" lIns="0" rIns="0" tIns="0" bIns="0">
-            <a:noAutofit/>
-          </a:bodyPr>
-          <a:lstStyle/>
-          <a:p>
-            <a:pPr algn="l">
-              <a:lnSpc>
-                <a:spcPct val="125000"/>
-              </a:lnSpc>
-              <a:spcBef>
-                <a:spcPts val="0"/>
-              </a:spcBef>
-              <a:spcAft>
-                <a:spcPts val="200"/>
-              </a:spcAft>
-            </a:pPr>
-            <a:r>
-              <a:rPr sz="960" b="0">
-                <a:solidFill>
-                  <a:srgbClr val="6B7280"/>
-                </a:solidFill>
-                <a:latin typeface="微软雅黑"/>
-                <a:ea typeface="微软雅黑"/>
-              </a:rPr>
-              <a:t>查清问题件号与批次 → 出整改/复检方案 → 保 10/5 前 281,039 件交付；对客户书面反馈</a:t>
-            </a:r>
-          </a:p>
-        </p:txBody>
-      </p:sp>
-      <p:sp>
-        <p:nvSpPr>
-          <p:cNvPr id="14" name="Rectangle 13"/>
-          <p:cNvSpPr/>
-          <p:nvPr/>
-        </p:nvSpPr>
-        <p:spPr>
-          <a:xfrm>
-            <a:off x="566928" y="2093976"/>
-            <a:ext cx="11055096" cy="603504"/>
+            <a:off x="566928" y="1737360"/>
+            <a:ext cx="11055096" cy="960119"/>
           </a:xfrm>
           <a:prstGeom prst="rect">
             <a:avLst/>
@@ -19153,14 +20947,58 @@
       </p:sp>
       <p:sp>
         <p:nvSpPr>
-          <p:cNvPr id="15" name="Rectangle 14"/>
+          <p:cNvPr id="16" name="Rectangle 15"/>
           <p:cNvSpPr/>
           <p:nvPr/>
         </p:nvSpPr>
         <p:spPr>
           <a:xfrm>
-            <a:off x="566928" y="2093976"/>
-            <a:ext cx="914400" cy="603504"/>
+            <a:off x="566928" y="1737360"/>
+            <a:ext cx="1051560" cy="960119"/>
+          </a:xfrm>
+          <a:prstGeom prst="rect">
+            <a:avLst/>
+          </a:prstGeom>
+          <a:solidFill>
+            <a:srgbClr val="FDE9EA"/>
+          </a:solidFill>
+          <a:ln>
+            <a:noFill/>
+          </a:ln>
+          <a:effectLst/>
+        </p:spPr>
+        <p:style>
+          <a:lnRef idx="1">
+            <a:schemeClr val="accent1"/>
+          </a:lnRef>
+          <a:fillRef idx="3">
+            <a:schemeClr val="accent1"/>
+          </a:fillRef>
+          <a:effectRef idx="2">
+            <a:schemeClr val="accent1"/>
+          </a:effectRef>
+          <a:fontRef idx="minor">
+            <a:schemeClr val="lt1"/>
+          </a:fontRef>
+        </p:style>
+        <p:txBody>
+          <a:bodyPr rtlCol="0" anchor="ctr"/>
+          <a:lstStyle/>
+          <a:p>
+            <a:pPr algn="ctr"/>
+          </a:p>
+        </p:txBody>
+      </p:sp>
+      <p:sp>
+        <p:nvSpPr>
+          <p:cNvPr id="17" name="Rectangle 16"/>
+          <p:cNvSpPr/>
+          <p:nvPr/>
+        </p:nvSpPr>
+        <p:spPr>
+          <a:xfrm>
+            <a:off x="566928" y="1737360"/>
+            <a:ext cx="45720" cy="960119"/>
           </a:xfrm>
           <a:prstGeom prst="rect">
             <a:avLst/>
@@ -19197,100 +21035,14 @@
       </p:sp>
       <p:sp>
         <p:nvSpPr>
-          <p:cNvPr id="16" name="TextBox 15"/>
-          <p:cNvSpPr txBox="1"/>
-          <p:nvPr/>
-        </p:nvSpPr>
-        <p:spPr>
-          <a:xfrm>
-            <a:off x="566928" y="2276856"/>
-            <a:ext cx="914400" cy="274320"/>
-          </a:xfrm>
-          <a:prstGeom prst="rect">
-            <a:avLst/>
-          </a:prstGeom>
-          <a:noFill/>
-        </p:spPr>
-        <p:txBody>
-          <a:bodyPr wrap="square" anchor="t" lIns="0" rIns="0" tIns="0" bIns="0">
-            <a:noAutofit/>
-          </a:bodyPr>
-          <a:lstStyle/>
-          <a:p>
-            <a:pPr algn="ctr">
-              <a:spcBef>
-                <a:spcPts val="0"/>
-              </a:spcBef>
-              <a:spcAft>
-                <a:spcPts val="200"/>
-              </a:spcAft>
-            </a:pPr>
-            <a:r>
-              <a:rPr sz="1500" b="1">
-                <a:solidFill>
-                  <a:srgbClr val="FFFFFF"/>
-                </a:solidFill>
-                <a:latin typeface="Arial"/>
-                <a:ea typeface="微软雅黑"/>
-              </a:rPr>
-              <a:t>P0</a:t>
-            </a:r>
-          </a:p>
-        </p:txBody>
-      </p:sp>
-      <p:sp>
-        <p:nvSpPr>
-          <p:cNvPr id="17" name="TextBox 16"/>
-          <p:cNvSpPr txBox="1"/>
-          <p:nvPr/>
-        </p:nvSpPr>
-        <p:spPr>
-          <a:xfrm>
-            <a:off x="1709928" y="2176272"/>
-            <a:ext cx="3931920" cy="274320"/>
-          </a:xfrm>
-          <a:prstGeom prst="rect">
-            <a:avLst/>
-          </a:prstGeom>
-          <a:noFill/>
-        </p:spPr>
-        <p:txBody>
-          <a:bodyPr wrap="square" anchor="t" lIns="0" rIns="0" tIns="0" bIns="0">
-            <a:noAutofit/>
-          </a:bodyPr>
-          <a:lstStyle/>
-          <a:p>
-            <a:pPr algn="l">
-              <a:spcBef>
-                <a:spcPts val="0"/>
-              </a:spcBef>
-              <a:spcAft>
-                <a:spcPts val="200"/>
-              </a:spcAft>
-            </a:pPr>
-            <a:r>
-              <a:rPr sz="1150" b="1">
-                <a:solidFill>
-                  <a:srgbClr val="171A20"/>
-                </a:solidFill>
-                <a:latin typeface="微软雅黑"/>
-                <a:ea typeface="微软雅黑"/>
-              </a:rPr>
-              <a:t>S56 价格签认与排产</a:t>
-            </a:r>
-          </a:p>
-        </p:txBody>
-      </p:sp>
-      <p:sp>
-        <p:nvSpPr>
           <p:cNvPr id="18" name="TextBox 17"/>
           <p:cNvSpPr txBox="1"/>
           <p:nvPr/>
         </p:nvSpPr>
         <p:spPr>
           <a:xfrm>
-            <a:off x="5458968" y="2185416"/>
-            <a:ext cx="5943600" cy="566928"/>
+            <a:off x="694944" y="2011679"/>
+            <a:ext cx="868680" cy="457200"/>
           </a:xfrm>
           <a:prstGeom prst="rect">
             <a:avLst/>
@@ -19305,7 +21057,7 @@
           <a:p>
             <a:pPr algn="l">
               <a:lnSpc>
-                <a:spcPct val="125000"/>
+                <a:spcPct val="110000"/>
               </a:lnSpc>
               <a:spcBef>
                 <a:spcPts val="0"/>
@@ -19315,204 +21067,28 @@
               </a:spcAft>
             </a:pPr>
             <a:r>
-              <a:rPr sz="960" b="0">
-                <a:solidFill>
-                  <a:srgbClr val="6B7280"/>
-                </a:solidFill>
-                <a:latin typeface="微软雅黑"/>
-                <a:ea typeface="微软雅黑"/>
-              </a:rPr>
-              <a:t>取得客户对 13 件单价的签认 → 首单 PO 生效 → 刀模排版/打样确认 → 备料排产；同步启动 3 件低毛利件降本</a:t>
-            </a:r>
-          </a:p>
-        </p:txBody>
-      </p:sp>
-      <p:sp>
-        <p:nvSpPr>
-          <p:cNvPr id="19" name="Rectangle 18"/>
-          <p:cNvSpPr/>
-          <p:nvPr/>
-        </p:nvSpPr>
-        <p:spPr>
-          <a:xfrm>
-            <a:off x="566928" y="2770632"/>
-            <a:ext cx="11055096" cy="603504"/>
-          </a:xfrm>
-          <a:prstGeom prst="rect">
-            <a:avLst/>
-          </a:prstGeom>
-          <a:solidFill>
-            <a:srgbClr val="FBFCFD"/>
-          </a:solidFill>
-          <a:ln w="11430">
-            <a:solidFill>
-              <a:srgbClr val="E3E6EB"/>
-            </a:solidFill>
-          </a:ln>
-          <a:effectLst/>
-        </p:spPr>
-        <p:style>
-          <a:lnRef idx="1">
-            <a:schemeClr val="accent1"/>
-          </a:lnRef>
-          <a:fillRef idx="3">
-            <a:schemeClr val="accent1"/>
-          </a:fillRef>
-          <a:effectRef idx="2">
-            <a:schemeClr val="accent1"/>
-          </a:effectRef>
-          <a:fontRef idx="minor">
-            <a:schemeClr val="lt1"/>
-          </a:fontRef>
-        </p:style>
-        <p:txBody>
-          <a:bodyPr rtlCol="0" anchor="ctr"/>
-          <a:lstStyle/>
-          <a:p>
-            <a:pPr algn="ctr"/>
-          </a:p>
-        </p:txBody>
-      </p:sp>
-      <p:sp>
-        <p:nvSpPr>
-          <p:cNvPr id="20" name="Rectangle 19"/>
-          <p:cNvSpPr/>
-          <p:nvPr/>
-        </p:nvSpPr>
-        <p:spPr>
-          <a:xfrm>
-            <a:off x="566928" y="2770632"/>
-            <a:ext cx="914400" cy="603504"/>
-          </a:xfrm>
-          <a:prstGeom prst="rect">
-            <a:avLst/>
-          </a:prstGeom>
-          <a:solidFill>
-            <a:srgbClr val="B46A00"/>
-          </a:solidFill>
-          <a:ln>
-            <a:noFill/>
-          </a:ln>
-          <a:effectLst/>
-        </p:spPr>
-        <p:style>
-          <a:lnRef idx="1">
-            <a:schemeClr val="accent1"/>
-          </a:lnRef>
-          <a:fillRef idx="3">
-            <a:schemeClr val="accent1"/>
-          </a:fillRef>
-          <a:effectRef idx="2">
-            <a:schemeClr val="accent1"/>
-          </a:effectRef>
-          <a:fontRef idx="minor">
-            <a:schemeClr val="lt1"/>
-          </a:fontRef>
-        </p:style>
-        <p:txBody>
-          <a:bodyPr rtlCol="0" anchor="ctr"/>
-          <a:lstStyle/>
-          <a:p>
-            <a:pPr algn="ctr"/>
-          </a:p>
-        </p:txBody>
-      </p:sp>
-      <p:sp>
-        <p:nvSpPr>
-          <p:cNvPr id="21" name="TextBox 20"/>
-          <p:cNvSpPr txBox="1"/>
-          <p:nvPr/>
-        </p:nvSpPr>
-        <p:spPr>
-          <a:xfrm>
-            <a:off x="566928" y="2953512"/>
-            <a:ext cx="914400" cy="274320"/>
-          </a:xfrm>
-          <a:prstGeom prst="rect">
-            <a:avLst/>
-          </a:prstGeom>
-          <a:noFill/>
-        </p:spPr>
-        <p:txBody>
-          <a:bodyPr wrap="square" anchor="t" lIns="0" rIns="0" tIns="0" bIns="0">
-            <a:noAutofit/>
-          </a:bodyPr>
-          <a:lstStyle/>
-          <a:p>
-            <a:pPr algn="ctr">
-              <a:spcBef>
-                <a:spcPts val="0"/>
-              </a:spcBef>
-              <a:spcAft>
-                <a:spcPts val="200"/>
-              </a:spcAft>
-            </a:pPr>
-            <a:r>
-              <a:rPr sz="1500" b="1">
-                <a:solidFill>
-                  <a:srgbClr val="FFFFFF"/>
-                </a:solidFill>
-                <a:latin typeface="Arial"/>
-                <a:ea typeface="微软雅黑"/>
-              </a:rPr>
-              <a:t>P1</a:t>
-            </a:r>
-          </a:p>
-        </p:txBody>
-      </p:sp>
-      <p:sp>
-        <p:nvSpPr>
-          <p:cNvPr id="22" name="TextBox 21"/>
-          <p:cNvSpPr txBox="1"/>
-          <p:nvPr/>
-        </p:nvSpPr>
-        <p:spPr>
-          <a:xfrm>
-            <a:off x="1709928" y="2852928"/>
-            <a:ext cx="3931920" cy="274320"/>
-          </a:xfrm>
-          <a:prstGeom prst="rect">
-            <a:avLst/>
-          </a:prstGeom>
-          <a:noFill/>
-        </p:spPr>
-        <p:txBody>
-          <a:bodyPr wrap="square" anchor="t" lIns="0" rIns="0" tIns="0" bIns="0">
-            <a:noAutofit/>
-          </a:bodyPr>
-          <a:lstStyle/>
-          <a:p>
-            <a:pPr algn="l">
-              <a:spcBef>
-                <a:spcPts val="0"/>
-              </a:spcBef>
-              <a:spcAft>
-                <a:spcPts val="200"/>
-              </a:spcAft>
-            </a:pPr>
-            <a:r>
-              <a:rPr sz="1150" b="1">
-                <a:solidFill>
-                  <a:srgbClr val="171A20"/>
-                </a:solidFill>
-                <a:latin typeface="微软雅黑"/>
-                <a:ea typeface="微软雅黑"/>
-              </a:rPr>
-              <a:t>ZH5EM、SHD 供应商与 OTS</a:t>
-            </a:r>
-          </a:p>
-        </p:txBody>
-      </p:sp>
-      <p:sp>
-        <p:nvSpPr>
-          <p:cNvPr id="23" name="TextBox 22"/>
-          <p:cNvSpPr txBox="1"/>
-          <p:nvPr/>
-        </p:nvSpPr>
-        <p:spPr>
-          <a:xfrm>
-            <a:off x="5458968" y="2862072"/>
-            <a:ext cx="5943600" cy="566928"/>
+              <a:rPr sz="1050" b="1">
+                <a:solidFill>
+                  <a:srgbClr val="E82127"/>
+                </a:solidFill>
+                <a:latin typeface="微软雅黑"/>
+                <a:ea typeface="微软雅黑"/>
+              </a:rPr>
+              <a:t>报价权</a:t>
+            </a:r>
+          </a:p>
+        </p:txBody>
+      </p:sp>
+      <p:sp>
+        <p:nvSpPr>
+          <p:cNvPr id="19" name="TextBox 18"/>
+          <p:cNvSpPr txBox="1"/>
+          <p:nvPr/>
+        </p:nvSpPr>
+        <p:spPr>
+          <a:xfrm>
+            <a:off x="1709928" y="1847088"/>
+            <a:ext cx="3008376" cy="777239"/>
           </a:xfrm>
           <a:prstGeom prst="rect">
             <a:avLst/>
@@ -19527,7 +21103,7 @@
           <a:p>
             <a:pPr algn="l">
               <a:lnSpc>
-                <a:spcPct val="125000"/>
+                <a:spcPct val="122000"/>
               </a:lnSpc>
               <a:spcBef>
                 <a:spcPts val="0"/>
@@ -19537,28 +21113,166 @@
               </a:spcAft>
             </a:pPr>
             <a:r>
-              <a:rPr sz="960" b="0">
-                <a:solidFill>
-                  <a:srgbClr val="6B7280"/>
-                </a:solidFill>
-                <a:latin typeface="微软雅黑"/>
-                <a:ea typeface="微软雅黑"/>
-              </a:rPr>
-              <a:t>锁定泡棉/塔扣供应商 → 完成 OTS 测试 → 建立 CAMDS 与量产文件</a:t>
-            </a:r>
-          </a:p>
-        </p:txBody>
-      </p:sp>
-      <p:sp>
-        <p:nvSpPr>
-          <p:cNvPr id="24" name="Rectangle 23"/>
+              <a:rPr sz="880" b="0">
+                <a:solidFill>
+                  <a:srgbClr val="171A20"/>
+                </a:solidFill>
+                <a:latin typeface="微软雅黑"/>
+                <a:ea typeface="微软雅黑"/>
+              </a:rPr>
+              <a:t>10/13 内部回复：设备无法满足自制，需外协报价与总成报价同步；并称「报价方式无需销售过问，内部综合评估好后由财务输出给销售」</a:t>
+            </a:r>
+          </a:p>
+        </p:txBody>
+      </p:sp>
+      <p:sp>
+        <p:nvSpPr>
+          <p:cNvPr id="20" name="TextBox 19"/>
+          <p:cNvSpPr txBox="1"/>
+          <p:nvPr/>
+        </p:nvSpPr>
+        <p:spPr>
+          <a:xfrm>
+            <a:off x="4864608" y="1847088"/>
+            <a:ext cx="2459736" cy="777239"/>
+          </a:xfrm>
+          <a:prstGeom prst="rect">
+            <a:avLst/>
+          </a:prstGeom>
+          <a:noFill/>
+        </p:spPr>
+        <p:txBody>
+          <a:bodyPr wrap="square" anchor="t" lIns="0" rIns="0" tIns="0" bIns="0">
+            <a:noAutofit/>
+          </a:bodyPr>
+          <a:lstStyle/>
+          <a:p>
+            <a:pPr algn="l">
+              <a:lnSpc>
+                <a:spcPct val="122000"/>
+              </a:lnSpc>
+              <a:spcBef>
+                <a:spcPts val="0"/>
+              </a:spcBef>
+              <a:spcAft>
+                <a:spcPts val="200"/>
+              </a:spcAft>
+            </a:pPr>
+            <a:r>
+              <a:rPr sz="880" b="0">
+                <a:solidFill>
+                  <a:srgbClr val="171A20"/>
+                </a:solidFill>
+                <a:latin typeface="微软雅黑"/>
+                <a:ea typeface="微软雅黑"/>
+              </a:rPr>
+              <a:t>销售对客户是唯一口径责任人：价格不是自己出的，既解释不了、也担不起报错责任；外协价含毛利+三项费用，不能当自制成本基准</a:t>
+            </a:r>
+          </a:p>
+        </p:txBody>
+      </p:sp>
+      <p:sp>
+        <p:nvSpPr>
+          <p:cNvPr id="21" name="TextBox 20"/>
+          <p:cNvSpPr txBox="1"/>
+          <p:nvPr/>
+        </p:nvSpPr>
+        <p:spPr>
+          <a:xfrm>
+            <a:off x="7470648" y="1847088"/>
+            <a:ext cx="2459736" cy="777239"/>
+          </a:xfrm>
+          <a:prstGeom prst="rect">
+            <a:avLst/>
+          </a:prstGeom>
+          <a:noFill/>
+        </p:spPr>
+        <p:txBody>
+          <a:bodyPr wrap="square" anchor="t" lIns="0" rIns="0" tIns="0" bIns="0">
+            <a:noAutofit/>
+          </a:bodyPr>
+          <a:lstStyle/>
+          <a:p>
+            <a:pPr algn="l">
+              <a:lnSpc>
+                <a:spcPct val="122000"/>
+              </a:lnSpc>
+              <a:spcBef>
+                <a:spcPts val="0"/>
+              </a:spcBef>
+              <a:spcAft>
+                <a:spcPts val="200"/>
+              </a:spcAft>
+            </a:pPr>
+            <a:r>
+              <a:rPr sz="880" b="0">
+                <a:solidFill>
+                  <a:srgbClr val="171A20"/>
+                </a:solidFill>
+                <a:latin typeface="微软雅黑"/>
+                <a:ea typeface="微软雅黑"/>
+              </a:rPr>
+              <a:t>书面回复不接受：这两个零件要「自制口径」；外协只作参考且须脱敏；坚持三权——口径确认权、过程稿抄送、报错责任归属</a:t>
+            </a:r>
+          </a:p>
+        </p:txBody>
+      </p:sp>
+      <p:sp>
+        <p:nvSpPr>
+          <p:cNvPr id="22" name="TextBox 21"/>
+          <p:cNvSpPr txBox="1"/>
+          <p:nvPr/>
+        </p:nvSpPr>
+        <p:spPr>
+          <a:xfrm>
+            <a:off x="10076688" y="1847088"/>
+            <a:ext cx="1490472" cy="777239"/>
+          </a:xfrm>
+          <a:prstGeom prst="rect">
+            <a:avLst/>
+          </a:prstGeom>
+          <a:noFill/>
+        </p:spPr>
+        <p:txBody>
+          <a:bodyPr wrap="square" anchor="t" lIns="0" rIns="0" tIns="0" bIns="0">
+            <a:noAutofit/>
+          </a:bodyPr>
+          <a:lstStyle/>
+          <a:p>
+            <a:pPr algn="l">
+              <a:lnSpc>
+                <a:spcPct val="122000"/>
+              </a:lnSpc>
+              <a:spcBef>
+                <a:spcPts val="0"/>
+              </a:spcBef>
+              <a:spcAft>
+                <a:spcPts val="200"/>
+              </a:spcAft>
+            </a:pPr>
+            <a:r>
+              <a:rPr sz="880" b="1">
+                <a:solidFill>
+                  <a:srgbClr val="E82127"/>
+                </a:solidFill>
+                <a:latin typeface="微软雅黑"/>
+                <a:ea typeface="微软雅黑"/>
+              </a:rPr>
+              <a:t>当天 16:53 拿到自制成本表（未加利润），10/16 按期交付客户</a:t>
+            </a:r>
+          </a:p>
+        </p:txBody>
+      </p:sp>
+      <p:sp>
+        <p:nvSpPr>
+          <p:cNvPr id="23" name="Rectangle 22"/>
           <p:cNvSpPr/>
           <p:nvPr/>
         </p:nvSpPr>
         <p:spPr>
           <a:xfrm>
-            <a:off x="566928" y="3447288"/>
-            <a:ext cx="11055096" cy="603504"/>
+            <a:off x="566928" y="2788920"/>
+            <a:ext cx="11055096" cy="960119"/>
           </a:xfrm>
           <a:prstGeom prst="rect">
             <a:avLst/>
@@ -19597,14 +21311,58 @@
       </p:sp>
       <p:sp>
         <p:nvSpPr>
+          <p:cNvPr id="24" name="Rectangle 23"/>
+          <p:cNvSpPr/>
+          <p:nvPr/>
+        </p:nvSpPr>
+        <p:spPr>
+          <a:xfrm>
+            <a:off x="566928" y="2788920"/>
+            <a:ext cx="1051560" cy="960119"/>
+          </a:xfrm>
+          <a:prstGeom prst="rect">
+            <a:avLst/>
+          </a:prstGeom>
+          <a:solidFill>
+            <a:srgbClr val="FFF6E0"/>
+          </a:solidFill>
+          <a:ln>
+            <a:noFill/>
+          </a:ln>
+          <a:effectLst/>
+        </p:spPr>
+        <p:style>
+          <a:lnRef idx="1">
+            <a:schemeClr val="accent1"/>
+          </a:lnRef>
+          <a:fillRef idx="3">
+            <a:schemeClr val="accent1"/>
+          </a:fillRef>
+          <a:effectRef idx="2">
+            <a:schemeClr val="accent1"/>
+          </a:effectRef>
+          <a:fontRef idx="minor">
+            <a:schemeClr val="lt1"/>
+          </a:fontRef>
+        </p:style>
+        <p:txBody>
+          <a:bodyPr rtlCol="0" anchor="ctr"/>
+          <a:lstStyle/>
+          <a:p>
+            <a:pPr algn="ctr"/>
+          </a:p>
+        </p:txBody>
+      </p:sp>
+      <p:sp>
+        <p:nvSpPr>
           <p:cNvPr id="25" name="Rectangle 24"/>
           <p:cNvSpPr/>
           <p:nvPr/>
         </p:nvSpPr>
         <p:spPr>
           <a:xfrm>
-            <a:off x="566928" y="3447288"/>
-            <a:ext cx="914400" cy="603504"/>
+            <a:off x="566928" y="2788920"/>
+            <a:ext cx="45720" cy="960119"/>
           </a:xfrm>
           <a:prstGeom prst="rect">
             <a:avLst/>
@@ -19647,94 +21405,8 @@
         </p:nvSpPr>
         <p:spPr>
           <a:xfrm>
-            <a:off x="566928" y="3630168"/>
-            <a:ext cx="914400" cy="274320"/>
-          </a:xfrm>
-          <a:prstGeom prst="rect">
-            <a:avLst/>
-          </a:prstGeom>
-          <a:noFill/>
-        </p:spPr>
-        <p:txBody>
-          <a:bodyPr wrap="square" anchor="t" lIns="0" rIns="0" tIns="0" bIns="0">
-            <a:noAutofit/>
-          </a:bodyPr>
-          <a:lstStyle/>
-          <a:p>
-            <a:pPr algn="ctr">
-              <a:spcBef>
-                <a:spcPts val="0"/>
-              </a:spcBef>
-              <a:spcAft>
-                <a:spcPts val="200"/>
-              </a:spcAft>
-            </a:pPr>
-            <a:r>
-              <a:rPr sz="1500" b="1">
-                <a:solidFill>
-                  <a:srgbClr val="FFFFFF"/>
-                </a:solidFill>
-                <a:latin typeface="Arial"/>
-                <a:ea typeface="微软雅黑"/>
-              </a:rPr>
-              <a:t>P1</a:t>
-            </a:r>
-          </a:p>
-        </p:txBody>
-      </p:sp>
-      <p:sp>
-        <p:nvSpPr>
-          <p:cNvPr id="27" name="TextBox 26"/>
-          <p:cNvSpPr txBox="1"/>
-          <p:nvPr/>
-        </p:nvSpPr>
-        <p:spPr>
-          <a:xfrm>
-            <a:off x="1709928" y="3529584"/>
-            <a:ext cx="3931920" cy="274320"/>
-          </a:xfrm>
-          <a:prstGeom prst="rect">
-            <a:avLst/>
-          </a:prstGeom>
-          <a:noFill/>
-        </p:spPr>
-        <p:txBody>
-          <a:bodyPr wrap="square" anchor="t" lIns="0" rIns="0" tIns="0" bIns="0">
-            <a:noAutofit/>
-          </a:bodyPr>
-          <a:lstStyle/>
-          <a:p>
-            <a:pPr algn="l">
-              <a:spcBef>
-                <a:spcPts val="0"/>
-              </a:spcBef>
-              <a:spcAft>
-                <a:spcPts val="200"/>
-              </a:spcAft>
-            </a:pPr>
-            <a:r>
-              <a:rPr sz="1150" b="1">
-                <a:solidFill>
-                  <a:srgbClr val="171A20"/>
-                </a:solidFill>
-                <a:latin typeface="微软雅黑"/>
-                <a:ea typeface="微软雅黑"/>
-              </a:rPr>
-              <a:t>ROX01 合同与稳定交付</a:t>
-            </a:r>
-          </a:p>
-        </p:txBody>
-      </p:sp>
-      <p:sp>
-        <p:nvSpPr>
-          <p:cNvPr id="28" name="TextBox 27"/>
-          <p:cNvSpPr txBox="1"/>
-          <p:nvPr/>
-        </p:nvSpPr>
-        <p:spPr>
-          <a:xfrm>
-            <a:off x="5458968" y="3538728"/>
-            <a:ext cx="5943600" cy="566928"/>
+            <a:off x="694944" y="3063239"/>
+            <a:ext cx="868680" cy="457200"/>
           </a:xfrm>
           <a:prstGeom prst="rect">
             <a:avLst/>
@@ -19749,7 +21421,7 @@
           <a:p>
             <a:pPr algn="l">
               <a:lnSpc>
-                <a:spcPct val="125000"/>
+                <a:spcPct val="110000"/>
               </a:lnSpc>
               <a:spcBef>
                 <a:spcPts val="0"/>
@@ -19759,204 +21431,28 @@
               </a:spcAft>
             </a:pPr>
             <a:r>
-              <a:rPr sz="960" b="0">
-                <a:solidFill>
-                  <a:srgbClr val="6B7280"/>
-                </a:solidFill>
-                <a:latin typeface="微软雅黑"/>
-                <a:ea typeface="微软雅黑"/>
-              </a:rPr>
-              <a:t>落合同与 90 天承兑账期 → 与已交付 29,500 件按定点价对账 → 稳定拉动（年 12,000 套）</a:t>
-            </a:r>
-          </a:p>
-        </p:txBody>
-      </p:sp>
-      <p:sp>
-        <p:nvSpPr>
-          <p:cNvPr id="29" name="Rectangle 28"/>
-          <p:cNvSpPr/>
-          <p:nvPr/>
-        </p:nvSpPr>
-        <p:spPr>
-          <a:xfrm>
-            <a:off x="566928" y="4123944"/>
-            <a:ext cx="11055096" cy="603504"/>
-          </a:xfrm>
-          <a:prstGeom prst="rect">
-            <a:avLst/>
-          </a:prstGeom>
-          <a:solidFill>
-            <a:srgbClr val="FBFCFD"/>
-          </a:solidFill>
-          <a:ln w="11430">
-            <a:solidFill>
-              <a:srgbClr val="E3E6EB"/>
-            </a:solidFill>
-          </a:ln>
-          <a:effectLst/>
-        </p:spPr>
-        <p:style>
-          <a:lnRef idx="1">
-            <a:schemeClr val="accent1"/>
-          </a:lnRef>
-          <a:fillRef idx="3">
-            <a:schemeClr val="accent1"/>
-          </a:fillRef>
-          <a:effectRef idx="2">
-            <a:schemeClr val="accent1"/>
-          </a:effectRef>
-          <a:fontRef idx="minor">
-            <a:schemeClr val="lt1"/>
-          </a:fontRef>
-        </p:style>
-        <p:txBody>
-          <a:bodyPr rtlCol="0" anchor="ctr"/>
-          <a:lstStyle/>
-          <a:p>
-            <a:pPr algn="ctr"/>
-          </a:p>
-        </p:txBody>
-      </p:sp>
-      <p:sp>
-        <p:nvSpPr>
-          <p:cNvPr id="30" name="Rectangle 29"/>
-          <p:cNvSpPr/>
-          <p:nvPr/>
-        </p:nvSpPr>
-        <p:spPr>
-          <a:xfrm>
-            <a:off x="566928" y="4123944"/>
-            <a:ext cx="914400" cy="603504"/>
-          </a:xfrm>
-          <a:prstGeom prst="rect">
-            <a:avLst/>
-          </a:prstGeom>
-          <a:solidFill>
-            <a:srgbClr val="1D4ED8"/>
-          </a:solidFill>
-          <a:ln>
-            <a:noFill/>
-          </a:ln>
-          <a:effectLst/>
-        </p:spPr>
-        <p:style>
-          <a:lnRef idx="1">
-            <a:schemeClr val="accent1"/>
-          </a:lnRef>
-          <a:fillRef idx="3">
-            <a:schemeClr val="accent1"/>
-          </a:fillRef>
-          <a:effectRef idx="2">
-            <a:schemeClr val="accent1"/>
-          </a:effectRef>
-          <a:fontRef idx="minor">
-            <a:schemeClr val="lt1"/>
-          </a:fontRef>
-        </p:style>
-        <p:txBody>
-          <a:bodyPr rtlCol="0" anchor="ctr"/>
-          <a:lstStyle/>
-          <a:p>
-            <a:pPr algn="ctr"/>
-          </a:p>
-        </p:txBody>
-      </p:sp>
-      <p:sp>
-        <p:nvSpPr>
-          <p:cNvPr id="31" name="TextBox 30"/>
-          <p:cNvSpPr txBox="1"/>
-          <p:nvPr/>
-        </p:nvSpPr>
-        <p:spPr>
-          <a:xfrm>
-            <a:off x="566928" y="4306824"/>
-            <a:ext cx="914400" cy="274320"/>
-          </a:xfrm>
-          <a:prstGeom prst="rect">
-            <a:avLst/>
-          </a:prstGeom>
-          <a:noFill/>
-        </p:spPr>
-        <p:txBody>
-          <a:bodyPr wrap="square" anchor="t" lIns="0" rIns="0" tIns="0" bIns="0">
-            <a:noAutofit/>
-          </a:bodyPr>
-          <a:lstStyle/>
-          <a:p>
-            <a:pPr algn="ctr">
-              <a:spcBef>
-                <a:spcPts val="0"/>
-              </a:spcBef>
-              <a:spcAft>
-                <a:spcPts val="200"/>
-              </a:spcAft>
-            </a:pPr>
-            <a:r>
-              <a:rPr sz="1500" b="1">
-                <a:solidFill>
-                  <a:srgbClr val="FFFFFF"/>
-                </a:solidFill>
-                <a:latin typeface="Arial"/>
-                <a:ea typeface="微软雅黑"/>
-              </a:rPr>
-              <a:t>P2</a:t>
-            </a:r>
-          </a:p>
-        </p:txBody>
-      </p:sp>
-      <p:sp>
-        <p:nvSpPr>
-          <p:cNvPr id="32" name="TextBox 31"/>
-          <p:cNvSpPr txBox="1"/>
-          <p:nvPr/>
-        </p:nvSpPr>
-        <p:spPr>
-          <a:xfrm>
-            <a:off x="1709928" y="4206240"/>
-            <a:ext cx="3931920" cy="274320"/>
-          </a:xfrm>
-          <a:prstGeom prst="rect">
-            <a:avLst/>
-          </a:prstGeom>
-          <a:noFill/>
-        </p:spPr>
-        <p:txBody>
-          <a:bodyPr wrap="square" anchor="t" lIns="0" rIns="0" tIns="0" bIns="0">
-            <a:noAutofit/>
-          </a:bodyPr>
-          <a:lstStyle/>
-          <a:p>
-            <a:pPr algn="l">
-              <a:spcBef>
-                <a:spcPts val="0"/>
-              </a:spcBef>
-              <a:spcAft>
-                <a:spcPts val="200"/>
-              </a:spcAft>
-            </a:pPr>
-            <a:r>
-              <a:rPr sz="1150" b="1">
-                <a:solidFill>
-                  <a:srgbClr val="171A20"/>
-                </a:solidFill>
-                <a:latin typeface="微软雅黑"/>
-                <a:ea typeface="微软雅黑"/>
-              </a:rPr>
-              <a:t>T12T 核价、BS5PR 报价</a:t>
-            </a:r>
-          </a:p>
-        </p:txBody>
-      </p:sp>
-      <p:sp>
-        <p:nvSpPr>
-          <p:cNvPr id="33" name="TextBox 32"/>
-          <p:cNvSpPr txBox="1"/>
-          <p:nvPr/>
-        </p:nvSpPr>
-        <p:spPr>
-          <a:xfrm>
-            <a:off x="5458968" y="4215384"/>
-            <a:ext cx="5943600" cy="566928"/>
+              <a:rPr sz="1050" b="1">
+                <a:solidFill>
+                  <a:srgbClr val="B46A00"/>
+                </a:solidFill>
+                <a:latin typeface="微软雅黑"/>
+                <a:ea typeface="微软雅黑"/>
+              </a:rPr>
+              <a:t>外协范围</a:t>
+            </a:r>
+          </a:p>
+        </p:txBody>
+      </p:sp>
+      <p:sp>
+        <p:nvSpPr>
+          <p:cNvPr id="27" name="TextBox 26"/>
+          <p:cNvSpPr txBox="1"/>
+          <p:nvPr/>
+        </p:nvSpPr>
+        <p:spPr>
+          <a:xfrm>
+            <a:off x="1709928" y="2898648"/>
+            <a:ext cx="3008376" cy="777239"/>
           </a:xfrm>
           <a:prstGeom prst="rect">
             <a:avLst/>
@@ -19971,7 +21467,7 @@
           <a:p>
             <a:pPr algn="l">
               <a:lnSpc>
-                <a:spcPct val="125000"/>
+                <a:spcPct val="122000"/>
               </a:lnSpc>
               <a:spcBef>
                 <a:spcPts val="0"/>
@@ -19981,28 +21477,166 @@
               </a:spcAft>
             </a:pPr>
             <a:r>
-              <a:rPr sz="960" b="0">
-                <a:solidFill>
-                  <a:srgbClr val="6B7280"/>
-                </a:solidFill>
-                <a:latin typeface="微软雅黑"/>
-                <a:ea typeface="微软雅黑"/>
-              </a:rPr>
-              <a:t>T12T 最后一轮核价（SOP 2027.3）；BS5PR 取对方目标价后出报价</a:t>
-            </a:r>
-          </a:p>
-        </p:txBody>
-      </p:sp>
-      <p:sp>
-        <p:nvSpPr>
-          <p:cNvPr id="34" name="Rectangle 33"/>
+              <a:rPr sz="880" b="0">
+                <a:solidFill>
+                  <a:srgbClr val="171A20"/>
+                </a:solidFill>
+                <a:latin typeface="微软雅黑"/>
+                <a:ea typeface="微软雅黑"/>
+              </a:rPr>
+              <a:t>报价申请同时发给外协，未界定是「整个总成」还是「BOM 子零件」</a:t>
+            </a:r>
+          </a:p>
+        </p:txBody>
+      </p:sp>
+      <p:sp>
+        <p:nvSpPr>
+          <p:cNvPr id="28" name="TextBox 27"/>
+          <p:cNvSpPr txBox="1"/>
+          <p:nvPr/>
+        </p:nvSpPr>
+        <p:spPr>
+          <a:xfrm>
+            <a:off x="4864608" y="2898648"/>
+            <a:ext cx="2459736" cy="777239"/>
+          </a:xfrm>
+          <a:prstGeom prst="rect">
+            <a:avLst/>
+          </a:prstGeom>
+          <a:noFill/>
+        </p:spPr>
+        <p:txBody>
+          <a:bodyPr wrap="square" anchor="t" lIns="0" rIns="0" tIns="0" bIns="0">
+            <a:noAutofit/>
+          </a:bodyPr>
+          <a:lstStyle/>
+          <a:p>
+            <a:pPr algn="l">
+              <a:lnSpc>
+                <a:spcPct val="122000"/>
+              </a:lnSpc>
+              <a:spcBef>
+                <a:spcPts val="0"/>
+              </a:spcBef>
+              <a:spcAft>
+                <a:spcPts val="200"/>
+              </a:spcAft>
+            </a:pPr>
+            <a:r>
+              <a:rPr sz="880" b="0">
+                <a:solidFill>
+                  <a:srgbClr val="171A20"/>
+                </a:solidFill>
+                <a:latin typeface="微软雅黑"/>
+                <a:ea typeface="微软雅黑"/>
+              </a:rPr>
+              <a:t>范围不清价格不可比；把总成 BOM 与年量交出去，等于项目信息外泄、引入竞争</a:t>
+            </a:r>
+          </a:p>
+        </p:txBody>
+      </p:sp>
+      <p:sp>
+        <p:nvSpPr>
+          <p:cNvPr id="29" name="TextBox 28"/>
+          <p:cNvSpPr txBox="1"/>
+          <p:nvPr/>
+        </p:nvSpPr>
+        <p:spPr>
+          <a:xfrm>
+            <a:off x="7470648" y="2898648"/>
+            <a:ext cx="2459736" cy="777239"/>
+          </a:xfrm>
+          <a:prstGeom prst="rect">
+            <a:avLst/>
+          </a:prstGeom>
+          <a:noFill/>
+        </p:spPr>
+        <p:txBody>
+          <a:bodyPr wrap="square" anchor="t" lIns="0" rIns="0" tIns="0" bIns="0">
+            <a:noAutofit/>
+          </a:bodyPr>
+          <a:lstStyle/>
+          <a:p>
+            <a:pPr algn="l">
+              <a:lnSpc>
+                <a:spcPct val="122000"/>
+              </a:lnSpc>
+              <a:spcBef>
+                <a:spcPts val="0"/>
+              </a:spcBef>
+              <a:spcAft>
+                <a:spcPts val="200"/>
+              </a:spcAft>
+            </a:pPr>
+            <a:r>
+              <a:rPr sz="880" b="0">
+                <a:solidFill>
+                  <a:srgbClr val="171A20"/>
+                </a:solidFill>
+                <a:latin typeface="微软雅黑"/>
+                <a:ea typeface="微软雅黑"/>
+              </a:rPr>
+              <a:t>先问清范围再外协；外协只给单件信息，不给总成/项目/年量</a:t>
+            </a:r>
+          </a:p>
+        </p:txBody>
+      </p:sp>
+      <p:sp>
+        <p:nvSpPr>
+          <p:cNvPr id="30" name="TextBox 29"/>
+          <p:cNvSpPr txBox="1"/>
+          <p:nvPr/>
+        </p:nvSpPr>
+        <p:spPr>
+          <a:xfrm>
+            <a:off x="10076688" y="2898648"/>
+            <a:ext cx="1490472" cy="777239"/>
+          </a:xfrm>
+          <a:prstGeom prst="rect">
+            <a:avLst/>
+          </a:prstGeom>
+          <a:noFill/>
+        </p:spPr>
+        <p:txBody>
+          <a:bodyPr wrap="square" anchor="t" lIns="0" rIns="0" tIns="0" bIns="0">
+            <a:noAutofit/>
+          </a:bodyPr>
+          <a:lstStyle/>
+          <a:p>
+            <a:pPr algn="l">
+              <a:lnSpc>
+                <a:spcPct val="122000"/>
+              </a:lnSpc>
+              <a:spcBef>
+                <a:spcPts val="0"/>
+              </a:spcBef>
+              <a:spcAft>
+                <a:spcPts val="200"/>
+              </a:spcAft>
+            </a:pPr>
+            <a:r>
+              <a:rPr sz="880" b="1">
+                <a:solidFill>
+                  <a:srgbClr val="B46A00"/>
+                </a:solidFill>
+                <a:latin typeface="微软雅黑"/>
+                <a:ea typeface="微软雅黑"/>
+              </a:rPr>
+              <a:t>明确以自制为主口径，外协仅参考</a:t>
+            </a:r>
+          </a:p>
+        </p:txBody>
+      </p:sp>
+      <p:sp>
+        <p:nvSpPr>
+          <p:cNvPr id="31" name="Rectangle 30"/>
           <p:cNvSpPr/>
           <p:nvPr/>
         </p:nvSpPr>
         <p:spPr>
           <a:xfrm>
-            <a:off x="566928" y="4800600"/>
-            <a:ext cx="11055096" cy="603504"/>
+            <a:off x="566928" y="3840479"/>
+            <a:ext cx="11055096" cy="960119"/>
           </a:xfrm>
           <a:prstGeom prst="rect">
             <a:avLst/>
@@ -20041,14 +21675,422 @@
       </p:sp>
       <p:sp>
         <p:nvSpPr>
-          <p:cNvPr id="35" name="Rectangle 34"/>
+          <p:cNvPr id="32" name="Rectangle 31"/>
           <p:cNvSpPr/>
           <p:nvPr/>
         </p:nvSpPr>
         <p:spPr>
           <a:xfrm>
-            <a:off x="566928" y="4800600"/>
-            <a:ext cx="914400" cy="603504"/>
+            <a:off x="566928" y="3840479"/>
+            <a:ext cx="1051560" cy="960119"/>
+          </a:xfrm>
+          <a:prstGeom prst="rect">
+            <a:avLst/>
+          </a:prstGeom>
+          <a:solidFill>
+            <a:srgbClr val="FBFCFD"/>
+          </a:solidFill>
+          <a:ln>
+            <a:noFill/>
+          </a:ln>
+          <a:effectLst/>
+        </p:spPr>
+        <p:style>
+          <a:lnRef idx="1">
+            <a:schemeClr val="accent1"/>
+          </a:lnRef>
+          <a:fillRef idx="3">
+            <a:schemeClr val="accent1"/>
+          </a:fillRef>
+          <a:effectRef idx="2">
+            <a:schemeClr val="accent1"/>
+          </a:effectRef>
+          <a:fontRef idx="minor">
+            <a:schemeClr val="lt1"/>
+          </a:fontRef>
+        </p:style>
+        <p:txBody>
+          <a:bodyPr rtlCol="0" anchor="ctr"/>
+          <a:lstStyle/>
+          <a:p>
+            <a:pPr algn="ctr"/>
+          </a:p>
+        </p:txBody>
+      </p:sp>
+      <p:sp>
+        <p:nvSpPr>
+          <p:cNvPr id="33" name="Rectangle 32"/>
+          <p:cNvSpPr/>
+          <p:nvPr/>
+        </p:nvSpPr>
+        <p:spPr>
+          <a:xfrm>
+            <a:off x="566928" y="3840479"/>
+            <a:ext cx="45720" cy="960119"/>
+          </a:xfrm>
+          <a:prstGeom prst="rect">
+            <a:avLst/>
+          </a:prstGeom>
+          <a:solidFill>
+            <a:srgbClr val="1D4ED8"/>
+          </a:solidFill>
+          <a:ln>
+            <a:noFill/>
+          </a:ln>
+          <a:effectLst/>
+        </p:spPr>
+        <p:style>
+          <a:lnRef idx="1">
+            <a:schemeClr val="accent1"/>
+          </a:lnRef>
+          <a:fillRef idx="3">
+            <a:schemeClr val="accent1"/>
+          </a:fillRef>
+          <a:effectRef idx="2">
+            <a:schemeClr val="accent1"/>
+          </a:effectRef>
+          <a:fontRef idx="minor">
+            <a:schemeClr val="lt1"/>
+          </a:fontRef>
+        </p:style>
+        <p:txBody>
+          <a:bodyPr rtlCol="0" anchor="ctr"/>
+          <a:lstStyle/>
+          <a:p>
+            <a:pPr algn="ctr"/>
+          </a:p>
+        </p:txBody>
+      </p:sp>
+      <p:sp>
+        <p:nvSpPr>
+          <p:cNvPr id="34" name="TextBox 33"/>
+          <p:cNvSpPr txBox="1"/>
+          <p:nvPr/>
+        </p:nvSpPr>
+        <p:spPr>
+          <a:xfrm>
+            <a:off x="694944" y="4114799"/>
+            <a:ext cx="868680" cy="457200"/>
+          </a:xfrm>
+          <a:prstGeom prst="rect">
+            <a:avLst/>
+          </a:prstGeom>
+          <a:noFill/>
+        </p:spPr>
+        <p:txBody>
+          <a:bodyPr wrap="square" anchor="t" lIns="0" rIns="0" tIns="0" bIns="0">
+            <a:noAutofit/>
+          </a:bodyPr>
+          <a:lstStyle/>
+          <a:p>
+            <a:pPr algn="l">
+              <a:lnSpc>
+                <a:spcPct val="110000"/>
+              </a:lnSpc>
+              <a:spcBef>
+                <a:spcPts val="0"/>
+              </a:spcBef>
+              <a:spcAft>
+                <a:spcPts val="200"/>
+              </a:spcAft>
+            </a:pPr>
+            <a:r>
+              <a:rPr sz="1050" b="1">
+                <a:solidFill>
+                  <a:srgbClr val="1D4ED8"/>
+                </a:solidFill>
+                <a:latin typeface="微软雅黑"/>
+                <a:ea typeface="微软雅黑"/>
+              </a:rPr>
+              <a:t>流程卡点</a:t>
+            </a:r>
+          </a:p>
+        </p:txBody>
+      </p:sp>
+      <p:sp>
+        <p:nvSpPr>
+          <p:cNvPr id="35" name="TextBox 34"/>
+          <p:cNvSpPr txBox="1"/>
+          <p:nvPr/>
+        </p:nvSpPr>
+        <p:spPr>
+          <a:xfrm>
+            <a:off x="1709928" y="3950207"/>
+            <a:ext cx="3008376" cy="777239"/>
+          </a:xfrm>
+          <a:prstGeom prst="rect">
+            <a:avLst/>
+          </a:prstGeom>
+          <a:noFill/>
+        </p:spPr>
+        <p:txBody>
+          <a:bodyPr wrap="square" anchor="t" lIns="0" rIns="0" tIns="0" bIns="0">
+            <a:noAutofit/>
+          </a:bodyPr>
+          <a:lstStyle/>
+          <a:p>
+            <a:pPr algn="l">
+              <a:lnSpc>
+                <a:spcPct val="122000"/>
+              </a:lnSpc>
+              <a:spcBef>
+                <a:spcPts val="0"/>
+              </a:spcBef>
+              <a:spcAft>
+                <a:spcPts val="200"/>
+              </a:spcAft>
+            </a:pPr>
+            <a:r>
+              <a:rPr sz="880" b="0">
+                <a:solidFill>
+                  <a:srgbClr val="171A20"/>
+                </a:solidFill>
+                <a:latin typeface="微软雅黑"/>
+                <a:ea typeface="微软雅黑"/>
+              </a:rPr>
+              <a:t>9/30 拟好的《10/18–19 会议确认函》至今仍在草稿箱，无人拍板发出</a:t>
+            </a:r>
+          </a:p>
+        </p:txBody>
+      </p:sp>
+      <p:sp>
+        <p:nvSpPr>
+          <p:cNvPr id="36" name="TextBox 35"/>
+          <p:cNvSpPr txBox="1"/>
+          <p:nvPr/>
+        </p:nvSpPr>
+        <p:spPr>
+          <a:xfrm>
+            <a:off x="4864608" y="3950207"/>
+            <a:ext cx="2459736" cy="777239"/>
+          </a:xfrm>
+          <a:prstGeom prst="rect">
+            <a:avLst/>
+          </a:prstGeom>
+          <a:noFill/>
+        </p:spPr>
+        <p:txBody>
+          <a:bodyPr wrap="square" anchor="t" lIns="0" rIns="0" tIns="0" bIns="0">
+            <a:noAutofit/>
+          </a:bodyPr>
+          <a:lstStyle/>
+          <a:p>
+            <a:pPr algn="l">
+              <a:lnSpc>
+                <a:spcPct val="122000"/>
+              </a:lnSpc>
+              <a:spcBef>
+                <a:spcPts val="0"/>
+              </a:spcBef>
+              <a:spcAft>
+                <a:spcPts val="200"/>
+              </a:spcAft>
+            </a:pPr>
+            <a:r>
+              <a:rPr sz="880" b="0">
+                <a:solidFill>
+                  <a:srgbClr val="171A20"/>
+                </a:solidFill>
+                <a:latin typeface="微软雅黑"/>
+                <a:ea typeface="微软雅黑"/>
+              </a:rPr>
+              <a:t>会议的时间、参会人、议题都无书面确认，会后口径容易反复</a:t>
+            </a:r>
+          </a:p>
+        </p:txBody>
+      </p:sp>
+      <p:sp>
+        <p:nvSpPr>
+          <p:cNvPr id="37" name="TextBox 36"/>
+          <p:cNvSpPr txBox="1"/>
+          <p:nvPr/>
+        </p:nvSpPr>
+        <p:spPr>
+          <a:xfrm>
+            <a:off x="7470648" y="3950207"/>
+            <a:ext cx="2459736" cy="777239"/>
+          </a:xfrm>
+          <a:prstGeom prst="rect">
+            <a:avLst/>
+          </a:prstGeom>
+          <a:noFill/>
+        </p:spPr>
+        <p:txBody>
+          <a:bodyPr wrap="square" anchor="t" lIns="0" rIns="0" tIns="0" bIns="0">
+            <a:noAutofit/>
+          </a:bodyPr>
+          <a:lstStyle/>
+          <a:p>
+            <a:pPr algn="l">
+              <a:lnSpc>
+                <a:spcPct val="122000"/>
+              </a:lnSpc>
+              <a:spcBef>
+                <a:spcPts val="0"/>
+              </a:spcBef>
+              <a:spcAft>
+                <a:spcPts val="200"/>
+              </a:spcAft>
+            </a:pPr>
+            <a:r>
+              <a:rPr sz="880" b="0">
+                <a:solidFill>
+                  <a:srgbClr val="171A20"/>
+                </a:solidFill>
+                <a:latin typeface="微软雅黑"/>
+                <a:ea typeface="微软雅黑"/>
+              </a:rPr>
+              <a:t>文本已备好待发，需上级确认后由销售发出</a:t>
+            </a:r>
+          </a:p>
+        </p:txBody>
+      </p:sp>
+      <p:sp>
+        <p:nvSpPr>
+          <p:cNvPr id="38" name="TextBox 37"/>
+          <p:cNvSpPr txBox="1"/>
+          <p:nvPr/>
+        </p:nvSpPr>
+        <p:spPr>
+          <a:xfrm>
+            <a:off x="10076688" y="3950207"/>
+            <a:ext cx="1490472" cy="777239"/>
+          </a:xfrm>
+          <a:prstGeom prst="rect">
+            <a:avLst/>
+          </a:prstGeom>
+          <a:noFill/>
+        </p:spPr>
+        <p:txBody>
+          <a:bodyPr wrap="square" anchor="t" lIns="0" rIns="0" tIns="0" bIns="0">
+            <a:noAutofit/>
+          </a:bodyPr>
+          <a:lstStyle/>
+          <a:p>
+            <a:pPr algn="l">
+              <a:lnSpc>
+                <a:spcPct val="122000"/>
+              </a:lnSpc>
+              <a:spcBef>
+                <a:spcPts val="0"/>
+              </a:spcBef>
+              <a:spcAft>
+                <a:spcPts val="200"/>
+              </a:spcAft>
+            </a:pPr>
+            <a:r>
+              <a:rPr sz="880" b="1">
+                <a:solidFill>
+                  <a:srgbClr val="1D4ED8"/>
+                </a:solidFill>
+                <a:latin typeface="微软雅黑"/>
+                <a:ea typeface="微软雅黑"/>
+              </a:rPr>
+              <a:t>待拍板（P0）</a:t>
+            </a:r>
+          </a:p>
+        </p:txBody>
+      </p:sp>
+      <p:sp>
+        <p:nvSpPr>
+          <p:cNvPr id="39" name="Rectangle 38"/>
+          <p:cNvSpPr/>
+          <p:nvPr/>
+        </p:nvSpPr>
+        <p:spPr>
+          <a:xfrm>
+            <a:off x="566928" y="4892040"/>
+            <a:ext cx="11055096" cy="960119"/>
+          </a:xfrm>
+          <a:prstGeom prst="rect">
+            <a:avLst/>
+          </a:prstGeom>
+          <a:solidFill>
+            <a:srgbClr val="FFFFFF"/>
+          </a:solidFill>
+          <a:ln w="11430">
+            <a:solidFill>
+              <a:srgbClr val="E3E6EB"/>
+            </a:solidFill>
+          </a:ln>
+          <a:effectLst/>
+        </p:spPr>
+        <p:style>
+          <a:lnRef idx="1">
+            <a:schemeClr val="accent1"/>
+          </a:lnRef>
+          <a:fillRef idx="3">
+            <a:schemeClr val="accent1"/>
+          </a:fillRef>
+          <a:effectRef idx="2">
+            <a:schemeClr val="accent1"/>
+          </a:effectRef>
+          <a:fontRef idx="minor">
+            <a:schemeClr val="lt1"/>
+          </a:fontRef>
+        </p:style>
+        <p:txBody>
+          <a:bodyPr rtlCol="0" anchor="ctr"/>
+          <a:lstStyle/>
+          <a:p>
+            <a:pPr algn="ctr"/>
+          </a:p>
+        </p:txBody>
+      </p:sp>
+      <p:sp>
+        <p:nvSpPr>
+          <p:cNvPr id="40" name="Rectangle 39"/>
+          <p:cNvSpPr/>
+          <p:nvPr/>
+        </p:nvSpPr>
+        <p:spPr>
+          <a:xfrm>
+            <a:off x="566928" y="4892040"/>
+            <a:ext cx="1051560" cy="960119"/>
+          </a:xfrm>
+          <a:prstGeom prst="rect">
+            <a:avLst/>
+          </a:prstGeom>
+          <a:solidFill>
+            <a:srgbClr val="FBFCFD"/>
+          </a:solidFill>
+          <a:ln>
+            <a:noFill/>
+          </a:ln>
+          <a:effectLst/>
+        </p:spPr>
+        <p:style>
+          <a:lnRef idx="1">
+            <a:schemeClr val="accent1"/>
+          </a:lnRef>
+          <a:fillRef idx="3">
+            <a:schemeClr val="accent1"/>
+          </a:fillRef>
+          <a:effectRef idx="2">
+            <a:schemeClr val="accent1"/>
+          </a:effectRef>
+          <a:fontRef idx="minor">
+            <a:schemeClr val="lt1"/>
+          </a:fontRef>
+        </p:style>
+        <p:txBody>
+          <a:bodyPr rtlCol="0" anchor="ctr"/>
+          <a:lstStyle/>
+          <a:p>
+            <a:pPr algn="ctr"/>
+          </a:p>
+        </p:txBody>
+      </p:sp>
+      <p:sp>
+        <p:nvSpPr>
+          <p:cNvPr id="41" name="Rectangle 40"/>
+          <p:cNvSpPr/>
+          <p:nvPr/>
+        </p:nvSpPr>
+        <p:spPr>
+          <a:xfrm>
+            <a:off x="566928" y="4892040"/>
+            <a:ext cx="45720" cy="960119"/>
           </a:xfrm>
           <a:prstGeom prst="rect">
             <a:avLst/>
@@ -20085,100 +22127,14 @@
       </p:sp>
       <p:sp>
         <p:nvSpPr>
-          <p:cNvPr id="36" name="TextBox 35"/>
-          <p:cNvSpPr txBox="1"/>
-          <p:nvPr/>
-        </p:nvSpPr>
-        <p:spPr>
-          <a:xfrm>
-            <a:off x="566928" y="4983480"/>
-            <a:ext cx="914400" cy="274320"/>
-          </a:xfrm>
-          <a:prstGeom prst="rect">
-            <a:avLst/>
-          </a:prstGeom>
-          <a:noFill/>
-        </p:spPr>
-        <p:txBody>
-          <a:bodyPr wrap="square" anchor="t" lIns="0" rIns="0" tIns="0" bIns="0">
-            <a:noAutofit/>
-          </a:bodyPr>
-          <a:lstStyle/>
-          <a:p>
-            <a:pPr algn="ctr">
-              <a:spcBef>
-                <a:spcPts val="0"/>
-              </a:spcBef>
-              <a:spcAft>
-                <a:spcPts val="200"/>
-              </a:spcAft>
-            </a:pPr>
-            <a:r>
-              <a:rPr sz="1500" b="1">
-                <a:solidFill>
-                  <a:srgbClr val="FFFFFF"/>
-                </a:solidFill>
-                <a:latin typeface="Arial"/>
-                <a:ea typeface="微软雅黑"/>
-              </a:rPr>
-              <a:t>P3</a:t>
-            </a:r>
-          </a:p>
-        </p:txBody>
-      </p:sp>
-      <p:sp>
-        <p:nvSpPr>
-          <p:cNvPr id="37" name="TextBox 36"/>
-          <p:cNvSpPr txBox="1"/>
-          <p:nvPr/>
-        </p:nvSpPr>
-        <p:spPr>
-          <a:xfrm>
-            <a:off x="1709928" y="4882896"/>
-            <a:ext cx="3931920" cy="274320"/>
-          </a:xfrm>
-          <a:prstGeom prst="rect">
-            <a:avLst/>
-          </a:prstGeom>
-          <a:noFill/>
-        </p:spPr>
-        <p:txBody>
-          <a:bodyPr wrap="square" anchor="t" lIns="0" rIns="0" tIns="0" bIns="0">
-            <a:noAutofit/>
-          </a:bodyPr>
-          <a:lstStyle/>
-          <a:p>
-            <a:pPr algn="l">
-              <a:spcBef>
-                <a:spcPts val="0"/>
-              </a:spcBef>
-              <a:spcAft>
-                <a:spcPts val="200"/>
-              </a:spcAft>
-            </a:pPr>
-            <a:r>
-              <a:rPr sz="1150" b="1">
-                <a:solidFill>
-                  <a:srgbClr val="171A20"/>
-                </a:solidFill>
-                <a:latin typeface="微软雅黑"/>
-                <a:ea typeface="微软雅黑"/>
-              </a:rPr>
-              <a:t>新机会与海外</a:t>
-            </a:r>
-          </a:p>
-        </p:txBody>
-      </p:sp>
-      <p:sp>
-        <p:nvSpPr>
-          <p:cNvPr id="38" name="TextBox 37"/>
-          <p:cNvSpPr txBox="1"/>
-          <p:nvPr/>
-        </p:nvSpPr>
-        <p:spPr>
-          <a:xfrm>
-            <a:off x="5458968" y="4892040"/>
-            <a:ext cx="5943600" cy="566928"/>
+          <p:cNvPr id="42" name="TextBox 41"/>
+          <p:cNvSpPr txBox="1"/>
+          <p:nvPr/>
+        </p:nvSpPr>
+        <p:spPr>
+          <a:xfrm>
+            <a:off x="694944" y="5166359"/>
+            <a:ext cx="868680" cy="457200"/>
           </a:xfrm>
           <a:prstGeom prst="rect">
             <a:avLst/>
@@ -20193,7 +22149,7 @@
           <a:p>
             <a:pPr algn="l">
               <a:lnSpc>
-                <a:spcPct val="125000"/>
+                <a:spcPct val="110000"/>
               </a:lnSpc>
               <a:spcBef>
                 <a:spcPts val="0"/>
@@ -20203,28 +22159,212 @@
               </a:spcAft>
             </a:pPr>
             <a:r>
-              <a:rPr sz="960" b="0">
+              <a:rPr sz="1050" b="1">
                 <a:solidFill>
                   <a:srgbClr val="6B7280"/>
                 </a:solidFill>
                 <a:latin typeface="微软雅黑"/>
                 <a:ea typeface="微软雅黑"/>
               </a:rPr>
-              <a:t>VFe32-3M 小样 20 片；CX835 等车型量；上汽越南 AS5PM-X1（10/18–19 会议，四季度出顶棚工艺与投资方案）</a:t>
-            </a:r>
-          </a:p>
-        </p:txBody>
-      </p:sp>
-      <p:sp>
-        <p:nvSpPr>
-          <p:cNvPr id="39" name="Rectangle 38"/>
+              <a:t>客户侧倒挂</a:t>
+            </a:r>
+          </a:p>
+        </p:txBody>
+      </p:sp>
+      <p:sp>
+        <p:nvSpPr>
+          <p:cNvPr id="43" name="TextBox 42"/>
+          <p:cNvSpPr txBox="1"/>
+          <p:nvPr/>
+        </p:nvSpPr>
+        <p:spPr>
+          <a:xfrm>
+            <a:off x="1709928" y="5001768"/>
+            <a:ext cx="3008376" cy="777239"/>
+          </a:xfrm>
+          <a:prstGeom prst="rect">
+            <a:avLst/>
+          </a:prstGeom>
+          <a:noFill/>
+        </p:spPr>
+        <p:txBody>
+          <a:bodyPr wrap="square" anchor="t" lIns="0" rIns="0" tIns="0" bIns="0">
+            <a:noAutofit/>
+          </a:bodyPr>
+          <a:lstStyle/>
+          <a:p>
+            <a:pPr algn="l">
+              <a:lnSpc>
+                <a:spcPct val="122000"/>
+              </a:lnSpc>
+              <a:spcBef>
+                <a:spcPts val="0"/>
+              </a:spcBef>
+              <a:spcAft>
+                <a:spcPts val="200"/>
+              </a:spcAft>
+            </a:pPr>
+            <a:r>
+              <a:rPr sz="880" b="0">
+                <a:solidFill>
+                  <a:srgbClr val="171A20"/>
+                </a:solidFill>
+                <a:latin typeface="微软雅黑"/>
+                <a:ea typeface="微软雅黑"/>
+              </a:rPr>
+              <a:t>S56 首单 12,040 件单价为 0 即下单；ROX01 先交付后定价；EHEA 排产后出现「大质量问题」</a:t>
+            </a:r>
+          </a:p>
+        </p:txBody>
+      </p:sp>
+      <p:sp>
+        <p:nvSpPr>
+          <p:cNvPr id="44" name="TextBox 43"/>
+          <p:cNvSpPr txBox="1"/>
+          <p:nvPr/>
+        </p:nvSpPr>
+        <p:spPr>
+          <a:xfrm>
+            <a:off x="4864608" y="5001768"/>
+            <a:ext cx="2459736" cy="777239"/>
+          </a:xfrm>
+          <a:prstGeom prst="rect">
+            <a:avLst/>
+          </a:prstGeom>
+          <a:noFill/>
+        </p:spPr>
+        <p:txBody>
+          <a:bodyPr wrap="square" anchor="t" lIns="0" rIns="0" tIns="0" bIns="0">
+            <a:noAutofit/>
+          </a:bodyPr>
+          <a:lstStyle/>
+          <a:p>
+            <a:pPr algn="l">
+              <a:lnSpc>
+                <a:spcPct val="122000"/>
+              </a:lnSpc>
+              <a:spcBef>
+                <a:spcPts val="0"/>
+              </a:spcBef>
+              <a:spcAft>
+                <a:spcPts val="200"/>
+              </a:spcAft>
+            </a:pPr>
+            <a:r>
+              <a:rPr sz="880" b="0">
+                <a:solidFill>
+                  <a:srgbClr val="171A20"/>
+                </a:solidFill>
+                <a:latin typeface="微软雅黑"/>
+                <a:ea typeface="微软雅黑"/>
+              </a:rPr>
+              <a:t>收入确认与对账被动，季度数字需要反复修订</a:t>
+            </a:r>
+          </a:p>
+        </p:txBody>
+      </p:sp>
+      <p:sp>
+        <p:nvSpPr>
+          <p:cNvPr id="45" name="TextBox 44"/>
+          <p:cNvSpPr txBox="1"/>
+          <p:nvPr/>
+        </p:nvSpPr>
+        <p:spPr>
+          <a:xfrm>
+            <a:off x="7470648" y="5001768"/>
+            <a:ext cx="2459736" cy="777239"/>
+          </a:xfrm>
+          <a:prstGeom prst="rect">
+            <a:avLst/>
+          </a:prstGeom>
+          <a:noFill/>
+        </p:spPr>
+        <p:txBody>
+          <a:bodyPr wrap="square" anchor="t" lIns="0" rIns="0" tIns="0" bIns="0">
+            <a:noAutofit/>
+          </a:bodyPr>
+          <a:lstStyle/>
+          <a:p>
+            <a:pPr algn="l">
+              <a:lnSpc>
+                <a:spcPct val="122000"/>
+              </a:lnSpc>
+              <a:spcBef>
+                <a:spcPts val="0"/>
+              </a:spcBef>
+              <a:spcAft>
+                <a:spcPts val="200"/>
+              </a:spcAft>
+            </a:pPr>
+            <a:r>
+              <a:rPr sz="880" b="0">
+                <a:solidFill>
+                  <a:srgbClr val="171A20"/>
+                </a:solidFill>
+                <a:latin typeface="微软雅黑"/>
+                <a:ea typeface="微软雅黑"/>
+              </a:rPr>
+              <a:t>按可核数量交付，价格与质量书面闭环后再确认收入</a:t>
+            </a:r>
+          </a:p>
+        </p:txBody>
+      </p:sp>
+      <p:sp>
+        <p:nvSpPr>
+          <p:cNvPr id="46" name="TextBox 45"/>
+          <p:cNvSpPr txBox="1"/>
+          <p:nvPr/>
+        </p:nvSpPr>
+        <p:spPr>
+          <a:xfrm>
+            <a:off x="10076688" y="5001768"/>
+            <a:ext cx="1490472" cy="777239"/>
+          </a:xfrm>
+          <a:prstGeom prst="rect">
+            <a:avLst/>
+          </a:prstGeom>
+          <a:noFill/>
+        </p:spPr>
+        <p:txBody>
+          <a:bodyPr wrap="square" anchor="t" lIns="0" rIns="0" tIns="0" bIns="0">
+            <a:noAutofit/>
+          </a:bodyPr>
+          <a:lstStyle/>
+          <a:p>
+            <a:pPr algn="l">
+              <a:lnSpc>
+                <a:spcPct val="122000"/>
+              </a:lnSpc>
+              <a:spcBef>
+                <a:spcPts val="0"/>
+              </a:spcBef>
+              <a:spcAft>
+                <a:spcPts val="200"/>
+              </a:spcAft>
+            </a:pPr>
+            <a:r>
+              <a:rPr sz="880" b="1">
+                <a:solidFill>
+                  <a:srgbClr val="6B7280"/>
+                </a:solidFill>
+                <a:latin typeface="微软雅黑"/>
+                <a:ea typeface="微软雅黑"/>
+              </a:rPr>
+              <a:t>S56、ROX01 已定价；EHEA 本周闭环</a:t>
+            </a:r>
+          </a:p>
+        </p:txBody>
+      </p:sp>
+      <p:sp>
+        <p:nvSpPr>
+          <p:cNvPr id="47" name="Rectangle 46"/>
           <p:cNvSpPr/>
           <p:nvPr/>
         </p:nvSpPr>
         <p:spPr>
           <a:xfrm>
-            <a:off x="566928" y="5550408"/>
-            <a:ext cx="11055096" cy="713232"/>
+            <a:off x="566928" y="5980176"/>
+            <a:ext cx="11055096" cy="566928"/>
           </a:xfrm>
           <a:prstGeom prst="rect">
             <a:avLst/>
@@ -20263,14 +22403,14 @@
       </p:sp>
       <p:sp>
         <p:nvSpPr>
-          <p:cNvPr id="40" name="TextBox 39"/>
-          <p:cNvSpPr txBox="1"/>
-          <p:nvPr/>
-        </p:nvSpPr>
-        <p:spPr>
-          <a:xfrm>
-            <a:off x="841247" y="5641848"/>
-            <a:ext cx="10506456" cy="548640"/>
+          <p:cNvPr id="48" name="TextBox 47"/>
+          <p:cNvSpPr txBox="1"/>
+          <p:nvPr/>
+        </p:nvSpPr>
+        <p:spPr>
+          <a:xfrm>
+            <a:off x="804672" y="6071616"/>
+            <a:ext cx="10597896" cy="420624"/>
           </a:xfrm>
           <a:prstGeom prst="rect">
             <a:avLst/>
@@ -20285,7 +22425,7 @@
           <a:p>
             <a:pPr algn="l">
               <a:lnSpc>
-                <a:spcPct val="130000"/>
+                <a:spcPct val="125000"/>
               </a:lnSpc>
               <a:spcBef>
                 <a:spcPts val="0"/>
@@ -20295,24 +22435,24 @@
               </a:spcAft>
             </a:pPr>
             <a:r>
-              <a:rPr sz="1050" b="1">
+              <a:rPr sz="960" b="1">
                 <a:solidFill>
                   <a:srgbClr val="E82127"/>
                 </a:solidFill>
                 <a:latin typeface="微软雅黑"/>
                 <a:ea typeface="微软雅黑"/>
               </a:rPr>
-              <a:t>一句话总结：</a:t>
-            </a:r>
-            <a:r>
-              <a:rPr sz="1050" b="0">
+              <a:t>我的立场：</a:t>
+            </a:r>
+            <a:r>
+              <a:rPr sz="960" b="0">
                 <a:solidFill>
                   <a:srgbClr val="171A20"/>
                 </a:solidFill>
                 <a:latin typeface="微软雅黑"/>
                 <a:ea typeface="微软雅黑"/>
               </a:rPr>
-              <a:t>三季度把「定点」做出来了（4 个），四季度要把「钱」做出来 —— 先解决 EHEA 质量与 S56 定价两个 P0，其余按节奏推进。</a:t>
+              <a:t>对外报价必须由销售对口径负责。内部可以提供成本、可以参与评估，但不能替代销售定价与对外承诺——否则出了错，没人能对客户交代。</a:t>
             </a:r>
           </a:p>
         </p:txBody>

--- a/files/臻畅-2026Q3-项目汇报-浅色版-20261018.pptx
+++ b/files/臻畅-2026Q3-项目汇报-浅色版-20261018.pptx
@@ -3264,8 +3264,8 @@
                 <a:solidFill>
                   <a:srgbClr val="E82127"/>
                 </a:solidFill>
-                <a:latin typeface="Arial"/>
-                <a:ea typeface="微软雅黑"/>
+                <a:latin typeface="宋体"/>
+                <a:ea typeface="宋体"/>
               </a:rPr>
               <a:t>2026 Q3 · BUSINESS REVIEW</a:t>
             </a:r>
@@ -3307,8 +3307,8 @@
                 <a:solidFill>
                   <a:srgbClr val="171A20"/>
                 </a:solidFill>
-                <a:latin typeface="微软雅黑"/>
-                <a:ea typeface="微软雅黑"/>
+                <a:latin typeface="宋体"/>
+                <a:ea typeface="宋体"/>
               </a:rPr>
               <a:t>三季度项目汇报</a:t>
             </a:r>
@@ -3327,8 +3327,8 @@
                 <a:solidFill>
                   <a:srgbClr val="6B7280"/>
                 </a:solidFill>
-                <a:latin typeface="微软雅黑"/>
-                <a:ea typeface="微软雅黑"/>
+                <a:latin typeface="宋体"/>
+                <a:ea typeface="宋体"/>
               </a:rPr>
               <a:t>项目全景 · 定点与量产 · 订单交付 · 风险与四季度计划</a:t>
             </a:r>
@@ -3414,8 +3414,8 @@
                 <a:solidFill>
                   <a:srgbClr val="171A20"/>
                 </a:solidFill>
-                <a:latin typeface="微软雅黑"/>
-                <a:ea typeface="微软雅黑"/>
+                <a:latin typeface="宋体"/>
+                <a:ea typeface="宋体"/>
               </a:rPr>
               <a:t>汇报人：曹旭锋（Zane）</a:t>
             </a:r>
@@ -3434,8 +3434,8 @@
                 <a:solidFill>
                   <a:srgbClr val="6B7280"/>
                 </a:solidFill>
-                <a:latin typeface="微软雅黑"/>
-                <a:ea typeface="微软雅黑"/>
+                <a:latin typeface="宋体"/>
+                <a:ea typeface="宋体"/>
               </a:rPr>
               <a:t>常州臻畅汽车配件有限公司 · 上海泰瑞电子科技有限公司</a:t>
             </a:r>
@@ -3454,8 +3454,8 @@
                 <a:solidFill>
                   <a:srgbClr val="6B7280"/>
                 </a:solidFill>
-                <a:latin typeface="微软雅黑"/>
-                <a:ea typeface="微软雅黑"/>
+                <a:latin typeface="宋体"/>
+                <a:ea typeface="宋体"/>
               </a:rPr>
               <a:t>2026 年 10 月 18 日     ｜     数据口径：三季度（7/1–9/30）未税</a:t>
             </a:r>
@@ -3603,8 +3603,8 @@
                 <a:solidFill>
                   <a:srgbClr val="171A20"/>
                 </a:solidFill>
-                <a:latin typeface="微软雅黑"/>
-                <a:ea typeface="微软雅黑"/>
+                <a:latin typeface="宋体"/>
+                <a:ea typeface="宋体"/>
               </a:rPr>
               <a:t>四季度计划</a:t>
             </a:r>
@@ -3646,8 +3646,8 @@
                 <a:solidFill>
                   <a:srgbClr val="6B7280"/>
                 </a:solidFill>
-                <a:latin typeface="微软雅黑"/>
-                <a:ea typeface="微软雅黑"/>
+                <a:latin typeface="宋体"/>
+                <a:ea typeface="宋体"/>
               </a:rPr>
               <a:t>按优先级：P0 = 不解决就影响收入或交付</a:t>
             </a:r>
@@ -3733,8 +3733,8 @@
                 <a:solidFill>
                   <a:srgbClr val="6B7280"/>
                 </a:solidFill>
-                <a:latin typeface="Arial"/>
-                <a:ea typeface="微软雅黑"/>
+                <a:latin typeface="宋体"/>
+                <a:ea typeface="宋体"/>
               </a:rPr>
               <a:t>10 / 10</a:t>
             </a:r>
@@ -3776,8 +3776,8 @@
                 <a:solidFill>
                   <a:srgbClr val="6B7280"/>
                 </a:solidFill>
-                <a:latin typeface="微软雅黑"/>
-                <a:ea typeface="微软雅黑"/>
+                <a:latin typeface="宋体"/>
+                <a:ea typeface="宋体"/>
               </a:rPr>
               <a:t>常州臻畅汽车配件有限公司 · 上海泰瑞电子科技有限公司</a:t>
             </a:r>
@@ -3909,8 +3909,8 @@
                 <a:solidFill>
                   <a:srgbClr val="FFFFFF"/>
                 </a:solidFill>
-                <a:latin typeface="Arial"/>
-                <a:ea typeface="微软雅黑"/>
+                <a:latin typeface="宋体"/>
+                <a:ea typeface="宋体"/>
               </a:rPr>
               <a:t>P0</a:t>
             </a:r>
@@ -3952,8 +3952,8 @@
                 <a:solidFill>
                   <a:srgbClr val="171A20"/>
                 </a:solidFill>
-                <a:latin typeface="微软雅黑"/>
-                <a:ea typeface="微软雅黑"/>
+                <a:latin typeface="宋体"/>
+                <a:ea typeface="宋体"/>
               </a:rPr>
               <a:t>EHEA 质量闭环与交付</a:t>
             </a:r>
@@ -3998,8 +3998,8 @@
                 <a:solidFill>
                   <a:srgbClr val="6B7280"/>
                 </a:solidFill>
-                <a:latin typeface="微软雅黑"/>
-                <a:ea typeface="微软雅黑"/>
+                <a:latin typeface="宋体"/>
+                <a:ea typeface="宋体"/>
               </a:rPr>
               <a:t>查清问题件号与批次 → 出整改/复检方案 → 保 10/5 前 281,039 件交付；对客户书面反馈</a:t>
             </a:r>
@@ -4131,8 +4131,8 @@
                 <a:solidFill>
                   <a:srgbClr val="FFFFFF"/>
                 </a:solidFill>
-                <a:latin typeface="Arial"/>
-                <a:ea typeface="微软雅黑"/>
+                <a:latin typeface="宋体"/>
+                <a:ea typeface="宋体"/>
               </a:rPr>
               <a:t>P0</a:t>
             </a:r>
@@ -4174,8 +4174,8 @@
                 <a:solidFill>
                   <a:srgbClr val="171A20"/>
                 </a:solidFill>
-                <a:latin typeface="微软雅黑"/>
-                <a:ea typeface="微软雅黑"/>
+                <a:latin typeface="宋体"/>
+                <a:ea typeface="宋体"/>
               </a:rPr>
               <a:t>S56 价格签认与排产</a:t>
             </a:r>
@@ -4220,8 +4220,8 @@
                 <a:solidFill>
                   <a:srgbClr val="6B7280"/>
                 </a:solidFill>
-                <a:latin typeface="微软雅黑"/>
-                <a:ea typeface="微软雅黑"/>
+                <a:latin typeface="宋体"/>
+                <a:ea typeface="宋体"/>
               </a:rPr>
               <a:t>取得客户对 13 件单价的签认 → 首单 PO 生效 → 刀模排版/打样确认 → 备料排产；同步启动 3 件低毛利件降本</a:t>
             </a:r>
@@ -4353,8 +4353,8 @@
                 <a:solidFill>
                   <a:srgbClr val="FFFFFF"/>
                 </a:solidFill>
-                <a:latin typeface="Arial"/>
-                <a:ea typeface="微软雅黑"/>
+                <a:latin typeface="宋体"/>
+                <a:ea typeface="宋体"/>
               </a:rPr>
               <a:t>P1</a:t>
             </a:r>
@@ -4396,8 +4396,8 @@
                 <a:solidFill>
                   <a:srgbClr val="171A20"/>
                 </a:solidFill>
-                <a:latin typeface="微软雅黑"/>
-                <a:ea typeface="微软雅黑"/>
+                <a:latin typeface="宋体"/>
+                <a:ea typeface="宋体"/>
               </a:rPr>
               <a:t>ZH5EM、SHD 供应商与 OTS</a:t>
             </a:r>
@@ -4442,8 +4442,8 @@
                 <a:solidFill>
                   <a:srgbClr val="6B7280"/>
                 </a:solidFill>
-                <a:latin typeface="微软雅黑"/>
-                <a:ea typeface="微软雅黑"/>
+                <a:latin typeface="宋体"/>
+                <a:ea typeface="宋体"/>
               </a:rPr>
               <a:t>锁定泡棉/塔扣供应商 → 完成 OTS 测试 → 建立 CAMDS 与量产文件</a:t>
             </a:r>
@@ -4575,8 +4575,8 @@
                 <a:solidFill>
                   <a:srgbClr val="FFFFFF"/>
                 </a:solidFill>
-                <a:latin typeface="Arial"/>
-                <a:ea typeface="微软雅黑"/>
+                <a:latin typeface="宋体"/>
+                <a:ea typeface="宋体"/>
               </a:rPr>
               <a:t>P1</a:t>
             </a:r>
@@ -4618,8 +4618,8 @@
                 <a:solidFill>
                   <a:srgbClr val="171A20"/>
                 </a:solidFill>
-                <a:latin typeface="微软雅黑"/>
-                <a:ea typeface="微软雅黑"/>
+                <a:latin typeface="宋体"/>
+                <a:ea typeface="宋体"/>
               </a:rPr>
               <a:t>ROX01 合同与稳定交付</a:t>
             </a:r>
@@ -4664,8 +4664,8 @@
                 <a:solidFill>
                   <a:srgbClr val="6B7280"/>
                 </a:solidFill>
-                <a:latin typeface="微软雅黑"/>
-                <a:ea typeface="微软雅黑"/>
+                <a:latin typeface="宋体"/>
+                <a:ea typeface="宋体"/>
               </a:rPr>
               <a:t>落合同与 90 天承兑账期 → 与已交付 29,500 件按定点价对账 → 稳定拉动（年 12,000 套）</a:t>
             </a:r>
@@ -4797,8 +4797,8 @@
                 <a:solidFill>
                   <a:srgbClr val="FFFFFF"/>
                 </a:solidFill>
-                <a:latin typeface="Arial"/>
-                <a:ea typeface="微软雅黑"/>
+                <a:latin typeface="宋体"/>
+                <a:ea typeface="宋体"/>
               </a:rPr>
               <a:t>P2</a:t>
             </a:r>
@@ -4840,8 +4840,8 @@
                 <a:solidFill>
                   <a:srgbClr val="171A20"/>
                 </a:solidFill>
-                <a:latin typeface="微软雅黑"/>
-                <a:ea typeface="微软雅黑"/>
+                <a:latin typeface="宋体"/>
+                <a:ea typeface="宋体"/>
               </a:rPr>
               <a:t>T12T 核价、BS5PR 报价</a:t>
             </a:r>
@@ -4886,8 +4886,8 @@
                 <a:solidFill>
                   <a:srgbClr val="6B7280"/>
                 </a:solidFill>
-                <a:latin typeface="微软雅黑"/>
-                <a:ea typeface="微软雅黑"/>
+                <a:latin typeface="宋体"/>
+                <a:ea typeface="宋体"/>
               </a:rPr>
               <a:t>T12T 最后一轮核价（SOP 2027.3）；BS5PR 取对方目标价后出报价</a:t>
             </a:r>
@@ -5019,8 +5019,8 @@
                 <a:solidFill>
                   <a:srgbClr val="FFFFFF"/>
                 </a:solidFill>
-                <a:latin typeface="Arial"/>
-                <a:ea typeface="微软雅黑"/>
+                <a:latin typeface="宋体"/>
+                <a:ea typeface="宋体"/>
               </a:rPr>
               <a:t>P3</a:t>
             </a:r>
@@ -5062,8 +5062,8 @@
                 <a:solidFill>
                   <a:srgbClr val="171A20"/>
                 </a:solidFill>
-                <a:latin typeface="微软雅黑"/>
-                <a:ea typeface="微软雅黑"/>
+                <a:latin typeface="宋体"/>
+                <a:ea typeface="宋体"/>
               </a:rPr>
               <a:t>新机会与海外</a:t>
             </a:r>
@@ -5108,8 +5108,8 @@
                 <a:solidFill>
                   <a:srgbClr val="6B7280"/>
                 </a:solidFill>
-                <a:latin typeface="微软雅黑"/>
-                <a:ea typeface="微软雅黑"/>
+                <a:latin typeface="宋体"/>
+                <a:ea typeface="宋体"/>
               </a:rPr>
               <a:t>VFe32-3M 小样 20 片；CX835 等车型量；上汽越南 AS5PM-X1（10/18–19 会议，四季度出顶棚工艺与投资方案）</a:t>
             </a:r>
@@ -5200,8 +5200,8 @@
                 <a:solidFill>
                   <a:srgbClr val="E82127"/>
                 </a:solidFill>
-                <a:latin typeface="微软雅黑"/>
-                <a:ea typeface="微软雅黑"/>
+                <a:latin typeface="宋体"/>
+                <a:ea typeface="宋体"/>
               </a:rPr>
               <a:t>一句话总结：</a:t>
             </a:r>
@@ -5210,8 +5210,8 @@
                 <a:solidFill>
                   <a:srgbClr val="171A20"/>
                 </a:solidFill>
-                <a:latin typeface="微软雅黑"/>
-                <a:ea typeface="微软雅黑"/>
+                <a:latin typeface="宋体"/>
+                <a:ea typeface="宋体"/>
               </a:rPr>
               <a:t>三季度把「定点」做出来了（4 个），四季度要把「钱」做出来 —— 先解决 EHEA 质量与 S56 定价两个 P0，其余按节奏推进。</a:t>
             </a:r>
@@ -5359,8 +5359,8 @@
                 <a:solidFill>
                   <a:srgbClr val="171A20"/>
                 </a:solidFill>
-                <a:latin typeface="微软雅黑"/>
-                <a:ea typeface="微软雅黑"/>
+                <a:latin typeface="宋体"/>
+                <a:ea typeface="宋体"/>
               </a:rPr>
               <a:t>一页看懂三季度</a:t>
             </a:r>
@@ -5402,8 +5402,8 @@
                 <a:solidFill>
                   <a:srgbClr val="6B7280"/>
                 </a:solidFill>
-                <a:latin typeface="微软雅黑"/>
-                <a:ea typeface="微软雅黑"/>
+                <a:latin typeface="宋体"/>
+                <a:ea typeface="宋体"/>
               </a:rPr>
               <a:t>13 个项目在管：量产 6 · 已定点 2 · OTS 1 · 推进中 4</a:t>
             </a:r>
@@ -5489,8 +5489,8 @@
                 <a:solidFill>
                   <a:srgbClr val="6B7280"/>
                 </a:solidFill>
-                <a:latin typeface="Arial"/>
-                <a:ea typeface="微软雅黑"/>
+                <a:latin typeface="宋体"/>
+                <a:ea typeface="宋体"/>
               </a:rPr>
               <a:t>2 / 10</a:t>
             </a:r>
@@ -5532,8 +5532,8 @@
                 <a:solidFill>
                   <a:srgbClr val="6B7280"/>
                 </a:solidFill>
-                <a:latin typeface="微软雅黑"/>
-                <a:ea typeface="微软雅黑"/>
+                <a:latin typeface="宋体"/>
+                <a:ea typeface="宋体"/>
               </a:rPr>
               <a:t>常州臻畅汽车配件有限公司 · 上海泰瑞电子科技有限公司</a:t>
             </a:r>
@@ -5665,8 +5665,8 @@
                 <a:solidFill>
                   <a:srgbClr val="171A20"/>
                 </a:solidFill>
-                <a:latin typeface="Arial"/>
-                <a:ea typeface="微软雅黑"/>
+                <a:latin typeface="宋体"/>
+                <a:ea typeface="宋体"/>
               </a:rPr>
               <a:t>13</a:t>
             </a:r>
@@ -5675,8 +5675,8 @@
                 <a:solidFill>
                   <a:srgbClr val="6B7280"/>
                 </a:solidFill>
-                <a:latin typeface="微软雅黑"/>
-                <a:ea typeface="微软雅黑"/>
+                <a:latin typeface="宋体"/>
+                <a:ea typeface="宋体"/>
               </a:rPr>
               <a:t> 个</a:t>
             </a:r>
@@ -5721,8 +5721,8 @@
                 <a:solidFill>
                   <a:srgbClr val="6B7280"/>
                 </a:solidFill>
-                <a:latin typeface="微软雅黑"/>
-                <a:ea typeface="微软雅黑"/>
+                <a:latin typeface="宋体"/>
+                <a:ea typeface="宋体"/>
               </a:rPr>
               <a:t>在管项目</a:t>
             </a:r>
@@ -5764,8 +5764,8 @@
                 <a:solidFill>
                   <a:srgbClr val="6B7280"/>
                 </a:solidFill>
-                <a:latin typeface="微软雅黑"/>
-                <a:ea typeface="微软雅黑"/>
+                <a:latin typeface="宋体"/>
+                <a:ea typeface="宋体"/>
               </a:rPr>
               <a:t>量产6·定点2·OTS1·推进4</a:t>
             </a:r>
@@ -5897,8 +5897,8 @@
                 <a:solidFill>
                   <a:srgbClr val="16A34A"/>
                 </a:solidFill>
-                <a:latin typeface="Arial"/>
-                <a:ea typeface="微软雅黑"/>
+                <a:latin typeface="宋体"/>
+                <a:ea typeface="宋体"/>
               </a:rPr>
               <a:t>4</a:t>
             </a:r>
@@ -5907,8 +5907,8 @@
                 <a:solidFill>
                   <a:srgbClr val="6B7280"/>
                 </a:solidFill>
-                <a:latin typeface="微软雅黑"/>
-                <a:ea typeface="微软雅黑"/>
+                <a:latin typeface="宋体"/>
+                <a:ea typeface="宋体"/>
               </a:rPr>
               <a:t> 个</a:t>
             </a:r>
@@ -5953,8 +5953,8 @@
                 <a:solidFill>
                   <a:srgbClr val="6B7280"/>
                 </a:solidFill>
-                <a:latin typeface="微软雅黑"/>
-                <a:ea typeface="微软雅黑"/>
+                <a:latin typeface="宋体"/>
+                <a:ea typeface="宋体"/>
               </a:rPr>
               <a:t>Q3 新增定点</a:t>
             </a:r>
@@ -5996,8 +5996,8 @@
                 <a:solidFill>
                   <a:srgbClr val="6B7280"/>
                 </a:solidFill>
-                <a:latin typeface="微软雅黑"/>
-                <a:ea typeface="微软雅黑"/>
+                <a:latin typeface="宋体"/>
+                <a:ea typeface="宋体"/>
               </a:rPr>
               <a:t>ZH5EM·SHD·ROX MY26·S56</a:t>
             </a:r>
@@ -6129,8 +6129,8 @@
                 <a:solidFill>
                   <a:srgbClr val="16A34A"/>
                 </a:solidFill>
-                <a:latin typeface="Arial"/>
-                <a:ea typeface="微软雅黑"/>
+                <a:latin typeface="宋体"/>
+                <a:ea typeface="宋体"/>
               </a:rPr>
               <a:t>2</a:t>
             </a:r>
@@ -6139,8 +6139,8 @@
                 <a:solidFill>
                   <a:srgbClr val="6B7280"/>
                 </a:solidFill>
-                <a:latin typeface="微软雅黑"/>
-                <a:ea typeface="微软雅黑"/>
+                <a:latin typeface="宋体"/>
+                <a:ea typeface="宋体"/>
               </a:rPr>
               <a:t> 个</a:t>
             </a:r>
@@ -6185,8 +6185,8 @@
                 <a:solidFill>
                   <a:srgbClr val="6B7280"/>
                 </a:solidFill>
-                <a:latin typeface="微软雅黑"/>
-                <a:ea typeface="微软雅黑"/>
+                <a:latin typeface="宋体"/>
+                <a:ea typeface="宋体"/>
               </a:rPr>
               <a:t>Q3 新增 SOP</a:t>
             </a:r>
@@ -6228,8 +6228,8 @@
                 <a:solidFill>
                   <a:srgbClr val="6B7280"/>
                 </a:solidFill>
-                <a:latin typeface="微软雅黑"/>
-                <a:ea typeface="微软雅黑"/>
+                <a:latin typeface="宋体"/>
+                <a:ea typeface="宋体"/>
               </a:rPr>
               <a:t>VFe32 7/31·BC03 8/3</a:t>
             </a:r>
@@ -6361,8 +6361,8 @@
                 <a:solidFill>
                   <a:srgbClr val="171A20"/>
                 </a:solidFill>
-                <a:latin typeface="Arial"/>
-                <a:ea typeface="微软雅黑"/>
+                <a:latin typeface="宋体"/>
+                <a:ea typeface="宋体"/>
               </a:rPr>
               <a:t>91</a:t>
             </a:r>
@@ -6371,8 +6371,8 @@
                 <a:solidFill>
                   <a:srgbClr val="6B7280"/>
                 </a:solidFill>
-                <a:latin typeface="微软雅黑"/>
-                <a:ea typeface="微软雅黑"/>
+                <a:latin typeface="宋体"/>
+                <a:ea typeface="宋体"/>
               </a:rPr>
               <a:t> 件</a:t>
             </a:r>
@@ -6417,8 +6417,8 @@
                 <a:solidFill>
                   <a:srgbClr val="6B7280"/>
                 </a:solidFill>
-                <a:latin typeface="微软雅黑"/>
-                <a:ea typeface="微软雅黑"/>
+                <a:latin typeface="宋体"/>
+                <a:ea typeface="宋体"/>
               </a:rPr>
               <a:t>在册零件（明细）</a:t>
             </a:r>
@@ -6460,8 +6460,8 @@
                 <a:solidFill>
                   <a:srgbClr val="6B7280"/>
                 </a:solidFill>
-                <a:latin typeface="微软雅黑"/>
-                <a:ea typeface="微软雅黑"/>
+                <a:latin typeface="宋体"/>
+                <a:ea typeface="宋体"/>
               </a:rPr>
               <a:t>自制+外协，供应商可追溯</a:t>
             </a:r>
@@ -6593,8 +6593,8 @@
                 <a:solidFill>
                   <a:srgbClr val="1D4ED8"/>
                 </a:solidFill>
-                <a:latin typeface="Arial"/>
-                <a:ea typeface="微软雅黑"/>
+                <a:latin typeface="宋体"/>
+                <a:ea typeface="宋体"/>
               </a:rPr>
               <a:t>916,915</a:t>
             </a:r>
@@ -6603,8 +6603,8 @@
                 <a:solidFill>
                   <a:srgbClr val="6B7280"/>
                 </a:solidFill>
-                <a:latin typeface="微软雅黑"/>
-                <a:ea typeface="微软雅黑"/>
+                <a:latin typeface="宋体"/>
+                <a:ea typeface="宋体"/>
               </a:rPr>
               <a:t> 件</a:t>
             </a:r>
@@ -6649,8 +6649,8 @@
                 <a:solidFill>
                   <a:srgbClr val="6B7280"/>
                 </a:solidFill>
-                <a:latin typeface="微软雅黑"/>
-                <a:ea typeface="微软雅黑"/>
+                <a:latin typeface="宋体"/>
+                <a:ea typeface="宋体"/>
               </a:rPr>
               <a:t>Q3 订单数量</a:t>
             </a:r>
@@ -6692,8 +6692,8 @@
                 <a:solidFill>
                   <a:srgbClr val="6B7280"/>
                 </a:solidFill>
-                <a:latin typeface="微软雅黑"/>
-                <a:ea typeface="微软雅黑"/>
+                <a:latin typeface="宋体"/>
+                <a:ea typeface="宋体"/>
               </a:rPr>
               <a:t>98 行 PO / 7 个件号</a:t>
             </a:r>
@@ -6825,8 +6825,8 @@
                 <a:solidFill>
                   <a:srgbClr val="E82127"/>
                 </a:solidFill>
-                <a:latin typeface="Arial"/>
-                <a:ea typeface="微软雅黑"/>
+                <a:latin typeface="宋体"/>
+                <a:ea typeface="宋体"/>
               </a:rPr>
               <a:t>40.18</a:t>
             </a:r>
@@ -6835,8 +6835,8 @@
                 <a:solidFill>
                   <a:srgbClr val="6B7280"/>
                 </a:solidFill>
-                <a:latin typeface="微软雅黑"/>
-                <a:ea typeface="微软雅黑"/>
+                <a:latin typeface="宋体"/>
+                <a:ea typeface="宋体"/>
               </a:rPr>
               <a:t> 万元</a:t>
             </a:r>
@@ -6881,8 +6881,8 @@
                 <a:solidFill>
                   <a:srgbClr val="6B7280"/>
                 </a:solidFill>
-                <a:latin typeface="微软雅黑"/>
-                <a:ea typeface="微软雅黑"/>
+                <a:latin typeface="宋体"/>
+                <a:ea typeface="宋体"/>
               </a:rPr>
               <a:t>Q3 订单含税金额</a:t>
             </a:r>
@@ -6924,8 +6924,8 @@
                 <a:solidFill>
                   <a:srgbClr val="6B7280"/>
                 </a:solidFill>
-                <a:latin typeface="微软雅黑"/>
-                <a:ea typeface="微软雅黑"/>
+                <a:latin typeface="宋体"/>
+                <a:ea typeface="宋体"/>
               </a:rPr>
               <a:t>含 S56 首单 2.32 万（10/18 定价）</a:t>
             </a:r>
@@ -7057,8 +7057,8 @@
                 <a:solidFill>
                   <a:srgbClr val="171A20"/>
                 </a:solidFill>
-                <a:latin typeface="微软雅黑"/>
-                <a:ea typeface="微软雅黑"/>
+                <a:latin typeface="宋体"/>
+                <a:ea typeface="宋体"/>
               </a:rPr>
               <a:t>最大成果：Q3 拿下 4 个定点</a:t>
             </a:r>
@@ -7103,8 +7103,8 @@
                 <a:solidFill>
                   <a:srgbClr val="171A20"/>
                 </a:solidFill>
-                <a:latin typeface="微软雅黑"/>
-                <a:ea typeface="微软雅黑"/>
+                <a:latin typeface="宋体"/>
+                <a:ea typeface="宋体"/>
               </a:rPr>
               <a:t>ZH5EM（上汽前舱储物盒 10 件）、SHD（上汽毛毡 1 件）、ROX MY26（极石端盖 2 件）、S56（奇瑞 X3/X3L 吸音棉 14 件）。其中 S56 年均 5 万套、EOP 2029.12，是明年主要增量。</a:t>
             </a:r>
@@ -7236,8 +7236,8 @@
                 <a:solidFill>
                   <a:srgbClr val="171A20"/>
                 </a:solidFill>
-                <a:latin typeface="微软雅黑"/>
-                <a:ea typeface="微软雅黑"/>
+                <a:latin typeface="宋体"/>
+                <a:ea typeface="宋体"/>
               </a:rPr>
               <a:t>收入结构：仍高度集中</a:t>
             </a:r>
@@ -7282,8 +7282,8 @@
                 <a:solidFill>
                   <a:srgbClr val="171A20"/>
                 </a:solidFill>
-                <a:latin typeface="微软雅黑"/>
-                <a:ea typeface="微软雅黑"/>
+                <a:latin typeface="宋体"/>
+                <a:ea typeface="宋体"/>
               </a:rPr>
               <a:t>LEV1 17.97 万（44.7%）+ VFe32 9.88 万（24.6%）= 69.3%；EHEA 7.77 万（19.3%）已开始批量，S56 定价后进账 2.32 万（5.8%）。三者合计 93.6%。</a:t>
             </a:r>
@@ -7415,8 +7415,8 @@
                 <a:solidFill>
                   <a:srgbClr val="171A20"/>
                 </a:solidFill>
-                <a:latin typeface="微软雅黑"/>
-                <a:ea typeface="微软雅黑"/>
+                <a:latin typeface="宋体"/>
+                <a:ea typeface="宋体"/>
               </a:rPr>
               <a:t>最大隐患：EHEA 质量 + 供应商未定</a:t>
             </a:r>
@@ -7461,8 +7461,8 @@
                 <a:solidFill>
                   <a:srgbClr val="171A20"/>
                 </a:solidFill>
-                <a:latin typeface="微软雅黑"/>
-                <a:ea typeface="微软雅黑"/>
+                <a:latin typeface="宋体"/>
+                <a:ea typeface="宋体"/>
               </a:rPr>
               <a:t>EHEA 9/23 出货排定备注「目前有大质量问题」，涉 562,077 件；ZH5EM 10 件供应商待采购确认。ROX01 与 S56 价格均已落地（10/18）。</a:t>
             </a:r>
@@ -7610,8 +7610,8 @@
                 <a:solidFill>
                   <a:srgbClr val="171A20"/>
                 </a:solidFill>
-                <a:latin typeface="微软雅黑"/>
-                <a:ea typeface="微软雅黑"/>
+                <a:latin typeface="宋体"/>
+                <a:ea typeface="宋体"/>
               </a:rPr>
               <a:t>Q3 四个新定点</a:t>
             </a:r>
@@ -7653,8 +7653,8 @@
                 <a:solidFill>
                   <a:srgbClr val="6B7280"/>
                 </a:solidFill>
-                <a:latin typeface="微软雅黑"/>
-                <a:ea typeface="微软雅黑"/>
+                <a:latin typeface="宋体"/>
+                <a:ea typeface="宋体"/>
               </a:rPr>
               <a:t>全部在三季度内落地：8/27 两个、9/1 一个、9/16 一个</a:t>
             </a:r>
@@ -7740,8 +7740,8 @@
                 <a:solidFill>
                   <a:srgbClr val="6B7280"/>
                 </a:solidFill>
-                <a:latin typeface="Arial"/>
-                <a:ea typeface="微软雅黑"/>
+                <a:latin typeface="宋体"/>
+                <a:ea typeface="宋体"/>
               </a:rPr>
               <a:t>3 / 10</a:t>
             </a:r>
@@ -7783,8 +7783,8 @@
                 <a:solidFill>
                   <a:srgbClr val="6B7280"/>
                 </a:solidFill>
-                <a:latin typeface="微软雅黑"/>
-                <a:ea typeface="微软雅黑"/>
+                <a:latin typeface="宋体"/>
+                <a:ea typeface="宋体"/>
               </a:rPr>
               <a:t>常州臻畅汽车配件有限公司 · 上海泰瑞电子科技有限公司</a:t>
             </a:r>
@@ -7916,8 +7916,8 @@
                 <a:solidFill>
                   <a:srgbClr val="171A20"/>
                 </a:solidFill>
-                <a:latin typeface="微软雅黑"/>
-                <a:ea typeface="微软雅黑"/>
+                <a:latin typeface="宋体"/>
+                <a:ea typeface="宋体"/>
               </a:rPr>
               <a:t>ZH5EM</a:t>
             </a:r>
@@ -7959,8 +7959,8 @@
                 <a:solidFill>
                   <a:srgbClr val="E82127"/>
                 </a:solidFill>
-                <a:latin typeface="微软雅黑"/>
-                <a:ea typeface="微软雅黑"/>
+                <a:latin typeface="宋体"/>
+                <a:ea typeface="宋体"/>
               </a:rPr>
               <a:t>凯华 → 上汽</a:t>
             </a:r>
@@ -8002,8 +8002,8 @@
                 <a:solidFill>
                   <a:srgbClr val="171A20"/>
                 </a:solidFill>
-                <a:latin typeface="微软雅黑"/>
-                <a:ea typeface="微软雅黑"/>
+                <a:latin typeface="宋体"/>
+                <a:ea typeface="宋体"/>
               </a:rPr>
               <a:t>前舱储物盒 · 10 件（8 泡棉 + 2 蘑菇塔扣）</a:t>
             </a:r>
@@ -8048,8 +8048,8 @@
                 <a:solidFill>
                   <a:srgbClr val="6B7280"/>
                 </a:solidFill>
-                <a:latin typeface="微软雅黑"/>
-                <a:ea typeface="微软雅黑"/>
+                <a:latin typeface="宋体"/>
+                <a:ea typeface="宋体"/>
               </a:rPr>
               <a:t>8/27 客户定点；外协询价与送样启动（泡棉-宁波互盛、塔扣-惠州兰谷）；项目经理陈阳已建 CAMDS 零件信息；供应商待采购确认</a:t>
             </a:r>
@@ -8091,8 +8091,8 @@
                 <a:solidFill>
                   <a:srgbClr val="6B7280"/>
                 </a:solidFill>
-                <a:latin typeface="微软雅黑"/>
-                <a:ea typeface="微软雅黑"/>
+                <a:latin typeface="宋体"/>
+                <a:ea typeface="宋体"/>
               </a:rPr>
               <a:t>定点日 2026-08-27</a:t>
             </a:r>
@@ -8224,8 +8224,8 @@
                 <a:solidFill>
                   <a:srgbClr val="171A20"/>
                 </a:solidFill>
-                <a:latin typeface="微软雅黑"/>
-                <a:ea typeface="微软雅黑"/>
+                <a:latin typeface="宋体"/>
+                <a:ea typeface="宋体"/>
               </a:rPr>
               <a:t>SHD</a:t>
             </a:r>
@@ -8267,8 +8267,8 @@
                 <a:solidFill>
                   <a:srgbClr val="E82127"/>
                 </a:solidFill>
-                <a:latin typeface="微软雅黑"/>
-                <a:ea typeface="微软雅黑"/>
+                <a:latin typeface="宋体"/>
+                <a:ea typeface="宋体"/>
               </a:rPr>
               <a:t>凯华 → 上汽</a:t>
             </a:r>
@@ -8310,8 +8310,8 @@
                 <a:solidFill>
                   <a:srgbClr val="171A20"/>
                 </a:solidFill>
-                <a:latin typeface="微软雅黑"/>
-                <a:ea typeface="微软雅黑"/>
+                <a:latin typeface="宋体"/>
+                <a:ea typeface="宋体"/>
               </a:rPr>
               <a:t>密封板毛毡 · 1 件（12478375-1）</a:t>
             </a:r>
@@ -8356,8 +8356,8 @@
                 <a:solidFill>
                   <a:srgbClr val="6B7280"/>
                 </a:solidFill>
-                <a:latin typeface="微软雅黑"/>
-                <a:ea typeface="微软雅黑"/>
+                <a:latin typeface="宋体"/>
+                <a:ea typeface="宋体"/>
               </a:rPr>
               <a:t>8/27 客户定点；OTS 250 套样品已完成送样；正在排测试计划，待内部安排测试</a:t>
             </a:r>
@@ -8399,8 +8399,8 @@
                 <a:solidFill>
                   <a:srgbClr val="6B7280"/>
                 </a:solidFill>
-                <a:latin typeface="微软雅黑"/>
-                <a:ea typeface="微软雅黑"/>
+                <a:latin typeface="宋体"/>
+                <a:ea typeface="宋体"/>
               </a:rPr>
               <a:t>定点日 2026-08-27</a:t>
             </a:r>
@@ -8532,8 +8532,8 @@
                 <a:solidFill>
                   <a:srgbClr val="171A20"/>
                 </a:solidFill>
-                <a:latin typeface="微软雅黑"/>
-                <a:ea typeface="微软雅黑"/>
+                <a:latin typeface="宋体"/>
+                <a:ea typeface="宋体"/>
               </a:rPr>
               <a:t>ROX MY26</a:t>
             </a:r>
@@ -8575,8 +8575,8 @@
                 <a:solidFill>
                   <a:srgbClr val="E82127"/>
                 </a:solidFill>
-                <a:latin typeface="微软雅黑"/>
-                <a:ea typeface="微软雅黑"/>
+                <a:latin typeface="宋体"/>
+                <a:ea typeface="宋体"/>
               </a:rPr>
               <a:t>浙江凯华 → 极石</a:t>
             </a:r>
@@ -8618,8 +8618,8 @@
                 <a:solidFill>
                   <a:srgbClr val="171A20"/>
                 </a:solidFill>
-                <a:latin typeface="微软雅黑"/>
-                <a:ea typeface="微软雅黑"/>
+                <a:latin typeface="宋体"/>
+                <a:ea typeface="宋体"/>
               </a:rPr>
               <a:t>左右端盖板吸音棉 · 2 件（15200958AA / 15200961AA）</a:t>
             </a:r>
@@ -8664,8 +8664,8 @@
                 <a:solidFill>
                   <a:srgbClr val="6B7280"/>
                 </a:solidFill>
-                <a:latin typeface="微软雅黑"/>
-                <a:ea typeface="微软雅黑"/>
+                <a:latin typeface="宋体"/>
+                <a:ea typeface="宋体"/>
               </a:rPr>
               <a:t>9/1 内部定点：左 0.3097 / 右 0.3009 未税，利润率 12.83% / 23.56%；自制·上海泰瑞，11 月开始 SOP 交付</a:t>
             </a:r>
@@ -8707,8 +8707,8 @@
                 <a:solidFill>
                   <a:srgbClr val="6B7280"/>
                 </a:solidFill>
-                <a:latin typeface="微软雅黑"/>
-                <a:ea typeface="微软雅黑"/>
+                <a:latin typeface="宋体"/>
+                <a:ea typeface="宋体"/>
               </a:rPr>
               <a:t>定点日 2026-09-01</a:t>
             </a:r>
@@ -8840,8 +8840,8 @@
                 <a:solidFill>
                   <a:srgbClr val="171A20"/>
                 </a:solidFill>
-                <a:latin typeface="微软雅黑"/>
-                <a:ea typeface="微软雅黑"/>
+                <a:latin typeface="宋体"/>
+                <a:ea typeface="宋体"/>
               </a:rPr>
               <a:t>S56</a:t>
             </a:r>
@@ -8883,8 +8883,8 @@
                 <a:solidFill>
                   <a:srgbClr val="E82127"/>
                 </a:solidFill>
-                <a:latin typeface="微软雅黑"/>
-                <a:ea typeface="微软雅黑"/>
+                <a:latin typeface="宋体"/>
+                <a:ea typeface="宋体"/>
               </a:rPr>
               <a:t>浙江凯华 → 奇瑞 X3/X3L</a:t>
             </a:r>
@@ -8926,8 +8926,8 @@
                 <a:solidFill>
                   <a:srgbClr val="171A20"/>
                 </a:solidFill>
-                <a:latin typeface="微软雅黑"/>
-                <a:ea typeface="微软雅黑"/>
+                <a:latin typeface="宋体"/>
+                <a:ea typeface="宋体"/>
               </a:rPr>
               <a:t>PP/PET 吸音棉 · 14 件（51-12723 已取消，实际 13 件）</a:t>
             </a:r>
@@ -8972,8 +8972,8 @@
                 <a:solidFill>
                   <a:srgbClr val="6B7280"/>
                 </a:solidFill>
-                <a:latin typeface="微软雅黑"/>
-                <a:ea typeface="微软雅黑"/>
+                <a:latin typeface="宋体"/>
+                <a:ea typeface="宋体"/>
               </a:rPr>
               <a:t>9/16 内部定点：年均 5 万套、EOP 2029.12；报价按统一毛利率 22.31%（年净利约 20 万）；9/18 已出 5 个件号共 25 件样品</a:t>
             </a:r>
@@ -9015,8 +9015,8 @@
                 <a:solidFill>
                   <a:srgbClr val="6B7280"/>
                 </a:solidFill>
-                <a:latin typeface="微软雅黑"/>
-                <a:ea typeface="微软雅黑"/>
+                <a:latin typeface="宋体"/>
+                <a:ea typeface="宋体"/>
               </a:rPr>
               <a:t>定点日 2026-09-16</a:t>
             </a:r>
@@ -9164,8 +9164,8 @@
                 <a:solidFill>
                   <a:srgbClr val="171A20"/>
                 </a:solidFill>
-                <a:latin typeface="微软雅黑"/>
-                <a:ea typeface="微软雅黑"/>
+                <a:latin typeface="宋体"/>
+                <a:ea typeface="宋体"/>
               </a:rPr>
               <a:t>量产项目：6 个（Q3 订单主体）</a:t>
             </a:r>
@@ -9207,8 +9207,8 @@
                 <a:solidFill>
                   <a:srgbClr val="6B7280"/>
                 </a:solidFill>
-                <a:latin typeface="微软雅黑"/>
-                <a:ea typeface="微软雅黑"/>
+                <a:latin typeface="宋体"/>
+                <a:ea typeface="宋体"/>
               </a:rPr>
               <a:t>内部状态「交付量产」= 是：BC03、LEV1；否：VFe32、S56、EHEA、ROX01</a:t>
             </a:r>
@@ -9294,8 +9294,8 @@
                 <a:solidFill>
                   <a:srgbClr val="6B7280"/>
                 </a:solidFill>
-                <a:latin typeface="Arial"/>
-                <a:ea typeface="微软雅黑"/>
+                <a:latin typeface="宋体"/>
+                <a:ea typeface="宋体"/>
               </a:rPr>
               <a:t>4 / 10</a:t>
             </a:r>
@@ -9337,8 +9337,8 @@
                 <a:solidFill>
                   <a:srgbClr val="6B7280"/>
                 </a:solidFill>
-                <a:latin typeface="微软雅黑"/>
-                <a:ea typeface="微软雅黑"/>
+                <a:latin typeface="宋体"/>
+                <a:ea typeface="宋体"/>
               </a:rPr>
               <a:t>常州臻畅汽车配件有限公司 · 上海泰瑞电子科技有限公司</a:t>
             </a:r>
@@ -9424,8 +9424,8 @@
                 <a:solidFill>
                   <a:srgbClr val="FFFFFF"/>
                 </a:solidFill>
-                <a:latin typeface="微软雅黑"/>
-                <a:ea typeface="微软雅黑"/>
+                <a:latin typeface="宋体"/>
+                <a:ea typeface="宋体"/>
               </a:rPr>
               <a:t>项目</a:t>
             </a:r>
@@ -9467,8 +9467,8 @@
                 <a:solidFill>
                   <a:srgbClr val="FFFFFF"/>
                 </a:solidFill>
-                <a:latin typeface="微软雅黑"/>
-                <a:ea typeface="微软雅黑"/>
+                <a:latin typeface="宋体"/>
+                <a:ea typeface="宋体"/>
               </a:rPr>
               <a:t>客户</a:t>
             </a:r>
@@ -9510,8 +9510,8 @@
                 <a:solidFill>
                   <a:srgbClr val="FFFFFF"/>
                 </a:solidFill>
-                <a:latin typeface="微软雅黑"/>
-                <a:ea typeface="微软雅黑"/>
+                <a:latin typeface="宋体"/>
+                <a:ea typeface="宋体"/>
               </a:rPr>
               <a:t>车型</a:t>
             </a:r>
@@ -9553,8 +9553,8 @@
                 <a:solidFill>
                   <a:srgbClr val="FFFFFF"/>
                 </a:solidFill>
-                <a:latin typeface="微软雅黑"/>
-                <a:ea typeface="微软雅黑"/>
+                <a:latin typeface="宋体"/>
+                <a:ea typeface="宋体"/>
               </a:rPr>
               <a:t>零件</a:t>
             </a:r>
@@ -9596,8 +9596,8 @@
                 <a:solidFill>
                   <a:srgbClr val="FFFFFF"/>
                 </a:solidFill>
-                <a:latin typeface="微软雅黑"/>
-                <a:ea typeface="微软雅黑"/>
+                <a:latin typeface="宋体"/>
+                <a:ea typeface="宋体"/>
               </a:rPr>
               <a:t>交付量产</a:t>
             </a:r>
@@ -9639,8 +9639,8 @@
                 <a:solidFill>
                   <a:srgbClr val="FFFFFF"/>
                 </a:solidFill>
-                <a:latin typeface="微软雅黑"/>
-                <a:ea typeface="微软雅黑"/>
+                <a:latin typeface="宋体"/>
+                <a:ea typeface="宋体"/>
               </a:rPr>
               <a:t>Q3 订单(含税)</a:t>
             </a:r>
@@ -9682,8 +9682,8 @@
                 <a:solidFill>
                   <a:srgbClr val="FFFFFF"/>
                 </a:solidFill>
-                <a:latin typeface="微软雅黑"/>
-                <a:ea typeface="微软雅黑"/>
+                <a:latin typeface="宋体"/>
+                <a:ea typeface="宋体"/>
               </a:rPr>
               <a:t>占比</a:t>
             </a:r>
@@ -9725,8 +9725,8 @@
                 <a:solidFill>
                   <a:srgbClr val="FFFFFF"/>
                 </a:solidFill>
-                <a:latin typeface="微软雅黑"/>
-                <a:ea typeface="微软雅黑"/>
+                <a:latin typeface="宋体"/>
+                <a:ea typeface="宋体"/>
               </a:rPr>
               <a:t>Q3 关键动作</a:t>
             </a:r>
@@ -9817,8 +9817,8 @@
                 <a:solidFill>
                   <a:srgbClr val="171A20"/>
                 </a:solidFill>
-                <a:latin typeface="微软雅黑"/>
-                <a:ea typeface="微软雅黑"/>
+                <a:latin typeface="宋体"/>
+                <a:ea typeface="宋体"/>
               </a:rPr>
               <a:t>BC03</a:t>
             </a:r>
@@ -9863,8 +9863,8 @@
                 <a:solidFill>
                   <a:srgbClr val="171A20"/>
                 </a:solidFill>
-                <a:latin typeface="微软雅黑"/>
-                <a:ea typeface="微软雅黑"/>
+                <a:latin typeface="宋体"/>
+                <a:ea typeface="宋体"/>
               </a:rPr>
               <a:t>凯华</a:t>
             </a:r>
@@ -9909,8 +9909,8 @@
                 <a:solidFill>
                   <a:srgbClr val="171A20"/>
                 </a:solidFill>
-                <a:latin typeface="微软雅黑"/>
-                <a:ea typeface="微软雅黑"/>
+                <a:latin typeface="宋体"/>
+                <a:ea typeface="宋体"/>
               </a:rPr>
               <a:t>VINFAST</a:t>
             </a:r>
@@ -9955,8 +9955,8 @@
                 <a:solidFill>
                   <a:srgbClr val="171A20"/>
                 </a:solidFill>
-                <a:latin typeface="微软雅黑"/>
-                <a:ea typeface="微软雅黑"/>
+                <a:latin typeface="宋体"/>
+                <a:ea typeface="宋体"/>
               </a:rPr>
               <a:t>1</a:t>
             </a:r>
@@ -10001,8 +10001,8 @@
                 <a:solidFill>
                   <a:srgbClr val="16A34A"/>
                 </a:solidFill>
-                <a:latin typeface="微软雅黑"/>
-                <a:ea typeface="微软雅黑"/>
+                <a:latin typeface="宋体"/>
+                <a:ea typeface="宋体"/>
               </a:rPr>
               <a:t>是</a:t>
             </a:r>
@@ -10047,8 +10047,8 @@
                 <a:solidFill>
                   <a:srgbClr val="171A20"/>
                 </a:solidFill>
-                <a:latin typeface="Arial"/>
-                <a:ea typeface="微软雅黑"/>
+                <a:latin typeface="宋体"/>
+                <a:ea typeface="宋体"/>
               </a:rPr>
               <a:t>14,164.80</a:t>
             </a:r>
@@ -10093,8 +10093,8 @@
                 <a:solidFill>
                   <a:srgbClr val="171A20"/>
                 </a:solidFill>
-                <a:latin typeface="微软雅黑"/>
-                <a:ea typeface="微软雅黑"/>
+                <a:latin typeface="宋体"/>
+                <a:ea typeface="宋体"/>
               </a:rPr>
               <a:t>3.7%</a:t>
             </a:r>
@@ -10139,8 +10139,8 @@
                 <a:solidFill>
                   <a:srgbClr val="171A20"/>
                 </a:solidFill>
-                <a:latin typeface="微软雅黑"/>
-                <a:ea typeface="微软雅黑"/>
+                <a:latin typeface="宋体"/>
+                <a:ea typeface="宋体"/>
               </a:rPr>
               <a:t>8/3 SOP；合同确认、对账开票中</a:t>
             </a:r>
@@ -10231,8 +10231,8 @@
                 <a:solidFill>
                   <a:srgbClr val="171A20"/>
                 </a:solidFill>
-                <a:latin typeface="微软雅黑"/>
-                <a:ea typeface="微软雅黑"/>
+                <a:latin typeface="宋体"/>
+                <a:ea typeface="宋体"/>
               </a:rPr>
               <a:t>LEV1</a:t>
             </a:r>
@@ -10277,8 +10277,8 @@
                 <a:solidFill>
                   <a:srgbClr val="171A20"/>
                 </a:solidFill>
-                <a:latin typeface="微软雅黑"/>
-                <a:ea typeface="微软雅黑"/>
+                <a:latin typeface="宋体"/>
+                <a:ea typeface="宋体"/>
               </a:rPr>
               <a:t>凯华</a:t>
             </a:r>
@@ -10323,8 +10323,8 @@
                 <a:solidFill>
                   <a:srgbClr val="171A20"/>
                 </a:solidFill>
-                <a:latin typeface="微软雅黑"/>
-                <a:ea typeface="微软雅黑"/>
+                <a:latin typeface="宋体"/>
+                <a:ea typeface="宋体"/>
               </a:rPr>
               <a:t>VF-LIMO7 RHD</a:t>
             </a:r>
@@ -10369,8 +10369,8 @@
                 <a:solidFill>
                   <a:srgbClr val="171A20"/>
                 </a:solidFill>
-                <a:latin typeface="微软雅黑"/>
-                <a:ea typeface="微软雅黑"/>
+                <a:latin typeface="宋体"/>
+                <a:ea typeface="宋体"/>
               </a:rPr>
               <a:t>5</a:t>
             </a:r>
@@ -10415,8 +10415,8 @@
                 <a:solidFill>
                   <a:srgbClr val="16A34A"/>
                 </a:solidFill>
-                <a:latin typeface="微软雅黑"/>
-                <a:ea typeface="微软雅黑"/>
+                <a:latin typeface="宋体"/>
+                <a:ea typeface="宋体"/>
               </a:rPr>
               <a:t>是</a:t>
             </a:r>
@@ -10461,8 +10461,8 @@
                 <a:solidFill>
                   <a:srgbClr val="171A20"/>
                 </a:solidFill>
-                <a:latin typeface="Arial"/>
-                <a:ea typeface="微软雅黑"/>
+                <a:latin typeface="宋体"/>
+                <a:ea typeface="宋体"/>
               </a:rPr>
               <a:t>179,659.14</a:t>
             </a:r>
@@ -10507,8 +10507,8 @@
                 <a:solidFill>
                   <a:srgbClr val="171A20"/>
                 </a:solidFill>
-                <a:latin typeface="微软雅黑"/>
-                <a:ea typeface="微软雅黑"/>
+                <a:latin typeface="宋体"/>
+                <a:ea typeface="宋体"/>
               </a:rPr>
               <a:t>47.5%</a:t>
             </a:r>
@@ -10553,8 +10553,8 @@
                 <a:solidFill>
                   <a:srgbClr val="171A20"/>
                 </a:solidFill>
-                <a:latin typeface="微软雅黑"/>
-                <a:ea typeface="微软雅黑"/>
+                <a:latin typeface="宋体"/>
+                <a:ea typeface="宋体"/>
               </a:rPr>
               <a:t>量产对账；四件诚丰外协 + 挡脚板泰瑞自制</a:t>
             </a:r>
@@ -10645,8 +10645,8 @@
                 <a:solidFill>
                   <a:srgbClr val="171A20"/>
                 </a:solidFill>
-                <a:latin typeface="微软雅黑"/>
-                <a:ea typeface="微软雅黑"/>
+                <a:latin typeface="宋体"/>
+                <a:ea typeface="宋体"/>
               </a:rPr>
               <a:t>VFe32</a:t>
             </a:r>
@@ -10691,8 +10691,8 @@
                 <a:solidFill>
                   <a:srgbClr val="171A20"/>
                 </a:solidFill>
-                <a:latin typeface="微软雅黑"/>
-                <a:ea typeface="微软雅黑"/>
+                <a:latin typeface="宋体"/>
+                <a:ea typeface="宋体"/>
               </a:rPr>
               <a:t>凯华</a:t>
             </a:r>
@@ -10737,8 +10737,8 @@
                 <a:solidFill>
                   <a:srgbClr val="171A20"/>
                 </a:solidFill>
-                <a:latin typeface="微软雅黑"/>
-                <a:ea typeface="微软雅黑"/>
+                <a:latin typeface="宋体"/>
+                <a:ea typeface="宋体"/>
               </a:rPr>
               <a:t>VINFAST</a:t>
             </a:r>
@@ -10783,8 +10783,8 @@
                 <a:solidFill>
                   <a:srgbClr val="171A20"/>
                 </a:solidFill>
-                <a:latin typeface="微软雅黑"/>
-                <a:ea typeface="微软雅黑"/>
+                <a:latin typeface="宋体"/>
+                <a:ea typeface="宋体"/>
               </a:rPr>
               <a:t>19</a:t>
             </a:r>
@@ -10829,8 +10829,8 @@
                 <a:solidFill>
                   <a:srgbClr val="6B7280"/>
                 </a:solidFill>
-                <a:latin typeface="微软雅黑"/>
-                <a:ea typeface="微软雅黑"/>
+                <a:latin typeface="宋体"/>
+                <a:ea typeface="宋体"/>
               </a:rPr>
               <a:t>否</a:t>
             </a:r>
@@ -10875,8 +10875,8 @@
                 <a:solidFill>
                   <a:srgbClr val="171A20"/>
                 </a:solidFill>
-                <a:latin typeface="Arial"/>
-                <a:ea typeface="微软雅黑"/>
+                <a:latin typeface="宋体"/>
+                <a:ea typeface="宋体"/>
               </a:rPr>
               <a:t>98,826.72</a:t>
             </a:r>
@@ -10921,8 +10921,8 @@
                 <a:solidFill>
                   <a:srgbClr val="171A20"/>
                 </a:solidFill>
-                <a:latin typeface="微软雅黑"/>
-                <a:ea typeface="微软雅黑"/>
+                <a:latin typeface="宋体"/>
+                <a:ea typeface="宋体"/>
               </a:rPr>
               <a:t>26.1%</a:t>
             </a:r>
@@ -10967,8 +10967,8 @@
                 <a:solidFill>
                   <a:srgbClr val="171A20"/>
                 </a:solidFill>
-                <a:latin typeface="微软雅黑"/>
-                <a:ea typeface="微软雅黑"/>
+                <a:latin typeface="宋体"/>
+                <a:ea typeface="宋体"/>
               </a:rPr>
               <a:t>7/31 切换件 SOP；9/4 叫停 9/20 已解除</a:t>
             </a:r>
@@ -11059,8 +11059,8 @@
                 <a:solidFill>
                   <a:srgbClr val="171A20"/>
                 </a:solidFill>
-                <a:latin typeface="微软雅黑"/>
-                <a:ea typeface="微软雅黑"/>
+                <a:latin typeface="宋体"/>
+                <a:ea typeface="宋体"/>
               </a:rPr>
               <a:t>S56</a:t>
             </a:r>
@@ -11105,8 +11105,8 @@
                 <a:solidFill>
                   <a:srgbClr val="171A20"/>
                 </a:solidFill>
-                <a:latin typeface="微软雅黑"/>
-                <a:ea typeface="微软雅黑"/>
+                <a:latin typeface="宋体"/>
+                <a:ea typeface="宋体"/>
               </a:rPr>
               <a:t>浙江凯华</a:t>
             </a:r>
@@ -11151,8 +11151,8 @@
                 <a:solidFill>
                   <a:srgbClr val="171A20"/>
                 </a:solidFill>
-                <a:latin typeface="微软雅黑"/>
-                <a:ea typeface="微软雅黑"/>
+                <a:latin typeface="宋体"/>
+                <a:ea typeface="宋体"/>
               </a:rPr>
               <a:t>奇瑞 X3/X3L</a:t>
             </a:r>
@@ -11197,8 +11197,8 @@
                 <a:solidFill>
                   <a:srgbClr val="171A20"/>
                 </a:solidFill>
-                <a:latin typeface="微软雅黑"/>
-                <a:ea typeface="微软雅黑"/>
+                <a:latin typeface="宋体"/>
+                <a:ea typeface="宋体"/>
               </a:rPr>
               <a:t>14</a:t>
             </a:r>
@@ -11243,8 +11243,8 @@
                 <a:solidFill>
                   <a:srgbClr val="6B7280"/>
                 </a:solidFill>
-                <a:latin typeface="微软雅黑"/>
-                <a:ea typeface="微软雅黑"/>
+                <a:latin typeface="宋体"/>
+                <a:ea typeface="宋体"/>
               </a:rPr>
               <a:t>否</a:t>
             </a:r>
@@ -11289,8 +11289,8 @@
                 <a:solidFill>
                   <a:srgbClr val="171A20"/>
                 </a:solidFill>
-                <a:latin typeface="Arial"/>
-                <a:ea typeface="微软雅黑"/>
+                <a:latin typeface="宋体"/>
+                <a:ea typeface="宋体"/>
               </a:rPr>
               <a:t>23,239.66</a:t>
             </a:r>
@@ -11335,8 +11335,8 @@
                 <a:solidFill>
                   <a:srgbClr val="171A20"/>
                 </a:solidFill>
-                <a:latin typeface="微软雅黑"/>
-                <a:ea typeface="微软雅黑"/>
+                <a:latin typeface="宋体"/>
+                <a:ea typeface="宋体"/>
               </a:rPr>
               <a:t>5.8%</a:t>
             </a:r>
@@ -11381,8 +11381,8 @@
                 <a:solidFill>
                   <a:srgbClr val="171A20"/>
                 </a:solidFill>
-                <a:latin typeface="微软雅黑"/>
-                <a:ea typeface="微软雅黑"/>
+                <a:latin typeface="宋体"/>
+                <a:ea typeface="宋体"/>
               </a:rPr>
               <a:t>9/16 定点；10/18 出价（套含税19.29/毛利18.4%）；首单已定价</a:t>
             </a:r>
@@ -11473,8 +11473,8 @@
                 <a:solidFill>
                   <a:srgbClr val="171A20"/>
                 </a:solidFill>
-                <a:latin typeface="微软雅黑"/>
-                <a:ea typeface="微软雅黑"/>
+                <a:latin typeface="宋体"/>
+                <a:ea typeface="宋体"/>
               </a:rPr>
               <a:t>EHEA</a:t>
             </a:r>
@@ -11519,8 +11519,8 @@
                 <a:solidFill>
                   <a:srgbClr val="171A20"/>
                 </a:solidFill>
-                <a:latin typeface="微软雅黑"/>
-                <a:ea typeface="微软雅黑"/>
+                <a:latin typeface="宋体"/>
+                <a:ea typeface="宋体"/>
               </a:rPr>
               <a:t>凯华</a:t>
             </a:r>
@@ -11565,8 +11565,8 @@
                 <a:solidFill>
                   <a:srgbClr val="171A20"/>
                 </a:solidFill>
-                <a:latin typeface="微软雅黑"/>
-                <a:ea typeface="微软雅黑"/>
+                <a:latin typeface="宋体"/>
+                <a:ea typeface="宋体"/>
               </a:rPr>
               <a:t>海豹06GT</a:t>
             </a:r>
@@ -11611,8 +11611,8 @@
                 <a:solidFill>
                   <a:srgbClr val="171A20"/>
                 </a:solidFill>
-                <a:latin typeface="微软雅黑"/>
-                <a:ea typeface="微软雅黑"/>
+                <a:latin typeface="宋体"/>
+                <a:ea typeface="宋体"/>
               </a:rPr>
               <a:t>21</a:t>
             </a:r>
@@ -11657,8 +11657,8 @@
                 <a:solidFill>
                   <a:srgbClr val="6B7280"/>
                 </a:solidFill>
-                <a:latin typeface="微软雅黑"/>
-                <a:ea typeface="微软雅黑"/>
+                <a:latin typeface="宋体"/>
+                <a:ea typeface="宋体"/>
               </a:rPr>
               <a:t>否</a:t>
             </a:r>
@@ -11703,8 +11703,8 @@
                 <a:solidFill>
                   <a:srgbClr val="171A20"/>
                 </a:solidFill>
-                <a:latin typeface="Arial"/>
-                <a:ea typeface="微软雅黑"/>
+                <a:latin typeface="宋体"/>
+                <a:ea typeface="宋体"/>
               </a:rPr>
               <a:t>77,697.31</a:t>
             </a:r>
@@ -11749,8 +11749,8 @@
                 <a:solidFill>
                   <a:srgbClr val="171A20"/>
                 </a:solidFill>
-                <a:latin typeface="微软雅黑"/>
-                <a:ea typeface="微软雅黑"/>
+                <a:latin typeface="宋体"/>
+                <a:ea typeface="宋体"/>
               </a:rPr>
               <a:t>20.5%</a:t>
             </a:r>
@@ -11795,8 +11795,8 @@
                 <a:solidFill>
                   <a:srgbClr val="171A20"/>
                 </a:solidFill>
-                <a:latin typeface="微软雅黑"/>
-                <a:ea typeface="微软雅黑"/>
+                <a:latin typeface="宋体"/>
+                <a:ea typeface="宋体"/>
               </a:rPr>
               <a:t>样品认证合格；562,077 件分 9/28、10/5 两批交付</a:t>
             </a:r>
@@ -11887,8 +11887,8 @@
                 <a:solidFill>
                   <a:srgbClr val="171A20"/>
                 </a:solidFill>
-                <a:latin typeface="微软雅黑"/>
-                <a:ea typeface="微软雅黑"/>
+                <a:latin typeface="宋体"/>
+                <a:ea typeface="宋体"/>
               </a:rPr>
               <a:t>ROX01</a:t>
             </a:r>
@@ -11933,8 +11933,8 @@
                 <a:solidFill>
                   <a:srgbClr val="171A20"/>
                 </a:solidFill>
-                <a:latin typeface="微软雅黑"/>
-                <a:ea typeface="微软雅黑"/>
+                <a:latin typeface="宋体"/>
+                <a:ea typeface="宋体"/>
               </a:rPr>
               <a:t>凯华</a:t>
             </a:r>
@@ -11979,8 +11979,8 @@
                 <a:solidFill>
                   <a:srgbClr val="171A20"/>
                 </a:solidFill>
-                <a:latin typeface="微软雅黑"/>
-                <a:ea typeface="微软雅黑"/>
+                <a:latin typeface="宋体"/>
+                <a:ea typeface="宋体"/>
               </a:rPr>
               <a:t>极石01</a:t>
             </a:r>
@@ -12025,8 +12025,8 @@
                 <a:solidFill>
                   <a:srgbClr val="171A20"/>
                 </a:solidFill>
-                <a:latin typeface="微软雅黑"/>
-                <a:ea typeface="微软雅黑"/>
+                <a:latin typeface="宋体"/>
+                <a:ea typeface="宋体"/>
               </a:rPr>
               <a:t>4</a:t>
             </a:r>
@@ -12071,8 +12071,8 @@
                 <a:solidFill>
                   <a:srgbClr val="6B7280"/>
                 </a:solidFill>
-                <a:latin typeface="微软雅黑"/>
-                <a:ea typeface="微软雅黑"/>
+                <a:latin typeface="宋体"/>
+                <a:ea typeface="宋体"/>
               </a:rPr>
               <a:t>否</a:t>
             </a:r>
@@ -12117,8 +12117,8 @@
                 <a:solidFill>
                   <a:srgbClr val="171A20"/>
                 </a:solidFill>
-                <a:latin typeface="Arial"/>
-                <a:ea typeface="微软雅黑"/>
+                <a:latin typeface="宋体"/>
+                <a:ea typeface="宋体"/>
               </a:rPr>
               <a:t>7,830.00</a:t>
             </a:r>
@@ -12163,8 +12163,8 @@
                 <a:solidFill>
                   <a:srgbClr val="171A20"/>
                 </a:solidFill>
-                <a:latin typeface="微软雅黑"/>
-                <a:ea typeface="微软雅黑"/>
+                <a:latin typeface="宋体"/>
+                <a:ea typeface="宋体"/>
               </a:rPr>
               <a:t>2.1%</a:t>
             </a:r>
@@ -12209,8 +12209,8 @@
                 <a:solidFill>
                   <a:srgbClr val="171A20"/>
                 </a:solidFill>
-                <a:latin typeface="微软雅黑"/>
-                <a:ea typeface="微软雅黑"/>
+                <a:latin typeface="宋体"/>
+                <a:ea typeface="宋体"/>
               </a:rPr>
               <a:t>已定点定价；批量交付中；套含税 4.10、毛利 11.0%</a:t>
             </a:r>
@@ -12255,8 +12255,8 @@
                 <a:solidFill>
                   <a:srgbClr val="6B7280"/>
                 </a:solidFill>
-                <a:latin typeface="微软雅黑"/>
-                <a:ea typeface="微软雅黑"/>
+                <a:latin typeface="宋体"/>
+                <a:ea typeface="宋体"/>
               </a:rPr>
               <a:t>注：订单金额取看板 PO 台账按 PO 日期 7/1–9/30 汇总（98 行 / 916,915 件 / 含税 ¥378,522.97）。S56 首单 PO4500127228 共 7 行、12,040 件已按 10/18 价格表回填含税 ¥23,239.66。</a:t>
             </a:r>
@@ -12404,8 +12404,8 @@
                 <a:solidFill>
                   <a:srgbClr val="171A20"/>
                 </a:solidFill>
-                <a:latin typeface="微软雅黑"/>
-                <a:ea typeface="微软雅黑"/>
+                <a:latin typeface="宋体"/>
+                <a:ea typeface="宋体"/>
               </a:rPr>
               <a:t>推进中：4 个项目（四季度增量来源）</a:t>
             </a:r>
@@ -12447,8 +12447,8 @@
                 <a:solidFill>
                   <a:srgbClr val="6B7280"/>
                 </a:solidFill>
-                <a:latin typeface="微软雅黑"/>
-                <a:ea typeface="微软雅黑"/>
+                <a:latin typeface="宋体"/>
+                <a:ea typeface="宋体"/>
               </a:rPr>
               <a:t>OTS 1 个单列：ROX MY26 已定点、11 月 SOP</a:t>
             </a:r>
@@ -12534,8 +12534,8 @@
                 <a:solidFill>
                   <a:srgbClr val="6B7280"/>
                 </a:solidFill>
-                <a:latin typeface="Arial"/>
-                <a:ea typeface="微软雅黑"/>
+                <a:latin typeface="宋体"/>
+                <a:ea typeface="宋体"/>
               </a:rPr>
               <a:t>5 / 10</a:t>
             </a:r>
@@ -12577,8 +12577,8 @@
                 <a:solidFill>
                   <a:srgbClr val="6B7280"/>
                 </a:solidFill>
-                <a:latin typeface="微软雅黑"/>
-                <a:ea typeface="微软雅黑"/>
+                <a:latin typeface="宋体"/>
+                <a:ea typeface="宋体"/>
               </a:rPr>
               <a:t>常州臻畅汽车配件有限公司 · 上海泰瑞电子科技有限公司</a:t>
             </a:r>
@@ -12710,8 +12710,8 @@
                 <a:solidFill>
                   <a:srgbClr val="171A20"/>
                 </a:solidFill>
-                <a:latin typeface="微软雅黑"/>
-                <a:ea typeface="微软雅黑"/>
+                <a:latin typeface="宋体"/>
+                <a:ea typeface="宋体"/>
               </a:rPr>
               <a:t>T12T</a:t>
             </a:r>
@@ -12756,8 +12756,8 @@
                 <a:solidFill>
                   <a:srgbClr val="E82127"/>
                 </a:solidFill>
-                <a:latin typeface="微软雅黑"/>
-                <a:ea typeface="微软雅黑"/>
+                <a:latin typeface="宋体"/>
+                <a:ea typeface="宋体"/>
               </a:rPr>
               <a:t>凯华 → 奇瑞 QQ5</a:t>
             </a:r>
@@ -12779,8 +12779,8 @@
                 <a:solidFill>
                   <a:srgbClr val="6B7280"/>
                 </a:solidFill>
-                <a:latin typeface="微软雅黑"/>
-                <a:ea typeface="微软雅黑"/>
+                <a:latin typeface="宋体"/>
+                <a:ea typeface="宋体"/>
               </a:rPr>
               <a:t>10 件（吸音棉 7 + 毛毡 3）</a:t>
             </a:r>
@@ -12866,8 +12866,8 @@
                 <a:solidFill>
                   <a:srgbClr val="6B7280"/>
                 </a:solidFill>
-                <a:latin typeface="微软雅黑"/>
-                <a:ea typeface="微软雅黑"/>
+                <a:latin typeface="宋体"/>
+                <a:ea typeface="宋体"/>
               </a:rPr>
               <a:t>当前进展</a:t>
             </a:r>
@@ -12889,8 +12889,8 @@
                 <a:solidFill>
                   <a:srgbClr val="171A20"/>
                 </a:solidFill>
-                <a:latin typeface="微软雅黑"/>
-                <a:ea typeface="微软雅黑"/>
+                <a:latin typeface="宋体"/>
+                <a:ea typeface="宋体"/>
               </a:rPr>
               <a:t>成本表已出并报价凯华，等待最后一轮核价</a:t>
             </a:r>
@@ -12932,8 +12932,8 @@
                 <a:solidFill>
                   <a:srgbClr val="6B7280"/>
                 </a:solidFill>
-                <a:latin typeface="微软雅黑"/>
-                <a:ea typeface="微软雅黑"/>
+                <a:latin typeface="宋体"/>
+                <a:ea typeface="宋体"/>
               </a:rPr>
               <a:t>下一步：</a:t>
             </a:r>
@@ -12942,8 +12942,8 @@
                 <a:solidFill>
                   <a:srgbClr val="171A20"/>
                 </a:solidFill>
-                <a:latin typeface="微软雅黑"/>
-                <a:ea typeface="微软雅黑"/>
+                <a:latin typeface="宋体"/>
+                <a:ea typeface="宋体"/>
               </a:rPr>
               <a:t>SOP 2027.3</a:t>
             </a:r>
@@ -13031,8 +13031,8 @@
                 <a:solidFill>
                   <a:srgbClr val="B46A00"/>
                 </a:solidFill>
-                <a:latin typeface="微软雅黑"/>
-                <a:ea typeface="微软雅黑"/>
+                <a:latin typeface="宋体"/>
+                <a:ea typeface="宋体"/>
               </a:rPr>
               <a:t>核价</a:t>
             </a:r>
@@ -13164,8 +13164,8 @@
                 <a:solidFill>
                   <a:srgbClr val="171A20"/>
                 </a:solidFill>
-                <a:latin typeface="微软雅黑"/>
-                <a:ea typeface="微软雅黑"/>
+                <a:latin typeface="宋体"/>
+                <a:ea typeface="宋体"/>
               </a:rPr>
               <a:t>CX835</a:t>
             </a:r>
@@ -13210,8 +13210,8 @@
                 <a:solidFill>
                   <a:srgbClr val="E82127"/>
                 </a:solidFill>
-                <a:latin typeface="微软雅黑"/>
-                <a:ea typeface="微软雅黑"/>
+                <a:latin typeface="宋体"/>
+                <a:ea typeface="宋体"/>
               </a:rPr>
               <a:t>凯华 → 长安福特烈马</a:t>
             </a:r>
@@ -13233,8 +13233,8 @@
                 <a:solidFill>
                   <a:srgbClr val="6B7280"/>
                 </a:solidFill>
-                <a:latin typeface="微软雅黑"/>
-                <a:ea typeface="微软雅黑"/>
+                <a:latin typeface="宋体"/>
+                <a:ea typeface="宋体"/>
               </a:rPr>
               <a:t>4 件吸音棉</a:t>
             </a:r>
@@ -13320,8 +13320,8 @@
                 <a:solidFill>
                   <a:srgbClr val="6B7280"/>
                 </a:solidFill>
-                <a:latin typeface="微软雅黑"/>
-                <a:ea typeface="微软雅黑"/>
+                <a:latin typeface="宋体"/>
+                <a:ea typeface="宋体"/>
               </a:rPr>
               <a:t>当前进展</a:t>
             </a:r>
@@ -13343,8 +13343,8 @@
                 <a:solidFill>
                   <a:srgbClr val="171A20"/>
                 </a:solidFill>
-                <a:latin typeface="微软雅黑"/>
-                <a:ea typeface="微软雅黑"/>
+                <a:latin typeface="宋体"/>
+                <a:ea typeface="宋体"/>
               </a:rPr>
               <a:t>8/26 客户询价、内部启动；车型暂无量，暂缓推进</a:t>
             </a:r>
@@ -13386,8 +13386,8 @@
                 <a:solidFill>
                   <a:srgbClr val="6B7280"/>
                 </a:solidFill>
-                <a:latin typeface="微软雅黑"/>
-                <a:ea typeface="微软雅黑"/>
+                <a:latin typeface="宋体"/>
+                <a:ea typeface="宋体"/>
               </a:rPr>
               <a:t>下一步：</a:t>
             </a:r>
@@ -13396,8 +13396,8 @@
                 <a:solidFill>
                   <a:srgbClr val="171A20"/>
                 </a:solidFill>
-                <a:latin typeface="微软雅黑"/>
-                <a:ea typeface="微软雅黑"/>
+                <a:latin typeface="宋体"/>
+                <a:ea typeface="宋体"/>
               </a:rPr>
               <a:t>等技术要求</a:t>
             </a:r>
@@ -13485,8 +13485,8 @@
                 <a:solidFill>
                   <a:srgbClr val="6B7280"/>
                 </a:solidFill>
-                <a:latin typeface="微软雅黑"/>
-                <a:ea typeface="微软雅黑"/>
+                <a:latin typeface="宋体"/>
+                <a:ea typeface="宋体"/>
               </a:rPr>
               <a:t>暂缓</a:t>
             </a:r>
@@ -13618,8 +13618,8 @@
                 <a:solidFill>
                   <a:srgbClr val="171A20"/>
                 </a:solidFill>
-                <a:latin typeface="微软雅黑"/>
-                <a:ea typeface="微软雅黑"/>
+                <a:latin typeface="宋体"/>
+                <a:ea typeface="宋体"/>
               </a:rPr>
               <a:t>VFe32-3M 胶带</a:t>
             </a:r>
@@ -13664,8 +13664,8 @@
                 <a:solidFill>
                   <a:srgbClr val="E82127"/>
                 </a:solidFill>
-                <a:latin typeface="微软雅黑"/>
-                <a:ea typeface="微软雅黑"/>
+                <a:latin typeface="宋体"/>
+                <a:ea typeface="宋体"/>
               </a:rPr>
               <a:t>凯华 → VINFAST</a:t>
             </a:r>
@@ -13687,8 +13687,8 @@
                 <a:solidFill>
                   <a:srgbClr val="6B7280"/>
                 </a:solidFill>
-                <a:latin typeface="微软雅黑"/>
-                <a:ea typeface="微软雅黑"/>
+                <a:latin typeface="宋体"/>
+                <a:ea typeface="宋体"/>
               </a:rPr>
               <a:t>3M 海绵胶 16 件</a:t>
             </a:r>
@@ -13774,8 +13774,8 @@
                 <a:solidFill>
                   <a:srgbClr val="6B7280"/>
                 </a:solidFill>
-                <a:latin typeface="微软雅黑"/>
-                <a:ea typeface="微软雅黑"/>
+                <a:latin typeface="宋体"/>
+                <a:ea typeface="宋体"/>
               </a:rPr>
               <a:t>当前进展</a:t>
             </a:r>
@@ -13797,8 +13797,8 @@
                 <a:solidFill>
                   <a:srgbClr val="171A20"/>
                 </a:solidFill>
-                <a:latin typeface="微软雅黑"/>
-                <a:ea typeface="微软雅黑"/>
+                <a:latin typeface="宋体"/>
+                <a:ea typeface="宋体"/>
               </a:rPr>
               <a:t>7/28 图纸已收到；准备供小样 20 片</a:t>
             </a:r>
@@ -13840,8 +13840,8 @@
                 <a:solidFill>
                   <a:srgbClr val="6B7280"/>
                 </a:solidFill>
-                <a:latin typeface="微软雅黑"/>
-                <a:ea typeface="微软雅黑"/>
+                <a:latin typeface="宋体"/>
+                <a:ea typeface="宋体"/>
               </a:rPr>
               <a:t>下一步：</a:t>
             </a:r>
@@ -13850,8 +13850,8 @@
                 <a:solidFill>
                   <a:srgbClr val="171A20"/>
                 </a:solidFill>
-                <a:latin typeface="微软雅黑"/>
-                <a:ea typeface="微软雅黑"/>
+                <a:latin typeface="宋体"/>
+                <a:ea typeface="宋体"/>
               </a:rPr>
               <a:t>小样</a:t>
             </a:r>
@@ -13939,8 +13939,8 @@
                 <a:solidFill>
                   <a:srgbClr val="1D4ED8"/>
                 </a:solidFill>
-                <a:latin typeface="微软雅黑"/>
-                <a:ea typeface="微软雅黑"/>
+                <a:latin typeface="宋体"/>
+                <a:ea typeface="宋体"/>
               </a:rPr>
               <a:t>送样</a:t>
             </a:r>
@@ -14072,8 +14072,8 @@
                 <a:solidFill>
                   <a:srgbClr val="171A20"/>
                 </a:solidFill>
-                <a:latin typeface="微软雅黑"/>
-                <a:ea typeface="微软雅黑"/>
+                <a:latin typeface="宋体"/>
+                <a:ea typeface="宋体"/>
               </a:rPr>
               <a:t>BS5PR</a:t>
             </a:r>
@@ -14118,8 +14118,8 @@
                 <a:solidFill>
                   <a:srgbClr val="E82127"/>
                 </a:solidFill>
-                <a:latin typeface="微软雅黑"/>
-                <a:ea typeface="微软雅黑"/>
+                <a:latin typeface="宋体"/>
+                <a:ea typeface="宋体"/>
               </a:rPr>
               <a:t>海泰 → 智己</a:t>
             </a:r>
@@ -14141,8 +14141,8 @@
                 <a:solidFill>
                   <a:srgbClr val="6B7280"/>
                 </a:solidFill>
-                <a:latin typeface="微软雅黑"/>
-                <a:ea typeface="微软雅黑"/>
+                <a:latin typeface="宋体"/>
+                <a:ea typeface="宋体"/>
               </a:rPr>
               <a:t>泡棉定位销 1 件</a:t>
             </a:r>
@@ -14228,8 +14228,8 @@
                 <a:solidFill>
                   <a:srgbClr val="6B7280"/>
                 </a:solidFill>
-                <a:latin typeface="微软雅黑"/>
-                <a:ea typeface="微软雅黑"/>
+                <a:latin typeface="宋体"/>
+                <a:ea typeface="宋体"/>
               </a:rPr>
               <a:t>当前进展</a:t>
             </a:r>
@@ -14251,8 +14251,8 @@
                 <a:solidFill>
                   <a:srgbClr val="171A20"/>
                 </a:solidFill>
-                <a:latin typeface="微软雅黑"/>
-                <a:ea typeface="微软雅黑"/>
+                <a:latin typeface="宋体"/>
+                <a:ea typeface="宋体"/>
               </a:rPr>
               <a:t>10/10 发起定点询价；10/13 内部完成成本核算</a:t>
             </a:r>
@@ -14294,8 +14294,8 @@
                 <a:solidFill>
                   <a:srgbClr val="6B7280"/>
                 </a:solidFill>
-                <a:latin typeface="微软雅黑"/>
-                <a:ea typeface="微软雅黑"/>
+                <a:latin typeface="宋体"/>
+                <a:ea typeface="宋体"/>
               </a:rPr>
               <a:t>下一步：</a:t>
             </a:r>
@@ -14304,8 +14304,8 @@
                 <a:solidFill>
                   <a:srgbClr val="171A20"/>
                 </a:solidFill>
-                <a:latin typeface="微软雅黑"/>
-                <a:ea typeface="微软雅黑"/>
+                <a:latin typeface="宋体"/>
+                <a:ea typeface="宋体"/>
               </a:rPr>
               <a:t>获取对方目标价</a:t>
             </a:r>
@@ -14393,8 +14393,8 @@
                 <a:solidFill>
                   <a:srgbClr val="1D4ED8"/>
                 </a:solidFill>
-                <a:latin typeface="微软雅黑"/>
-                <a:ea typeface="微软雅黑"/>
+                <a:latin typeface="宋体"/>
+                <a:ea typeface="宋体"/>
               </a:rPr>
               <a:t>报价</a:t>
             </a:r>
@@ -14439,8 +14439,8 @@
                 <a:solidFill>
                   <a:srgbClr val="171A20"/>
                 </a:solidFill>
-                <a:latin typeface="微软雅黑"/>
-                <a:ea typeface="微软雅黑"/>
+                <a:latin typeface="宋体"/>
+                <a:ea typeface="宋体"/>
               </a:rPr>
               <a:t>判断：</a:t>
             </a:r>
@@ -14449,8 +14449,8 @@
                 <a:solidFill>
                   <a:srgbClr val="6B7280"/>
                 </a:solidFill>
-                <a:latin typeface="微软雅黑"/>
-                <a:ea typeface="微软雅黑"/>
+                <a:latin typeface="宋体"/>
+                <a:ea typeface="宋体"/>
               </a:rPr>
               <a:t>四个项目都还停在「报价/核价/送样」段，Q3 未产生收入。T12T 与 BS5PR 最接近落地（均已报价或完成成本核算），CX835 因车型无量建议降优先级。VFe32-3M 胶带是现有客户内的品类扩展，样品阶段成本低、值得推。</a:t>
             </a:r>
@@ -14598,8 +14598,8 @@
                 <a:solidFill>
                   <a:srgbClr val="171A20"/>
                 </a:solidFill>
-                <a:latin typeface="微软雅黑"/>
-                <a:ea typeface="微软雅黑"/>
+                <a:latin typeface="宋体"/>
+                <a:ea typeface="宋体"/>
               </a:rPr>
               <a:t>Q3 大事记（7–9 月，节选 10 条）</a:t>
             </a:r>
@@ -14641,8 +14641,8 @@
                 <a:solidFill>
                   <a:srgbClr val="6B7280"/>
                 </a:solidFill>
-                <a:latin typeface="微软雅黑"/>
-                <a:ea typeface="微软雅黑"/>
+                <a:latin typeface="宋体"/>
+                <a:ea typeface="宋体"/>
               </a:rPr>
               <a:t>完整 36 条见《臻畅-2026Q3-项目汇总-20261018.xlsx》「03_Q3大事记」</a:t>
             </a:r>
@@ -14728,8 +14728,8 @@
                 <a:solidFill>
                   <a:srgbClr val="6B7280"/>
                 </a:solidFill>
-                <a:latin typeface="Arial"/>
-                <a:ea typeface="微软雅黑"/>
+                <a:latin typeface="宋体"/>
+                <a:ea typeface="宋体"/>
               </a:rPr>
               <a:t>6 / 10</a:t>
             </a:r>
@@ -14771,8 +14771,8 @@
                 <a:solidFill>
                   <a:srgbClr val="6B7280"/>
                 </a:solidFill>
-                <a:latin typeface="微软雅黑"/>
-                <a:ea typeface="微软雅黑"/>
+                <a:latin typeface="宋体"/>
+                <a:ea typeface="宋体"/>
               </a:rPr>
               <a:t>常州臻畅汽车配件有限公司 · 上海泰瑞电子科技有限公司</a:t>
             </a:r>
@@ -14858,8 +14858,8 @@
                 <a:solidFill>
                   <a:srgbClr val="171A20"/>
                 </a:solidFill>
-                <a:latin typeface="Arial"/>
-                <a:ea typeface="微软雅黑"/>
+                <a:latin typeface="宋体"/>
+                <a:ea typeface="宋体"/>
               </a:rPr>
               <a:t>07-15</a:t>
             </a:r>
@@ -14948,8 +14948,8 @@
                 <a:solidFill>
                   <a:srgbClr val="171A20"/>
                 </a:solidFill>
-                <a:latin typeface="微软雅黑"/>
-                <a:ea typeface="微软雅黑"/>
+                <a:latin typeface="宋体"/>
+                <a:ea typeface="宋体"/>
               </a:rPr>
               <a:t>VFe32 客户定点</a:t>
             </a:r>
@@ -14991,8 +14991,8 @@
                 <a:solidFill>
                   <a:srgbClr val="171A20"/>
                 </a:solidFill>
-                <a:latin typeface="Arial"/>
-                <a:ea typeface="微软雅黑"/>
+                <a:latin typeface="宋体"/>
+                <a:ea typeface="宋体"/>
               </a:rPr>
               <a:t>07-31</a:t>
             </a:r>
@@ -15081,8 +15081,8 @@
                 <a:solidFill>
                   <a:srgbClr val="171A20"/>
                 </a:solidFill>
-                <a:latin typeface="微软雅黑"/>
-                <a:ea typeface="微软雅黑"/>
+                <a:latin typeface="宋体"/>
+                <a:ea typeface="宋体"/>
               </a:rPr>
               <a:t>VFe32 SOP 量产（切换件）</a:t>
             </a:r>
@@ -15124,8 +15124,8 @@
                 <a:solidFill>
                   <a:srgbClr val="171A20"/>
                 </a:solidFill>
-                <a:latin typeface="Arial"/>
-                <a:ea typeface="微软雅黑"/>
+                <a:latin typeface="宋体"/>
+                <a:ea typeface="宋体"/>
               </a:rPr>
               <a:t>08-03</a:t>
             </a:r>
@@ -15214,8 +15214,8 @@
                 <a:solidFill>
                   <a:srgbClr val="171A20"/>
                 </a:solidFill>
-                <a:latin typeface="微软雅黑"/>
-                <a:ea typeface="微软雅黑"/>
+                <a:latin typeface="宋体"/>
+                <a:ea typeface="宋体"/>
               </a:rPr>
               <a:t>BC03 SOP 量产，首批 248 件</a:t>
             </a:r>
@@ -15257,8 +15257,8 @@
                 <a:solidFill>
                   <a:srgbClr val="171A20"/>
                 </a:solidFill>
-                <a:latin typeface="Arial"/>
-                <a:ea typeface="微软雅黑"/>
+                <a:latin typeface="宋体"/>
+                <a:ea typeface="宋体"/>
               </a:rPr>
               <a:t>08-20</a:t>
             </a:r>
@@ -15347,8 +15347,8 @@
                 <a:solidFill>
                   <a:srgbClr val="171A20"/>
                 </a:solidFill>
-                <a:latin typeface="微软雅黑"/>
-                <a:ea typeface="微软雅黑"/>
+                <a:latin typeface="宋体"/>
+                <a:ea typeface="宋体"/>
               </a:rPr>
               <a:t>ROX01 客户询价，内部启动</a:t>
             </a:r>
@@ -15390,8 +15390,8 @@
                 <a:solidFill>
                   <a:srgbClr val="171A20"/>
                 </a:solidFill>
-                <a:latin typeface="Arial"/>
-                <a:ea typeface="微软雅黑"/>
+                <a:latin typeface="宋体"/>
+                <a:ea typeface="宋体"/>
               </a:rPr>
               <a:t>08-27</a:t>
             </a:r>
@@ -15480,8 +15480,8 @@
                 <a:solidFill>
                   <a:srgbClr val="171A20"/>
                 </a:solidFill>
-                <a:latin typeface="微软雅黑"/>
-                <a:ea typeface="微软雅黑"/>
+                <a:latin typeface="宋体"/>
+                <a:ea typeface="宋体"/>
               </a:rPr>
               <a:t>ZH5EM、SHD 同日定点</a:t>
             </a:r>
@@ -15523,8 +15523,8 @@
                 <a:solidFill>
                   <a:srgbClr val="171A20"/>
                 </a:solidFill>
-                <a:latin typeface="Arial"/>
-                <a:ea typeface="微软雅黑"/>
+                <a:latin typeface="宋体"/>
+                <a:ea typeface="宋体"/>
               </a:rPr>
               <a:t>09-01</a:t>
             </a:r>
@@ -15613,8 +15613,8 @@
                 <a:solidFill>
                   <a:srgbClr val="171A20"/>
                 </a:solidFill>
-                <a:latin typeface="微软雅黑"/>
-                <a:ea typeface="微软雅黑"/>
+                <a:latin typeface="宋体"/>
+                <a:ea typeface="宋体"/>
               </a:rPr>
               <a:t>ROX MY26 内部定点（左 0.3097 / 右 0.3009 未税）</a:t>
             </a:r>
@@ -15656,8 +15656,8 @@
                 <a:solidFill>
                   <a:srgbClr val="171A20"/>
                 </a:solidFill>
-                <a:latin typeface="Arial"/>
-                <a:ea typeface="微软雅黑"/>
+                <a:latin typeface="宋体"/>
+                <a:ea typeface="宋体"/>
               </a:rPr>
               <a:t>09-12</a:t>
             </a:r>
@@ -15746,8 +15746,8 @@
                 <a:solidFill>
                   <a:srgbClr val="171A20"/>
                 </a:solidFill>
-                <a:latin typeface="微软雅黑"/>
-                <a:ea typeface="微软雅黑"/>
+                <a:latin typeface="宋体"/>
+                <a:ea typeface="宋体"/>
               </a:rPr>
               <a:t>EHEA 样品认证合格，启动拉动</a:t>
             </a:r>
@@ -15789,8 +15789,8 @@
                 <a:solidFill>
                   <a:srgbClr val="171A20"/>
                 </a:solidFill>
-                <a:latin typeface="Arial"/>
-                <a:ea typeface="微软雅黑"/>
+                <a:latin typeface="宋体"/>
+                <a:ea typeface="宋体"/>
               </a:rPr>
               <a:t>09-16</a:t>
             </a:r>
@@ -15879,8 +15879,8 @@
                 <a:solidFill>
                   <a:srgbClr val="171A20"/>
                 </a:solidFill>
-                <a:latin typeface="微软雅黑"/>
-                <a:ea typeface="微软雅黑"/>
+                <a:latin typeface="宋体"/>
+                <a:ea typeface="宋体"/>
               </a:rPr>
               <a:t>S56 内部定点：14 件 / 年均 5 万套 / EOP 2029.12</a:t>
             </a:r>
@@ -15922,8 +15922,8 @@
                 <a:solidFill>
                   <a:srgbClr val="171A20"/>
                 </a:solidFill>
-                <a:latin typeface="Arial"/>
-                <a:ea typeface="微软雅黑"/>
+                <a:latin typeface="宋体"/>
+                <a:ea typeface="宋体"/>
               </a:rPr>
               <a:t>09-18</a:t>
             </a:r>
@@ -16012,8 +16012,8 @@
                 <a:solidFill>
                   <a:srgbClr val="171A20"/>
                 </a:solidFill>
-                <a:latin typeface="微软雅黑"/>
-                <a:ea typeface="微软雅黑"/>
+                <a:latin typeface="宋体"/>
+                <a:ea typeface="宋体"/>
               </a:rPr>
               <a:t>S56 5 个件号 25 件样品；51-12723 取消</a:t>
             </a:r>
@@ -16055,8 +16055,8 @@
                 <a:solidFill>
                   <a:srgbClr val="171A20"/>
                 </a:solidFill>
-                <a:latin typeface="Arial"/>
-                <a:ea typeface="微软雅黑"/>
+                <a:latin typeface="宋体"/>
+                <a:ea typeface="宋体"/>
               </a:rPr>
               <a:t>09-23</a:t>
             </a:r>
@@ -16145,8 +16145,8 @@
                 <a:solidFill>
                   <a:srgbClr val="E82127"/>
                 </a:solidFill>
-                <a:latin typeface="微软雅黑"/>
-                <a:ea typeface="微软雅黑"/>
+                <a:latin typeface="宋体"/>
+                <a:ea typeface="宋体"/>
               </a:rPr>
               <a:t>EHEA 562,077 件分批出货排定（⚠️ 大质量问题）</a:t>
             </a:r>
@@ -16234,8 +16234,8 @@
                 <a:solidFill>
                   <a:srgbClr val="171A20"/>
                 </a:solidFill>
-                <a:latin typeface="微软雅黑"/>
-                <a:ea typeface="微软雅黑"/>
+                <a:latin typeface="宋体"/>
+                <a:ea typeface="宋体"/>
               </a:rPr>
               <a:t>Q3 三个节点</a:t>
             </a:r>
@@ -16254,8 +16254,8 @@
                 <a:solidFill>
                   <a:srgbClr val="6B7280"/>
                 </a:solidFill>
-                <a:latin typeface="微软雅黑"/>
-                <a:ea typeface="微软雅黑"/>
+                <a:latin typeface="宋体"/>
+                <a:ea typeface="宋体"/>
               </a:rPr>
               <a:t>新定点</a:t>
             </a:r>
@@ -16274,8 +16274,8 @@
                 <a:solidFill>
                   <a:srgbClr val="E82127"/>
                 </a:solidFill>
-                <a:latin typeface="Arial"/>
-                <a:ea typeface="微软雅黑"/>
+                <a:latin typeface="宋体"/>
+                <a:ea typeface="宋体"/>
               </a:rPr>
               <a:t>4 个</a:t>
             </a:r>
@@ -16294,8 +16294,8 @@
                 <a:solidFill>
                   <a:srgbClr val="6B7280"/>
                 </a:solidFill>
-                <a:latin typeface="微软雅黑"/>
-                <a:ea typeface="微软雅黑"/>
+                <a:latin typeface="宋体"/>
+                <a:ea typeface="宋体"/>
               </a:rPr>
               <a:t>新 SOP</a:t>
             </a:r>
@@ -16314,8 +16314,8 @@
                 <a:solidFill>
                   <a:srgbClr val="E82127"/>
                 </a:solidFill>
-                <a:latin typeface="Arial"/>
-                <a:ea typeface="微软雅黑"/>
+                <a:latin typeface="宋体"/>
+                <a:ea typeface="宋体"/>
               </a:rPr>
               <a:t>2 个</a:t>
             </a:r>
@@ -16334,8 +16334,8 @@
                 <a:solidFill>
                   <a:srgbClr val="6B7280"/>
                 </a:solidFill>
-                <a:latin typeface="微软雅黑"/>
-                <a:ea typeface="微软雅黑"/>
+                <a:latin typeface="宋体"/>
+                <a:ea typeface="宋体"/>
               </a:rPr>
               <a:t>节点总数</a:t>
             </a:r>
@@ -16354,8 +16354,8 @@
                 <a:solidFill>
                   <a:srgbClr val="E82127"/>
                 </a:solidFill>
-                <a:latin typeface="Arial"/>
-                <a:ea typeface="微软雅黑"/>
+                <a:latin typeface="宋体"/>
+                <a:ea typeface="宋体"/>
               </a:rPr>
               <a:t>36 条</a:t>
             </a:r>
@@ -16503,8 +16503,8 @@
                 <a:solidFill>
                   <a:srgbClr val="171A20"/>
                 </a:solidFill>
-                <a:latin typeface="微软雅黑"/>
-                <a:ea typeface="微软雅黑"/>
+                <a:latin typeface="宋体"/>
+                <a:ea typeface="宋体"/>
               </a:rPr>
               <a:t>Q3 订单结构</a:t>
             </a:r>
@@ -16546,8 +16546,8 @@
                 <a:solidFill>
                   <a:srgbClr val="6B7280"/>
                 </a:solidFill>
-                <a:latin typeface="微软雅黑"/>
-                <a:ea typeface="微软雅黑"/>
+                <a:latin typeface="宋体"/>
+                <a:ea typeface="宋体"/>
               </a:rPr>
               <a:t>98 行 PO / 916,915 件 / 含税 ¥401,762.63（按 PO 日期 7/1–9/30）</a:t>
             </a:r>
@@ -16633,8 +16633,8 @@
                 <a:solidFill>
                   <a:srgbClr val="6B7280"/>
                 </a:solidFill>
-                <a:latin typeface="Arial"/>
-                <a:ea typeface="微软雅黑"/>
+                <a:latin typeface="宋体"/>
+                <a:ea typeface="宋体"/>
               </a:rPr>
               <a:t>7 / 10</a:t>
             </a:r>
@@ -16676,8 +16676,8 @@
                 <a:solidFill>
                   <a:srgbClr val="6B7280"/>
                 </a:solidFill>
-                <a:latin typeface="微软雅黑"/>
-                <a:ea typeface="微软雅黑"/>
+                <a:latin typeface="宋体"/>
+                <a:ea typeface="宋体"/>
               </a:rPr>
               <a:t>常州臻畅汽车配件有限公司 · 上海泰瑞电子科技有限公司</a:t>
             </a:r>
@@ -16719,8 +16719,8 @@
                 <a:solidFill>
                   <a:srgbClr val="171A20"/>
                 </a:solidFill>
-                <a:latin typeface="微软雅黑"/>
-                <a:ea typeface="微软雅黑"/>
+                <a:latin typeface="宋体"/>
+                <a:ea typeface="宋体"/>
               </a:rPr>
               <a:t>LEV1</a:t>
             </a:r>
@@ -16806,8 +16806,8 @@
                 <a:solidFill>
                   <a:srgbClr val="171A20"/>
                 </a:solidFill>
-                <a:latin typeface="Arial"/>
-                <a:ea typeface="微软雅黑"/>
+                <a:latin typeface="宋体"/>
+                <a:ea typeface="宋体"/>
               </a:rPr>
               <a:t>179,659 元</a:t>
             </a:r>
@@ -16849,8 +16849,8 @@
                 <a:solidFill>
                   <a:srgbClr val="6B7280"/>
                 </a:solidFill>
-                <a:latin typeface="微软雅黑"/>
-                <a:ea typeface="微软雅黑"/>
+                <a:latin typeface="宋体"/>
+                <a:ea typeface="宋体"/>
               </a:rPr>
               <a:t>87,498 件</a:t>
             </a:r>
@@ -16892,8 +16892,8 @@
                 <a:solidFill>
                   <a:srgbClr val="171A20"/>
                 </a:solidFill>
-                <a:latin typeface="微软雅黑"/>
-                <a:ea typeface="微软雅黑"/>
+                <a:latin typeface="宋体"/>
+                <a:ea typeface="宋体"/>
               </a:rPr>
               <a:t>VFe32</a:t>
             </a:r>
@@ -16979,8 +16979,8 @@
                 <a:solidFill>
                   <a:srgbClr val="171A20"/>
                 </a:solidFill>
-                <a:latin typeface="Arial"/>
-                <a:ea typeface="微软雅黑"/>
+                <a:latin typeface="宋体"/>
+                <a:ea typeface="宋体"/>
               </a:rPr>
               <a:t>98,827 元</a:t>
             </a:r>
@@ -17022,8 +17022,8 @@
                 <a:solidFill>
                   <a:srgbClr val="6B7280"/>
                 </a:solidFill>
-                <a:latin typeface="微软雅黑"/>
-                <a:ea typeface="微软雅黑"/>
+                <a:latin typeface="宋体"/>
+                <a:ea typeface="宋体"/>
               </a:rPr>
               <a:t>219,352 件</a:t>
             </a:r>
@@ -17065,8 +17065,8 @@
                 <a:solidFill>
                   <a:srgbClr val="171A20"/>
                 </a:solidFill>
-                <a:latin typeface="微软雅黑"/>
-                <a:ea typeface="微软雅黑"/>
+                <a:latin typeface="宋体"/>
+                <a:ea typeface="宋体"/>
               </a:rPr>
               <a:t>EHEA</a:t>
             </a:r>
@@ -17152,8 +17152,8 @@
                 <a:solidFill>
                   <a:srgbClr val="171A20"/>
                 </a:solidFill>
-                <a:latin typeface="Arial"/>
-                <a:ea typeface="微软雅黑"/>
+                <a:latin typeface="宋体"/>
+                <a:ea typeface="宋体"/>
               </a:rPr>
               <a:t>77,697 元</a:t>
             </a:r>
@@ -17195,8 +17195,8 @@
                 <a:solidFill>
                   <a:srgbClr val="6B7280"/>
                 </a:solidFill>
-                <a:latin typeface="微软雅黑"/>
-                <a:ea typeface="微软雅黑"/>
+                <a:latin typeface="宋体"/>
+                <a:ea typeface="宋体"/>
               </a:rPr>
               <a:t>562,077 件</a:t>
             </a:r>
@@ -17238,8 +17238,8 @@
                 <a:solidFill>
                   <a:srgbClr val="171A20"/>
                 </a:solidFill>
-                <a:latin typeface="微软雅黑"/>
-                <a:ea typeface="微软雅黑"/>
+                <a:latin typeface="宋体"/>
+                <a:ea typeface="宋体"/>
               </a:rPr>
               <a:t>BC03</a:t>
             </a:r>
@@ -17325,8 +17325,8 @@
                 <a:solidFill>
                   <a:srgbClr val="171A20"/>
                 </a:solidFill>
-                <a:latin typeface="Arial"/>
-                <a:ea typeface="微软雅黑"/>
+                <a:latin typeface="宋体"/>
+                <a:ea typeface="宋体"/>
               </a:rPr>
               <a:t>14,165 元</a:t>
             </a:r>
@@ -17368,8 +17368,8 @@
                 <a:solidFill>
                   <a:srgbClr val="6B7280"/>
                 </a:solidFill>
-                <a:latin typeface="微软雅黑"/>
-                <a:ea typeface="微软雅黑"/>
+                <a:latin typeface="宋体"/>
+                <a:ea typeface="宋体"/>
               </a:rPr>
               <a:t>5,448 件</a:t>
             </a:r>
@@ -17411,8 +17411,8 @@
                 <a:solidFill>
                   <a:srgbClr val="171A20"/>
                 </a:solidFill>
-                <a:latin typeface="微软雅黑"/>
-                <a:ea typeface="微软雅黑"/>
+                <a:latin typeface="宋体"/>
+                <a:ea typeface="宋体"/>
               </a:rPr>
               <a:t>S56</a:t>
             </a:r>
@@ -17498,8 +17498,8 @@
                 <a:solidFill>
                   <a:srgbClr val="171A20"/>
                 </a:solidFill>
-                <a:latin typeface="Arial"/>
-                <a:ea typeface="微软雅黑"/>
+                <a:latin typeface="宋体"/>
+                <a:ea typeface="宋体"/>
               </a:rPr>
               <a:t>23,240 元</a:t>
             </a:r>
@@ -17541,8 +17541,8 @@
                 <a:solidFill>
                   <a:srgbClr val="6B7280"/>
                 </a:solidFill>
-                <a:latin typeface="微软雅黑"/>
-                <a:ea typeface="微软雅黑"/>
+                <a:latin typeface="宋体"/>
+                <a:ea typeface="宋体"/>
               </a:rPr>
               <a:t>12,040 件</a:t>
             </a:r>
@@ -17584,8 +17584,8 @@
                 <a:solidFill>
                   <a:srgbClr val="171A20"/>
                 </a:solidFill>
-                <a:latin typeface="微软雅黑"/>
-                <a:ea typeface="微软雅黑"/>
+                <a:latin typeface="宋体"/>
+                <a:ea typeface="宋体"/>
               </a:rPr>
               <a:t>ROX01</a:t>
             </a:r>
@@ -17671,8 +17671,8 @@
                 <a:solidFill>
                   <a:srgbClr val="171A20"/>
                 </a:solidFill>
-                <a:latin typeface="Arial"/>
-                <a:ea typeface="微软雅黑"/>
+                <a:latin typeface="宋体"/>
+                <a:ea typeface="宋体"/>
               </a:rPr>
               <a:t>7,830 元</a:t>
             </a:r>
@@ -17714,8 +17714,8 @@
                 <a:solidFill>
                   <a:srgbClr val="6B7280"/>
                 </a:solidFill>
-                <a:latin typeface="微软雅黑"/>
-                <a:ea typeface="微软雅黑"/>
+                <a:latin typeface="宋体"/>
+                <a:ea typeface="宋体"/>
               </a:rPr>
               <a:t>29,500 件</a:t>
             </a:r>
@@ -17757,8 +17757,8 @@
                 <a:solidFill>
                   <a:srgbClr val="171A20"/>
                 </a:solidFill>
-                <a:latin typeface="微软雅黑"/>
-                <a:ea typeface="微软雅黑"/>
+                <a:latin typeface="宋体"/>
+                <a:ea typeface="宋体"/>
               </a:rPr>
               <a:t>ROX MY26</a:t>
             </a:r>
@@ -17844,8 +17844,8 @@
                 <a:solidFill>
                   <a:srgbClr val="171A20"/>
                 </a:solidFill>
-                <a:latin typeface="Arial"/>
-                <a:ea typeface="微软雅黑"/>
+                <a:latin typeface="宋体"/>
+                <a:ea typeface="宋体"/>
               </a:rPr>
               <a:t>345 元</a:t>
             </a:r>
@@ -17887,8 +17887,8 @@
                 <a:solidFill>
                   <a:srgbClr val="6B7280"/>
                 </a:solidFill>
-                <a:latin typeface="微软雅黑"/>
-                <a:ea typeface="微软雅黑"/>
+                <a:latin typeface="宋体"/>
+                <a:ea typeface="宋体"/>
               </a:rPr>
               <a:t>1,000 件</a:t>
             </a:r>
@@ -17976,8 +17976,8 @@
                 <a:solidFill>
                   <a:srgbClr val="171A20"/>
                 </a:solidFill>
-                <a:latin typeface="微软雅黑"/>
-                <a:ea typeface="微软雅黑"/>
+                <a:latin typeface="宋体"/>
+                <a:ea typeface="宋体"/>
               </a:rPr>
               <a:t>三个事实</a:t>
             </a:r>
@@ -17996,8 +17996,8 @@
                 <a:solidFill>
                   <a:srgbClr val="E82127"/>
                 </a:solidFill>
-                <a:latin typeface="微软雅黑"/>
-                <a:ea typeface="微软雅黑"/>
+                <a:latin typeface="宋体"/>
+                <a:ea typeface="宋体"/>
               </a:rPr>
               <a:t>① 集中度极高</a:t>
             </a:r>
@@ -18019,8 +18019,8 @@
                 <a:solidFill>
                   <a:srgbClr val="171A20"/>
                 </a:solidFill>
-                <a:latin typeface="微软雅黑"/>
-                <a:ea typeface="微软雅黑"/>
+                <a:latin typeface="宋体"/>
+                <a:ea typeface="宋体"/>
               </a:rPr>
               <a:t>LEV1 + VFe32 = 27.85 万，占 69.3%。任一项目掉量，季度收入立刻失血。</a:t>
             </a:r>
@@ -18039,8 +18039,8 @@
                 <a:solidFill>
                   <a:srgbClr val="E82127"/>
                 </a:solidFill>
-                <a:latin typeface="微软雅黑"/>
-                <a:ea typeface="微软雅黑"/>
+                <a:latin typeface="宋体"/>
+                <a:ea typeface="宋体"/>
               </a:rPr>
               <a:t>② EHEA 量最大、额第三</a:t>
             </a:r>
@@ -18062,8 +18062,8 @@
                 <a:solidFill>
                   <a:srgbClr val="171A20"/>
                 </a:solidFill>
-                <a:latin typeface="微软雅黑"/>
-                <a:ea typeface="微软雅黑"/>
+                <a:latin typeface="宋体"/>
+                <a:ea typeface="宋体"/>
               </a:rPr>
               <a:t>562,077 件占总量 61%，但单价低（合计 7.77 万，单件约 0.14 元），是典型的走量件。</a:t>
             </a:r>
@@ -18082,8 +18082,8 @@
                 <a:solidFill>
                   <a:srgbClr val="E82127"/>
                 </a:solidFill>
-                <a:latin typeface="微软雅黑"/>
-                <a:ea typeface="微软雅黑"/>
+                <a:latin typeface="宋体"/>
+                <a:ea typeface="宋体"/>
               </a:rPr>
               <a:t>③ S56 已定价进账</a:t>
             </a:r>
@@ -18105,8 +18105,8 @@
                 <a:solidFill>
                   <a:srgbClr val="171A20"/>
                 </a:solidFill>
-                <a:latin typeface="微软雅黑"/>
-                <a:ea typeface="微软雅黑"/>
+                <a:latin typeface="宋体"/>
+                <a:ea typeface="宋体"/>
               </a:rPr>
               <a:t>10/18 价格表落地，首单 12,040 件计入 2.32 万；Q4 起按年均 5 万套放大。</a:t>
             </a:r>
@@ -18148,8 +18148,8 @@
                 <a:solidFill>
                   <a:srgbClr val="6B7280"/>
                 </a:solidFill>
-                <a:latin typeface="微软雅黑"/>
-                <a:ea typeface="微软雅黑"/>
+                <a:latin typeface="宋体"/>
+                <a:ea typeface="宋体"/>
               </a:rPr>
               <a:t>注：金额与数量取自看板 PO 台账（orders_data.json）按 PO 日期汇总；ROX MY26 为 OTS 阶段首批，量小。</a:t>
             </a:r>
@@ -18297,8 +18297,8 @@
                 <a:solidFill>
                   <a:srgbClr val="171A20"/>
                 </a:solidFill>
-                <a:latin typeface="微软雅黑"/>
-                <a:ea typeface="微软雅黑"/>
+                <a:latin typeface="宋体"/>
+                <a:ea typeface="宋体"/>
               </a:rPr>
               <a:t>问题与风险（按影响排序）</a:t>
             </a:r>
@@ -18340,8 +18340,8 @@
                 <a:solidFill>
                   <a:srgbClr val="6B7280"/>
                 </a:solidFill>
-                <a:latin typeface="微软雅黑"/>
-                <a:ea typeface="微软雅黑"/>
+                <a:latin typeface="宋体"/>
+                <a:ea typeface="宋体"/>
               </a:rPr>
               <a:t>前三条需要在本周内闭环，否则影响四季度收入确认</a:t>
             </a:r>
@@ -18427,8 +18427,8 @@
                 <a:solidFill>
                   <a:srgbClr val="6B7280"/>
                 </a:solidFill>
-                <a:latin typeface="Arial"/>
-                <a:ea typeface="微软雅黑"/>
+                <a:latin typeface="宋体"/>
+                <a:ea typeface="宋体"/>
               </a:rPr>
               <a:t>8 / 10</a:t>
             </a:r>
@@ -18470,8 +18470,8 @@
                 <a:solidFill>
                   <a:srgbClr val="6B7280"/>
                 </a:solidFill>
-                <a:latin typeface="微软雅黑"/>
-                <a:ea typeface="微软雅黑"/>
+                <a:latin typeface="宋体"/>
+                <a:ea typeface="宋体"/>
               </a:rPr>
               <a:t>常州臻畅汽车配件有限公司 · 上海泰瑞电子科技有限公司</a:t>
             </a:r>
@@ -18647,8 +18647,8 @@
                 <a:solidFill>
                   <a:srgbClr val="FFFFFF"/>
                 </a:solidFill>
-                <a:latin typeface="Arial"/>
-                <a:ea typeface="微软雅黑"/>
+                <a:latin typeface="宋体"/>
+                <a:ea typeface="宋体"/>
               </a:rPr>
               <a:t>P0</a:t>
             </a:r>
@@ -18690,8 +18690,8 @@
                 <a:solidFill>
                   <a:srgbClr val="171A20"/>
                 </a:solidFill>
-                <a:latin typeface="微软雅黑"/>
-                <a:ea typeface="微软雅黑"/>
+                <a:latin typeface="宋体"/>
+                <a:ea typeface="宋体"/>
               </a:rPr>
               <a:t>EHEA「目前有大质量问题」</a:t>
             </a:r>
@@ -18736,8 +18736,8 @@
                 <a:solidFill>
                   <a:srgbClr val="6B7280"/>
                 </a:solidFill>
-                <a:latin typeface="微软雅黑"/>
-                <a:ea typeface="微软雅黑"/>
+                <a:latin typeface="宋体"/>
+                <a:ea typeface="宋体"/>
               </a:rPr>
               <a:t>9/23 出货计划备注，涉 PO 三单 562,077 件（9/28 发 281,038 件、10/5 发 281,039 件）</a:t>
             </a:r>
@@ -18782,8 +18782,8 @@
                 <a:solidFill>
                   <a:srgbClr val="171A20"/>
                 </a:solidFill>
-                <a:latin typeface="微软雅黑"/>
-                <a:ea typeface="微软雅黑"/>
+                <a:latin typeface="宋体"/>
+                <a:ea typeface="宋体"/>
               </a:rPr>
               <a:t>件号、根因、影响批量、整改与复检安排均未落纸；一旦批量退货，Q3/Q4 收入与客户信任双损</a:t>
             </a:r>
@@ -18828,8 +18828,8 @@
                 <a:solidFill>
                   <a:srgbClr val="6B7280"/>
                 </a:solidFill>
-                <a:latin typeface="微软雅黑"/>
-                <a:ea typeface="微软雅黑"/>
+                <a:latin typeface="宋体"/>
+                <a:ea typeface="宋体"/>
               </a:rPr>
               <a:t>动作：</a:t>
             </a:r>
@@ -18838,8 +18838,8 @@
                 <a:solidFill>
                   <a:srgbClr val="E82127"/>
                 </a:solidFill>
-                <a:latin typeface="微软雅黑"/>
-                <a:ea typeface="微软雅黑"/>
+                <a:latin typeface="宋体"/>
+                <a:ea typeface="宋体"/>
               </a:rPr>
               <a:t>今天查清并出书面结论</a:t>
             </a:r>
@@ -19015,8 +19015,8 @@
                 <a:solidFill>
                   <a:srgbClr val="FFFFFF"/>
                 </a:solidFill>
-                <a:latin typeface="Arial"/>
-                <a:ea typeface="微软雅黑"/>
+                <a:latin typeface="宋体"/>
+                <a:ea typeface="宋体"/>
               </a:rPr>
               <a:t>P1</a:t>
             </a:r>
@@ -19058,8 +19058,8 @@
                 <a:solidFill>
                   <a:srgbClr val="171A20"/>
                 </a:solidFill>
-                <a:latin typeface="微软雅黑"/>
-                <a:ea typeface="微软雅黑"/>
+                <a:latin typeface="宋体"/>
+                <a:ea typeface="宋体"/>
               </a:rPr>
               <a:t>S56 价格已出、待客户签认</a:t>
             </a:r>
@@ -19104,8 +19104,8 @@
                 <a:solidFill>
                   <a:srgbClr val="6B7280"/>
                 </a:solidFill>
-                <a:latin typeface="微软雅黑"/>
-                <a:ea typeface="微软雅黑"/>
+                <a:latin typeface="宋体"/>
+                <a:ea typeface="宋体"/>
               </a:rPr>
               <a:t>13 件、单车 16 件：套成本 13.9319 / 套含税 19.2886（毛利率 18.4%）；首单 7 行已回填 ¥23,239.66。⚠️ 表单合计行 15.9771/18.0542 未乘单车用量</a:t>
             </a:r>
@@ -19150,8 +19150,8 @@
                 <a:solidFill>
                   <a:srgbClr val="171A20"/>
                 </a:solidFill>
-                <a:latin typeface="微软雅黑"/>
-                <a:ea typeface="微软雅黑"/>
+                <a:latin typeface="宋体"/>
+                <a:ea typeface="宋体"/>
               </a:rPr>
               <a:t>未经客户签认即无订单约束力；18.4% 低于此前 22.31% 报价口径，且 3 件负毛利/微利（C上吸音棉3 −22.1%、C下吸音棉1 −1.6%、C上吸音棉2 +1.8%）</a:t>
             </a:r>
@@ -19196,8 +19196,8 @@
                 <a:solidFill>
                   <a:srgbClr val="6B7280"/>
                 </a:solidFill>
-                <a:latin typeface="微软雅黑"/>
-                <a:ea typeface="微软雅黑"/>
+                <a:latin typeface="宋体"/>
+                <a:ea typeface="宋体"/>
               </a:rPr>
               <a:t>动作：</a:t>
             </a:r>
@@ -19206,8 +19206,8 @@
                 <a:solidFill>
                   <a:srgbClr val="B46A00"/>
                 </a:solidFill>
-                <a:latin typeface="微软雅黑"/>
-                <a:ea typeface="微软雅黑"/>
+                <a:latin typeface="宋体"/>
+                <a:ea typeface="宋体"/>
               </a:rPr>
               <a:t>本周内取得签认，同时提报 3 件低毛利件的工艺降本</a:t>
             </a:r>
@@ -19383,8 +19383,8 @@
                 <a:solidFill>
                   <a:srgbClr val="FFFFFF"/>
                 </a:solidFill>
-                <a:latin typeface="Arial"/>
-                <a:ea typeface="微软雅黑"/>
+                <a:latin typeface="宋体"/>
+                <a:ea typeface="宋体"/>
               </a:rPr>
               <a:t>P2</a:t>
             </a:r>
@@ -19426,8 +19426,8 @@
                 <a:solidFill>
                   <a:srgbClr val="171A20"/>
                 </a:solidFill>
-                <a:latin typeface="微软雅黑"/>
-                <a:ea typeface="微软雅黑"/>
+                <a:latin typeface="宋体"/>
+                <a:ea typeface="宋体"/>
               </a:rPr>
               <a:t>ROX01 定点价已下、合同与账期未落</a:t>
             </a:r>
@@ -19472,8 +19472,8 @@
                 <a:solidFill>
                   <a:srgbClr val="6B7280"/>
                 </a:solidFill>
-                <a:latin typeface="微软雅黑"/>
-                <a:ea typeface="微软雅黑"/>
+                <a:latin typeface="宋体"/>
+                <a:ea typeface="宋体"/>
               </a:rPr>
               <a:t>4 件含税 0.70/1.30/0.30/0.08，套含税 4.10、毛利率 11.0%；年量 12,000 套、年产值 4.35 万</a:t>
             </a:r>
@@ -19518,8 +19518,8 @@
                 <a:solidFill>
                   <a:srgbClr val="171A20"/>
                 </a:solidFill>
-                <a:latin typeface="微软雅黑"/>
-                <a:ea typeface="微软雅黑"/>
+                <a:latin typeface="宋体"/>
+                <a:ea typeface="宋体"/>
               </a:rPr>
               <a:t>毛利率仅 11%，且无合同与账期（90 天承兑）文本；Q3 已交 29,500 件、0.78 万</a:t>
             </a:r>
@@ -19564,8 +19564,8 @@
                 <a:solidFill>
                   <a:srgbClr val="6B7280"/>
                 </a:solidFill>
-                <a:latin typeface="微软雅黑"/>
-                <a:ea typeface="微软雅黑"/>
+                <a:latin typeface="宋体"/>
+                <a:ea typeface="宋体"/>
               </a:rPr>
               <a:t>动作：</a:t>
             </a:r>
@@ -19574,8 +19574,8 @@
                 <a:solidFill>
                   <a:srgbClr val="6B7280"/>
                 </a:solidFill>
-                <a:latin typeface="微软雅黑"/>
-                <a:ea typeface="微软雅黑"/>
+                <a:latin typeface="宋体"/>
+                <a:ea typeface="宋体"/>
               </a:rPr>
               <a:t>补合同与账期确认，按定点价对账</a:t>
             </a:r>
@@ -19751,8 +19751,8 @@
                 <a:solidFill>
                   <a:srgbClr val="FFFFFF"/>
                 </a:solidFill>
-                <a:latin typeface="Arial"/>
-                <a:ea typeface="微软雅黑"/>
+                <a:latin typeface="宋体"/>
+                <a:ea typeface="宋体"/>
               </a:rPr>
               <a:t>P1</a:t>
             </a:r>
@@ -19794,8 +19794,8 @@
                 <a:solidFill>
                   <a:srgbClr val="171A20"/>
                 </a:solidFill>
-                <a:latin typeface="微软雅黑"/>
-                <a:ea typeface="微软雅黑"/>
+                <a:latin typeface="宋体"/>
+                <a:ea typeface="宋体"/>
               </a:rPr>
               <a:t>ZH5EM 10 件供应商全「待定」</a:t>
             </a:r>
@@ -19840,8 +19840,8 @@
                 <a:solidFill>
                   <a:srgbClr val="6B7280"/>
                 </a:solidFill>
-                <a:latin typeface="微软雅黑"/>
-                <a:ea typeface="微软雅黑"/>
+                <a:latin typeface="宋体"/>
+                <a:ea typeface="宋体"/>
               </a:rPr>
               <a:t>8/27 定点后外协询价/送样启动，采购未确认（暂用宁波互盛、惠州兰谷）</a:t>
             </a:r>
@@ -19886,8 +19886,8 @@
                 <a:solidFill>
                   <a:srgbClr val="171A20"/>
                 </a:solidFill>
-                <a:latin typeface="微软雅黑"/>
-                <a:ea typeface="微软雅黑"/>
+                <a:latin typeface="宋体"/>
+                <a:ea typeface="宋体"/>
               </a:rPr>
               <a:t>影响 OTS 与量产爬坡；供应商未定则成本与交期都不可控</a:t>
             </a:r>
@@ -19932,8 +19932,8 @@
                 <a:solidFill>
                   <a:srgbClr val="6B7280"/>
                 </a:solidFill>
-                <a:latin typeface="微软雅黑"/>
-                <a:ea typeface="微软雅黑"/>
+                <a:latin typeface="宋体"/>
+                <a:ea typeface="宋体"/>
               </a:rPr>
               <a:t>动作：</a:t>
             </a:r>
@@ -19942,8 +19942,8 @@
                 <a:solidFill>
                   <a:srgbClr val="B46A00"/>
                 </a:solidFill>
-                <a:latin typeface="微软雅黑"/>
-                <a:ea typeface="微软雅黑"/>
+                <a:latin typeface="宋体"/>
+                <a:ea typeface="宋体"/>
               </a:rPr>
               <a:t>催采购确认并锁定样品来源</a:t>
             </a:r>
@@ -20119,8 +20119,8 @@
                 <a:solidFill>
                   <a:srgbClr val="FFFFFF"/>
                 </a:solidFill>
-                <a:latin typeface="Arial"/>
-                <a:ea typeface="微软雅黑"/>
+                <a:latin typeface="宋体"/>
+                <a:ea typeface="宋体"/>
               </a:rPr>
               <a:t>P2</a:t>
             </a:r>
@@ -20162,8 +20162,8 @@
                 <a:solidFill>
                   <a:srgbClr val="171A20"/>
                 </a:solidFill>
-                <a:latin typeface="微软雅黑"/>
-                <a:ea typeface="微软雅黑"/>
+                <a:latin typeface="宋体"/>
+                <a:ea typeface="宋体"/>
               </a:rPr>
               <a:t>项目数据口径待统一</a:t>
             </a:r>
@@ -20208,8 +20208,8 @@
                 <a:solidFill>
                   <a:srgbClr val="6B7280"/>
                 </a:solidFill>
-                <a:latin typeface="微软雅黑"/>
-                <a:ea typeface="微软雅黑"/>
+                <a:latin typeface="宋体"/>
+                <a:ea typeface="宋体"/>
               </a:rPr>
               <a:t>项目表零件数合计 108，明细表 91（VFe32-3M 胶带 16 件、BS5PR 1 件无明细行）；S56 已取消件 51-12723 仍在明细</a:t>
             </a:r>
@@ -20254,8 +20254,8 @@
                 <a:solidFill>
                   <a:srgbClr val="171A20"/>
                 </a:solidFill>
-                <a:latin typeface="微软雅黑"/>
-                <a:ea typeface="微软雅黑"/>
+                <a:latin typeface="宋体"/>
+                <a:ea typeface="宋体"/>
               </a:rPr>
               <a:t>汇报与看板数字不一致，对外易被抓口径</a:t>
             </a:r>
@@ -20300,8 +20300,8 @@
                 <a:solidFill>
                   <a:srgbClr val="6B7280"/>
                 </a:solidFill>
-                <a:latin typeface="微软雅黑"/>
-                <a:ea typeface="微软雅黑"/>
+                <a:latin typeface="宋体"/>
+                <a:ea typeface="宋体"/>
               </a:rPr>
               <a:t>动作：</a:t>
             </a:r>
@@ -20310,8 +20310,8 @@
                 <a:solidFill>
                   <a:srgbClr val="6B7280"/>
                 </a:solidFill>
-                <a:latin typeface="微软雅黑"/>
-                <a:ea typeface="微软雅黑"/>
+                <a:latin typeface="宋体"/>
+                <a:ea typeface="宋体"/>
               </a:rPr>
               <a:t>下版统一：明细为准或补齐明细</a:t>
             </a:r>
@@ -20459,8 +20459,8 @@
                 <a:solidFill>
                   <a:srgbClr val="171A20"/>
                 </a:solidFill>
-                <a:latin typeface="微软雅黑"/>
-                <a:ea typeface="微软雅黑"/>
+                <a:latin typeface="宋体"/>
+                <a:ea typeface="宋体"/>
               </a:rPr>
               <a:t>三季度推进中的难点与我的处理</a:t>
             </a:r>
@@ -20502,8 +20502,8 @@
                 <a:solidFill>
                   <a:srgbClr val="6B7280"/>
                 </a:solidFill>
-                <a:latin typeface="微软雅黑"/>
-                <a:ea typeface="微软雅黑"/>
+                <a:latin typeface="宋体"/>
+                <a:ea typeface="宋体"/>
               </a:rPr>
               <a:t>4 个卡点：3 个已解决，1 个仍待拍板</a:t>
             </a:r>
@@ -20589,8 +20589,8 @@
                 <a:solidFill>
                   <a:srgbClr val="6B7280"/>
                 </a:solidFill>
-                <a:latin typeface="Arial"/>
-                <a:ea typeface="微软雅黑"/>
+                <a:latin typeface="宋体"/>
+                <a:ea typeface="宋体"/>
               </a:rPr>
               <a:t>9 / 10</a:t>
             </a:r>
@@ -20632,8 +20632,8 @@
                 <a:solidFill>
                   <a:srgbClr val="6B7280"/>
                 </a:solidFill>
-                <a:latin typeface="微软雅黑"/>
-                <a:ea typeface="微软雅黑"/>
+                <a:latin typeface="宋体"/>
+                <a:ea typeface="宋体"/>
               </a:rPr>
               <a:t>常州臻畅汽车配件有限公司 · 上海泰瑞电子科技有限公司</a:t>
             </a:r>
@@ -20719,8 +20719,8 @@
                 <a:solidFill>
                   <a:srgbClr val="FFFFFF"/>
                 </a:solidFill>
-                <a:latin typeface="微软雅黑"/>
-                <a:ea typeface="微软雅黑"/>
+                <a:latin typeface="宋体"/>
+                <a:ea typeface="宋体"/>
               </a:rPr>
               <a:t>卡点</a:t>
             </a:r>
@@ -20762,8 +20762,8 @@
                 <a:solidFill>
                   <a:srgbClr val="FFFFFF"/>
                 </a:solidFill>
-                <a:latin typeface="微软雅黑"/>
-                <a:ea typeface="微软雅黑"/>
+                <a:latin typeface="宋体"/>
+                <a:ea typeface="宋体"/>
               </a:rPr>
               <a:t>现象（事实）</a:t>
             </a:r>
@@ -20805,8 +20805,8 @@
                 <a:solidFill>
                   <a:srgbClr val="FFFFFF"/>
                 </a:solidFill>
-                <a:latin typeface="微软雅黑"/>
-                <a:ea typeface="微软雅黑"/>
+                <a:latin typeface="宋体"/>
+                <a:ea typeface="宋体"/>
               </a:rPr>
               <a:t>影响</a:t>
             </a:r>
@@ -20848,8 +20848,8 @@
                 <a:solidFill>
                   <a:srgbClr val="FFFFFF"/>
                 </a:solidFill>
-                <a:latin typeface="微软雅黑"/>
-                <a:ea typeface="微软雅黑"/>
+                <a:latin typeface="宋体"/>
+                <a:ea typeface="宋体"/>
               </a:rPr>
               <a:t>我的处理</a:t>
             </a:r>
@@ -20891,8 +20891,8 @@
                 <a:solidFill>
                   <a:srgbClr val="FFFFFF"/>
                 </a:solidFill>
-                <a:latin typeface="微软雅黑"/>
-                <a:ea typeface="微软雅黑"/>
+                <a:latin typeface="宋体"/>
+                <a:ea typeface="宋体"/>
               </a:rPr>
               <a:t>结果</a:t>
             </a:r>
@@ -21071,8 +21071,8 @@
                 <a:solidFill>
                   <a:srgbClr val="E82127"/>
                 </a:solidFill>
-                <a:latin typeface="微软雅黑"/>
-                <a:ea typeface="微软雅黑"/>
+                <a:latin typeface="宋体"/>
+                <a:ea typeface="宋体"/>
               </a:rPr>
               <a:t>报价权</a:t>
             </a:r>
@@ -21117,8 +21117,8 @@
                 <a:solidFill>
                   <a:srgbClr val="171A20"/>
                 </a:solidFill>
-                <a:latin typeface="微软雅黑"/>
-                <a:ea typeface="微软雅黑"/>
+                <a:latin typeface="宋体"/>
+                <a:ea typeface="宋体"/>
               </a:rPr>
               <a:t>10/13 内部回复：设备无法满足自制，需外协报价与总成报价同步；并称「报价方式无需销售过问，内部综合评估好后由财务输出给销售」</a:t>
             </a:r>
@@ -21163,8 +21163,8 @@
                 <a:solidFill>
                   <a:srgbClr val="171A20"/>
                 </a:solidFill>
-                <a:latin typeface="微软雅黑"/>
-                <a:ea typeface="微软雅黑"/>
+                <a:latin typeface="宋体"/>
+                <a:ea typeface="宋体"/>
               </a:rPr>
               <a:t>销售对客户是唯一口径责任人：价格不是自己出的，既解释不了、也担不起报错责任；外协价含毛利+三项费用，不能当自制成本基准</a:t>
             </a:r>
@@ -21209,8 +21209,8 @@
                 <a:solidFill>
                   <a:srgbClr val="171A20"/>
                 </a:solidFill>
-                <a:latin typeface="微软雅黑"/>
-                <a:ea typeface="微软雅黑"/>
+                <a:latin typeface="宋体"/>
+                <a:ea typeface="宋体"/>
               </a:rPr>
               <a:t>书面回复不接受：这两个零件要「自制口径」；外协只作参考且须脱敏；坚持三权——口径确认权、过程稿抄送、报错责任归属</a:t>
             </a:r>
@@ -21255,8 +21255,8 @@
                 <a:solidFill>
                   <a:srgbClr val="E82127"/>
                 </a:solidFill>
-                <a:latin typeface="微软雅黑"/>
-                <a:ea typeface="微软雅黑"/>
+                <a:latin typeface="宋体"/>
+                <a:ea typeface="宋体"/>
               </a:rPr>
               <a:t>当天 16:53 拿到自制成本表（未加利润），10/16 按期交付客户</a:t>
             </a:r>
@@ -21435,8 +21435,8 @@
                 <a:solidFill>
                   <a:srgbClr val="B46A00"/>
                 </a:solidFill>
-                <a:latin typeface="微软雅黑"/>
-                <a:ea typeface="微软雅黑"/>
+                <a:latin typeface="宋体"/>
+                <a:ea typeface="宋体"/>
               </a:rPr>
               <a:t>外协范围</a:t>
             </a:r>
@@ -21481,8 +21481,8 @@
                 <a:solidFill>
                   <a:srgbClr val="171A20"/>
                 </a:solidFill>
-                <a:latin typeface="微软雅黑"/>
-                <a:ea typeface="微软雅黑"/>
+                <a:latin typeface="宋体"/>
+                <a:ea typeface="宋体"/>
               </a:rPr>
               <a:t>报价申请同时发给外协，未界定是「整个总成」还是「BOM 子零件」</a:t>
             </a:r>
@@ -21527,8 +21527,8 @@
                 <a:solidFill>
                   <a:srgbClr val="171A20"/>
                 </a:solidFill>
-                <a:latin typeface="微软雅黑"/>
-                <a:ea typeface="微软雅黑"/>
+                <a:latin typeface="宋体"/>
+                <a:ea typeface="宋体"/>
               </a:rPr>
               <a:t>范围不清价格不可比；把总成 BOM 与年量交出去，等于项目信息外泄、引入竞争</a:t>
             </a:r>
@@ -21573,8 +21573,8 @@
                 <a:solidFill>
                   <a:srgbClr val="171A20"/>
                 </a:solidFill>
-                <a:latin typeface="微软雅黑"/>
-                <a:ea typeface="微软雅黑"/>
+                <a:latin typeface="宋体"/>
+                <a:ea typeface="宋体"/>
               </a:rPr>
               <a:t>先问清范围再外协；外协只给单件信息，不给总成/项目/年量</a:t>
             </a:r>
@@ -21619,8 +21619,8 @@
                 <a:solidFill>
                   <a:srgbClr val="B46A00"/>
                 </a:solidFill>
-                <a:latin typeface="微软雅黑"/>
-                <a:ea typeface="微软雅黑"/>
+                <a:latin typeface="宋体"/>
+                <a:ea typeface="宋体"/>
               </a:rPr>
               <a:t>明确以自制为主口径，外协仅参考</a:t>
             </a:r>
@@ -21799,8 +21799,8 @@
                 <a:solidFill>
                   <a:srgbClr val="1D4ED8"/>
                 </a:solidFill>
-                <a:latin typeface="微软雅黑"/>
-                <a:ea typeface="微软雅黑"/>
+                <a:latin typeface="宋体"/>
+                <a:ea typeface="宋体"/>
               </a:rPr>
               <a:t>流程卡点</a:t>
             </a:r>
@@ -21845,8 +21845,8 @@
                 <a:solidFill>
                   <a:srgbClr val="171A20"/>
                 </a:solidFill>
-                <a:latin typeface="微软雅黑"/>
-                <a:ea typeface="微软雅黑"/>
+                <a:latin typeface="宋体"/>
+                <a:ea typeface="宋体"/>
               </a:rPr>
               <a:t>9/30 拟好的《10/18–19 会议确认函》至今仍在草稿箱，无人拍板发出</a:t>
             </a:r>
@@ -21891,8 +21891,8 @@
                 <a:solidFill>
                   <a:srgbClr val="171A20"/>
                 </a:solidFill>
-                <a:latin typeface="微软雅黑"/>
-                <a:ea typeface="微软雅黑"/>
+                <a:latin typeface="宋体"/>
+                <a:ea typeface="宋体"/>
               </a:rPr>
               <a:t>会议的时间、参会人、议题都无书面确认，会后口径容易反复</a:t>
             </a:r>
@@ -21937,8 +21937,8 @@
                 <a:solidFill>
                   <a:srgbClr val="171A20"/>
                 </a:solidFill>
-                <a:latin typeface="微软雅黑"/>
-                <a:ea typeface="微软雅黑"/>
+                <a:latin typeface="宋体"/>
+                <a:ea typeface="宋体"/>
               </a:rPr>
               <a:t>文本已备好待发，需上级确认后由销售发出</a:t>
             </a:r>
@@ -21983,8 +21983,8 @@
                 <a:solidFill>
                   <a:srgbClr val="1D4ED8"/>
                 </a:solidFill>
-                <a:latin typeface="微软雅黑"/>
-                <a:ea typeface="微软雅黑"/>
+                <a:latin typeface="宋体"/>
+                <a:ea typeface="宋体"/>
               </a:rPr>
               <a:t>待拍板（P0）</a:t>
             </a:r>
@@ -22163,8 +22163,8 @@
                 <a:solidFill>
                   <a:srgbClr val="6B7280"/>
                 </a:solidFill>
-                <a:latin typeface="微软雅黑"/>
-                <a:ea typeface="微软雅黑"/>
+                <a:latin typeface="宋体"/>
+                <a:ea typeface="宋体"/>
               </a:rPr>
               <a:t>客户侧倒挂</a:t>
             </a:r>
@@ -22209,8 +22209,8 @@
                 <a:solidFill>
                   <a:srgbClr val="171A20"/>
                 </a:solidFill>
-                <a:latin typeface="微软雅黑"/>
-                <a:ea typeface="微软雅黑"/>
+                <a:latin typeface="宋体"/>
+                <a:ea typeface="宋体"/>
               </a:rPr>
               <a:t>S56 首单 12,040 件单价为 0 即下单；ROX01 先交付后定价；EHEA 排产后出现「大质量问题」</a:t>
             </a:r>
@@ -22255,8 +22255,8 @@
                 <a:solidFill>
                   <a:srgbClr val="171A20"/>
                 </a:solidFill>
-                <a:latin typeface="微软雅黑"/>
-                <a:ea typeface="微软雅黑"/>
+                <a:latin typeface="宋体"/>
+                <a:ea typeface="宋体"/>
               </a:rPr>
               <a:t>收入确认与对账被动，季度数字需要反复修订</a:t>
             </a:r>
@@ -22301,8 +22301,8 @@
                 <a:solidFill>
                   <a:srgbClr val="171A20"/>
                 </a:solidFill>
-                <a:latin typeface="微软雅黑"/>
-                <a:ea typeface="微软雅黑"/>
+                <a:latin typeface="宋体"/>
+                <a:ea typeface="宋体"/>
               </a:rPr>
               <a:t>按可核数量交付，价格与质量书面闭环后再确认收入</a:t>
             </a:r>
@@ -22347,8 +22347,8 @@
                 <a:solidFill>
                   <a:srgbClr val="6B7280"/>
                 </a:solidFill>
-                <a:latin typeface="微软雅黑"/>
-                <a:ea typeface="微软雅黑"/>
+                <a:latin typeface="宋体"/>
+                <a:ea typeface="宋体"/>
               </a:rPr>
               <a:t>S56、ROX01 已定价；EHEA 本周闭环</a:t>
             </a:r>
@@ -22439,8 +22439,8 @@
                 <a:solidFill>
                   <a:srgbClr val="E82127"/>
                 </a:solidFill>
-                <a:latin typeface="微软雅黑"/>
-                <a:ea typeface="微软雅黑"/>
+                <a:latin typeface="宋体"/>
+                <a:ea typeface="宋体"/>
               </a:rPr>
               <a:t>我的立场：</a:t>
             </a:r>
@@ -22449,8 +22449,8 @@
                 <a:solidFill>
                   <a:srgbClr val="171A20"/>
                 </a:solidFill>
-                <a:latin typeface="微软雅黑"/>
-                <a:ea typeface="微软雅黑"/>
+                <a:latin typeface="宋体"/>
+                <a:ea typeface="宋体"/>
               </a:rPr>
               <a:t>对外报价必须由销售对口径负责。内部可以提供成本、可以参与评估，但不能替代销售定价与对外承诺——否则出了错，没人能对客户交代。</a:t>
             </a:r>
